--- a/templates/sample.pptx
+++ b/templates/sample.pptx
@@ -3783,7 +3783,7 @@
           <a:p>
             <a:fld id="{8B1AF6D7-0F32-4F05-B21A-8AF0CB26F94C}" type="datetimeFigureOut">
               <a:rPr lang="en-IN" smtClean="0"/>
-              <a:t>26-06-2026</a:t>
+              <a:t>07-07-2026</a:t>
             </a:fld>
             <a:endParaRPr lang="en-IN"/>
           </a:p>
@@ -4200,7 +4200,7 @@
           <a:p>
             <a:fld id="{0490EA95-AFA9-47FA-B067-612933D1D62E}" type="datetimeFigureOut">
               <a:rPr lang="en-IN" smtClean="0"/>
-              <a:t>26-06-2026</a:t>
+              <a:t>07-07-2026</a:t>
             </a:fld>
             <a:endParaRPr lang="en-IN"/>
           </a:p>
@@ -4400,7 +4400,7 @@
           <a:p>
             <a:fld id="{0490EA95-AFA9-47FA-B067-612933D1D62E}" type="datetimeFigureOut">
               <a:rPr lang="en-IN" smtClean="0"/>
-              <a:t>26-06-2026</a:t>
+              <a:t>07-07-2026</a:t>
             </a:fld>
             <a:endParaRPr lang="en-IN"/>
           </a:p>
@@ -4610,7 +4610,7 @@
           <a:p>
             <a:fld id="{0490EA95-AFA9-47FA-B067-612933D1D62E}" type="datetimeFigureOut">
               <a:rPr lang="en-IN" smtClean="0"/>
-              <a:t>26-06-2026</a:t>
+              <a:t>07-07-2026</a:t>
             </a:fld>
             <a:endParaRPr lang="en-IN"/>
           </a:p>
@@ -4810,7 +4810,7 @@
           <a:p>
             <a:fld id="{0490EA95-AFA9-47FA-B067-612933D1D62E}" type="datetimeFigureOut">
               <a:rPr lang="en-IN" smtClean="0"/>
-              <a:t>26-06-2026</a:t>
+              <a:t>07-07-2026</a:t>
             </a:fld>
             <a:endParaRPr lang="en-IN"/>
           </a:p>
@@ -5086,7 +5086,7 @@
           <a:p>
             <a:fld id="{0490EA95-AFA9-47FA-B067-612933D1D62E}" type="datetimeFigureOut">
               <a:rPr lang="en-IN" smtClean="0"/>
-              <a:t>26-06-2026</a:t>
+              <a:t>07-07-2026</a:t>
             </a:fld>
             <a:endParaRPr lang="en-IN"/>
           </a:p>
@@ -5354,7 +5354,7 @@
           <a:p>
             <a:fld id="{0490EA95-AFA9-47FA-B067-612933D1D62E}" type="datetimeFigureOut">
               <a:rPr lang="en-IN" smtClean="0"/>
-              <a:t>26-06-2026</a:t>
+              <a:t>07-07-2026</a:t>
             </a:fld>
             <a:endParaRPr lang="en-IN"/>
           </a:p>
@@ -5769,7 +5769,7 @@
           <a:p>
             <a:fld id="{0490EA95-AFA9-47FA-B067-612933D1D62E}" type="datetimeFigureOut">
               <a:rPr lang="en-IN" smtClean="0"/>
-              <a:t>26-06-2026</a:t>
+              <a:t>07-07-2026</a:t>
             </a:fld>
             <a:endParaRPr lang="en-IN"/>
           </a:p>
@@ -5911,7 +5911,7 @@
           <a:p>
             <a:fld id="{0490EA95-AFA9-47FA-B067-612933D1D62E}" type="datetimeFigureOut">
               <a:rPr lang="en-IN" smtClean="0"/>
-              <a:t>26-06-2026</a:t>
+              <a:t>07-07-2026</a:t>
             </a:fld>
             <a:endParaRPr lang="en-IN"/>
           </a:p>
@@ -6024,7 +6024,7 @@
           <a:p>
             <a:fld id="{0490EA95-AFA9-47FA-B067-612933D1D62E}" type="datetimeFigureOut">
               <a:rPr lang="en-IN" smtClean="0"/>
-              <a:t>26-06-2026</a:t>
+              <a:t>07-07-2026</a:t>
             </a:fld>
             <a:endParaRPr lang="en-IN"/>
           </a:p>
@@ -6337,7 +6337,7 @@
           <a:p>
             <a:fld id="{0490EA95-AFA9-47FA-B067-612933D1D62E}" type="datetimeFigureOut">
               <a:rPr lang="en-IN" smtClean="0"/>
-              <a:t>26-06-2026</a:t>
+              <a:t>07-07-2026</a:t>
             </a:fld>
             <a:endParaRPr lang="en-IN"/>
           </a:p>
@@ -6626,7 +6626,7 @@
           <a:p>
             <a:fld id="{0490EA95-AFA9-47FA-B067-612933D1D62E}" type="datetimeFigureOut">
               <a:rPr lang="en-IN" smtClean="0"/>
-              <a:t>26-06-2026</a:t>
+              <a:t>07-07-2026</a:t>
             </a:fld>
             <a:endParaRPr lang="en-IN"/>
           </a:p>
@@ -6869,7 +6869,7 @@
           <a:p>
             <a:fld id="{0490EA95-AFA9-47FA-B067-612933D1D62E}" type="datetimeFigureOut">
               <a:rPr lang="en-IN" smtClean="0"/>
-              <a:t>26-06-2026</a:t>
+              <a:t>07-07-2026</a:t>
             </a:fld>
             <a:endParaRPr lang="en-IN"/>
           </a:p>
@@ -8785,6 +8785,415 @@
           </a:p>
         </p:txBody>
       </p:sp>
+      <p:graphicFrame>
+        <p:nvGraphicFramePr>
+          <p:cNvPr id="2" name="Table 1">
+            <a:extLst>
+              <a:ext uri="{FF2B5EF4-FFF2-40B4-BE49-F238E27FC236}">
+                <a16:creationId xmlns:a16="http://schemas.microsoft.com/office/drawing/2014/main" id="{52CC2CEC-1EA9-8E5D-4708-04927606CDAC}"/>
+              </a:ext>
+            </a:extLst>
+          </p:cNvPr>
+          <p:cNvGraphicFramePr>
+            <a:graphicFrameLocks noGrp="1"/>
+          </p:cNvGraphicFramePr>
+          <p:nvPr>
+            <p:extLst>
+              <p:ext uri="{D42A27DB-BD31-4B8C-83A1-F6EECF244321}">
+                <p14:modId xmlns:p14="http://schemas.microsoft.com/office/powerpoint/2010/main" val="1004563365"/>
+              </p:ext>
+            </p:extLst>
+          </p:nvPr>
+        </p:nvGraphicFramePr>
+        <p:xfrm>
+          <a:off x="6096000" y="40957"/>
+          <a:ext cx="4113823" cy="640080"/>
+        </p:xfrm>
+        <a:graphic>
+          <a:graphicData uri="http://schemas.openxmlformats.org/drawingml/2006/table">
+            <a:tbl>
+              <a:tblPr firstRow="1" bandRow="1">
+                <a:tableStyleId>{5C22544A-7EE6-4342-B048-85BDC9FD1C3A}</a:tableStyleId>
+              </a:tblPr>
+              <a:tblGrid>
+                <a:gridCol w="587689">
+                  <a:extLst>
+                    <a:ext uri="{9D8B030D-6E8A-4147-A177-3AD203B41FA5}">
+                      <a16:colId xmlns:a16="http://schemas.microsoft.com/office/drawing/2014/main" val="597839494"/>
+                    </a:ext>
+                  </a:extLst>
+                </a:gridCol>
+                <a:gridCol w="587689">
+                  <a:extLst>
+                    <a:ext uri="{9D8B030D-6E8A-4147-A177-3AD203B41FA5}">
+                      <a16:colId xmlns:a16="http://schemas.microsoft.com/office/drawing/2014/main" val="2965758537"/>
+                    </a:ext>
+                  </a:extLst>
+                </a:gridCol>
+                <a:gridCol w="587689">
+                  <a:extLst>
+                    <a:ext uri="{9D8B030D-6E8A-4147-A177-3AD203B41FA5}">
+                      <a16:colId xmlns:a16="http://schemas.microsoft.com/office/drawing/2014/main" val="985599110"/>
+                    </a:ext>
+                  </a:extLst>
+                </a:gridCol>
+                <a:gridCol w="587689">
+                  <a:extLst>
+                    <a:ext uri="{9D8B030D-6E8A-4147-A177-3AD203B41FA5}">
+                      <a16:colId xmlns:a16="http://schemas.microsoft.com/office/drawing/2014/main" val="2503815855"/>
+                    </a:ext>
+                  </a:extLst>
+                </a:gridCol>
+                <a:gridCol w="587689">
+                  <a:extLst>
+                    <a:ext uri="{9D8B030D-6E8A-4147-A177-3AD203B41FA5}">
+                      <a16:colId xmlns:a16="http://schemas.microsoft.com/office/drawing/2014/main" val="1132694783"/>
+                    </a:ext>
+                  </a:extLst>
+                </a:gridCol>
+                <a:gridCol w="587689">
+                  <a:extLst>
+                    <a:ext uri="{9D8B030D-6E8A-4147-A177-3AD203B41FA5}">
+                      <a16:colId xmlns:a16="http://schemas.microsoft.com/office/drawing/2014/main" val="870538356"/>
+                    </a:ext>
+                  </a:extLst>
+                </a:gridCol>
+                <a:gridCol w="587689">
+                  <a:extLst>
+                    <a:ext uri="{9D8B030D-6E8A-4147-A177-3AD203B41FA5}">
+                      <a16:colId xmlns:a16="http://schemas.microsoft.com/office/drawing/2014/main" val="140413072"/>
+                    </a:ext>
+                  </a:extLst>
+                </a:gridCol>
+              </a:tblGrid>
+              <a:tr h="0">
+                <a:tc gridSpan="2">
+                  <a:txBody>
+                    <a:bodyPr/>
+                    <a:lstStyle/>
+                    <a:p>
+                      <a:r>
+                        <a:rPr lang="en-US" sz="600" dirty="0"/>
+                        <a:t>Board </a:t>
+                      </a:r>
+                      <a:r>
+                        <a:rPr lang="en-US" sz="600" dirty="0" err="1"/>
+                        <a:t>Compostion</a:t>
+                      </a:r>
+                      <a:r>
+                        <a:rPr lang="en-US" sz="600" dirty="0"/>
+                        <a:t> Data</a:t>
+                      </a:r>
+                      <a:endParaRPr lang="en-IN" sz="600" dirty="0"/>
+                    </a:p>
+                  </a:txBody>
+                  <a:tcPr/>
+                </a:tc>
+                <a:tc hMerge="1">
+                  <a:txBody>
+                    <a:bodyPr/>
+                    <a:lstStyle/>
+                    <a:p>
+                      <a:endParaRPr lang="en-IN" sz="600" dirty="0"/>
+                    </a:p>
+                  </a:txBody>
+                  <a:tcPr/>
+                </a:tc>
+                <a:tc gridSpan="2">
+                  <a:txBody>
+                    <a:bodyPr/>
+                    <a:lstStyle/>
+                    <a:p>
+                      <a:r>
+                        <a:rPr lang="en-US" sz="600" dirty="0"/>
+                        <a:t>Start Date: MMMM-YYYY</a:t>
+                      </a:r>
+                      <a:endParaRPr lang="en-IN" sz="600" dirty="0"/>
+                    </a:p>
+                  </a:txBody>
+                  <a:tcPr/>
+                </a:tc>
+                <a:tc hMerge="1">
+                  <a:txBody>
+                    <a:bodyPr/>
+                    <a:lstStyle/>
+                    <a:p>
+                      <a:endParaRPr lang="en-IN" sz="600" dirty="0"/>
+                    </a:p>
+                  </a:txBody>
+                  <a:tcPr/>
+                </a:tc>
+                <a:tc gridSpan="3">
+                  <a:txBody>
+                    <a:bodyPr/>
+                    <a:lstStyle/>
+                    <a:p>
+                      <a:pPr marL="0" marR="0" lvl="0" indent="0" algn="l" defTabSz="914400" rtl="0" eaLnBrk="1" fontAlgn="auto" latinLnBrk="0" hangingPunct="1">
+                        <a:lnSpc>
+                          <a:spcPct val="100000"/>
+                        </a:lnSpc>
+                        <a:spcBef>
+                          <a:spcPts val="0"/>
+                        </a:spcBef>
+                        <a:spcAft>
+                          <a:spcPts val="0"/>
+                        </a:spcAft>
+                        <a:buClrTx/>
+                        <a:buSzTx/>
+                        <a:buFontTx/>
+                        <a:buNone/>
+                        <a:tabLst/>
+                        <a:defRPr/>
+                      </a:pPr>
+                      <a:r>
+                        <a:rPr lang="en-US" sz="600" dirty="0"/>
+                        <a:t>End Date: MMMM-YYYY</a:t>
+                      </a:r>
+                      <a:endParaRPr lang="en-IN" sz="600" dirty="0"/>
+                    </a:p>
+                  </a:txBody>
+                  <a:tcPr/>
+                </a:tc>
+                <a:tc hMerge="1">
+                  <a:txBody>
+                    <a:bodyPr/>
+                    <a:lstStyle/>
+                    <a:p>
+                      <a:endParaRPr lang="en-IN" sz="600" dirty="0"/>
+                    </a:p>
+                  </a:txBody>
+                  <a:tcPr/>
+                </a:tc>
+                <a:tc hMerge="1">
+                  <a:txBody>
+                    <a:bodyPr/>
+                    <a:lstStyle/>
+                    <a:p>
+                      <a:endParaRPr lang="en-IN" sz="600" dirty="0"/>
+                    </a:p>
+                  </a:txBody>
+                  <a:tcPr/>
+                </a:tc>
+                <a:extLst>
+                  <a:ext uri="{0D108BD9-81ED-4DB2-BD59-A6C34878D82A}">
+                    <a16:rowId xmlns:a16="http://schemas.microsoft.com/office/drawing/2014/main" val="611380770"/>
+                  </a:ext>
+                </a:extLst>
+              </a:tr>
+              <a:tr h="0">
+                <a:tc>
+                  <a:txBody>
+                    <a:bodyPr/>
+                    <a:lstStyle/>
+                    <a:p>
+                      <a:r>
+                        <a:rPr lang="en-US" sz="600" dirty="0"/>
+                        <a:t>NAME</a:t>
+                      </a:r>
+                      <a:endParaRPr lang="en-IN" sz="600" dirty="0"/>
+                    </a:p>
+                  </a:txBody>
+                  <a:tcPr/>
+                </a:tc>
+                <a:tc>
+                  <a:txBody>
+                    <a:bodyPr/>
+                    <a:lstStyle/>
+                    <a:p>
+                      <a:r>
+                        <a:rPr lang="en-US" sz="600" dirty="0"/>
+                        <a:t>PIF EMPLOYEE</a:t>
+                      </a:r>
+                      <a:endParaRPr lang="en-IN" sz="600" dirty="0"/>
+                    </a:p>
+                  </a:txBody>
+                  <a:tcPr/>
+                </a:tc>
+                <a:tc>
+                  <a:txBody>
+                    <a:bodyPr/>
+                    <a:lstStyle/>
+                    <a:p>
+                      <a:r>
+                        <a:rPr lang="en-US" sz="600" dirty="0"/>
+                        <a:t>OTHER PIF REP.</a:t>
+                      </a:r>
+                      <a:endParaRPr lang="en-IN" sz="600" dirty="0"/>
+                    </a:p>
+                  </a:txBody>
+                  <a:tcPr/>
+                </a:tc>
+                <a:tc>
+                  <a:txBody>
+                    <a:bodyPr/>
+                    <a:lstStyle/>
+                    <a:p>
+                      <a:r>
+                        <a:rPr lang="en-US" sz="600" dirty="0"/>
+                        <a:t>BOARD</a:t>
+                      </a:r>
+                      <a:endParaRPr lang="en-IN" sz="600" dirty="0"/>
+                    </a:p>
+                  </a:txBody>
+                  <a:tcPr/>
+                </a:tc>
+                <a:tc>
+                  <a:txBody>
+                    <a:bodyPr/>
+                    <a:lstStyle/>
+                    <a:p>
+                      <a:r>
+                        <a:rPr lang="en-US" sz="600" dirty="0"/>
+                        <a:t>EXCOM</a:t>
+                      </a:r>
+                      <a:endParaRPr lang="en-IN" sz="600" dirty="0"/>
+                    </a:p>
+                  </a:txBody>
+                  <a:tcPr/>
+                </a:tc>
+                <a:tc>
+                  <a:txBody>
+                    <a:bodyPr/>
+                    <a:lstStyle/>
+                    <a:p>
+                      <a:r>
+                        <a:rPr lang="en-US" sz="600" dirty="0"/>
+                        <a:t>AUDIT</a:t>
+                      </a:r>
+                      <a:endParaRPr lang="en-IN" sz="600" dirty="0"/>
+                    </a:p>
+                  </a:txBody>
+                  <a:tcPr/>
+                </a:tc>
+                <a:tc>
+                  <a:txBody>
+                    <a:bodyPr/>
+                    <a:lstStyle/>
+                    <a:p>
+                      <a:r>
+                        <a:rPr lang="en-US" sz="600" dirty="0"/>
+                        <a:t>NRC</a:t>
+                      </a:r>
+                      <a:endParaRPr lang="en-IN" sz="600" dirty="0"/>
+                    </a:p>
+                  </a:txBody>
+                  <a:tcPr/>
+                </a:tc>
+                <a:extLst>
+                  <a:ext uri="{0D108BD9-81ED-4DB2-BD59-A6C34878D82A}">
+                    <a16:rowId xmlns:a16="http://schemas.microsoft.com/office/drawing/2014/main" val="1077373604"/>
+                  </a:ext>
+                </a:extLst>
+              </a:tr>
+              <a:tr h="0">
+                <a:tc>
+                  <a:txBody>
+                    <a:bodyPr/>
+                    <a:lstStyle/>
+                    <a:p>
+                      <a:r>
+                        <a:rPr lang="en-US" sz="600" dirty="0"/>
+                        <a:t>a</a:t>
+                      </a:r>
+                      <a:endParaRPr lang="en-IN" sz="600" dirty="0"/>
+                    </a:p>
+                  </a:txBody>
+                  <a:tcPr/>
+                </a:tc>
+                <a:tc>
+                  <a:txBody>
+                    <a:bodyPr/>
+                    <a:lstStyle/>
+                    <a:p>
+                      <a:r>
+                        <a:rPr lang="en-US" sz="600" dirty="0"/>
+                        <a:t>A</a:t>
+                      </a:r>
+                      <a:endParaRPr lang="en-IN" sz="600" dirty="0"/>
+                    </a:p>
+                  </a:txBody>
+                  <a:tcPr/>
+                </a:tc>
+                <a:tc>
+                  <a:txBody>
+                    <a:bodyPr/>
+                    <a:lstStyle/>
+                    <a:p>
+                      <a:r>
+                        <a:rPr lang="en-US" sz="600" dirty="0"/>
+                        <a:t>A</a:t>
+                      </a:r>
+                      <a:endParaRPr lang="en-IN" sz="600" dirty="0"/>
+                    </a:p>
+                  </a:txBody>
+                  <a:tcPr/>
+                </a:tc>
+                <a:tc>
+                  <a:txBody>
+                    <a:bodyPr/>
+                    <a:lstStyle/>
+                    <a:p>
+                      <a:r>
+                        <a:rPr lang="en-US" sz="600" dirty="0"/>
+                        <a:t>A</a:t>
+                      </a:r>
+                      <a:endParaRPr lang="en-IN" sz="600" dirty="0"/>
+                    </a:p>
+                  </a:txBody>
+                  <a:tcPr/>
+                </a:tc>
+                <a:tc>
+                  <a:txBody>
+                    <a:bodyPr/>
+                    <a:lstStyle/>
+                    <a:p>
+                      <a:r>
+                        <a:rPr lang="en-US" sz="600" dirty="0"/>
+                        <a:t>A</a:t>
+                      </a:r>
+                      <a:endParaRPr lang="en-IN" sz="600" dirty="0"/>
+                    </a:p>
+                  </a:txBody>
+                  <a:tcPr/>
+                </a:tc>
+                <a:tc>
+                  <a:txBody>
+                    <a:bodyPr/>
+                    <a:lstStyle/>
+                    <a:p>
+                      <a:r>
+                        <a:rPr lang="en-US" sz="600" dirty="0"/>
+                        <a:t>A</a:t>
+                      </a:r>
+                      <a:endParaRPr lang="en-IN" sz="600" dirty="0"/>
+                    </a:p>
+                  </a:txBody>
+                  <a:tcPr/>
+                </a:tc>
+                <a:tc>
+                  <a:txBody>
+                    <a:bodyPr/>
+                    <a:lstStyle/>
+                    <a:p>
+                      <a:r>
+                        <a:rPr lang="en-US" sz="600" dirty="0"/>
+                        <a:t>a</a:t>
+                      </a:r>
+                      <a:endParaRPr lang="en-IN" sz="600" dirty="0"/>
+                    </a:p>
+                  </a:txBody>
+                  <a:tcPr/>
+                </a:tc>
+                <a:extLst>
+                  <a:ext uri="{0D108BD9-81ED-4DB2-BD59-A6C34878D82A}">
+                    <a16:rowId xmlns:a16="http://schemas.microsoft.com/office/drawing/2014/main" val="609257130"/>
+                  </a:ext>
+                </a:extLst>
+              </a:tr>
+            </a:tbl>
+          </a:graphicData>
+        </a:graphic>
+      </p:graphicFrame>
     </p:spTree>
     <p:extLst>
       <p:ext uri="{BB962C8B-B14F-4D97-AF65-F5344CB8AC3E}">

--- a/templates/sample.pptx
+++ b/templates/sample.pptx
@@ -3783,7 +3783,7 @@
           <a:p>
             <a:fld id="{8B1AF6D7-0F32-4F05-B21A-8AF0CB26F94C}" type="datetimeFigureOut">
               <a:rPr lang="en-IN" smtClean="0"/>
-              <a:t>07-07-2026</a:t>
+              <a:t>08-07-2026</a:t>
             </a:fld>
             <a:endParaRPr lang="en-IN"/>
           </a:p>
@@ -4200,7 +4200,7 @@
           <a:p>
             <a:fld id="{0490EA95-AFA9-47FA-B067-612933D1D62E}" type="datetimeFigureOut">
               <a:rPr lang="en-IN" smtClean="0"/>
-              <a:t>07-07-2026</a:t>
+              <a:t>08-07-2026</a:t>
             </a:fld>
             <a:endParaRPr lang="en-IN"/>
           </a:p>
@@ -4400,7 +4400,7 @@
           <a:p>
             <a:fld id="{0490EA95-AFA9-47FA-B067-612933D1D62E}" type="datetimeFigureOut">
               <a:rPr lang="en-IN" smtClean="0"/>
-              <a:t>07-07-2026</a:t>
+              <a:t>08-07-2026</a:t>
             </a:fld>
             <a:endParaRPr lang="en-IN"/>
           </a:p>
@@ -4610,7 +4610,7 @@
           <a:p>
             <a:fld id="{0490EA95-AFA9-47FA-B067-612933D1D62E}" type="datetimeFigureOut">
               <a:rPr lang="en-IN" smtClean="0"/>
-              <a:t>07-07-2026</a:t>
+              <a:t>08-07-2026</a:t>
             </a:fld>
             <a:endParaRPr lang="en-IN"/>
           </a:p>
@@ -4810,7 +4810,7 @@
           <a:p>
             <a:fld id="{0490EA95-AFA9-47FA-B067-612933D1D62E}" type="datetimeFigureOut">
               <a:rPr lang="en-IN" smtClean="0"/>
-              <a:t>07-07-2026</a:t>
+              <a:t>08-07-2026</a:t>
             </a:fld>
             <a:endParaRPr lang="en-IN"/>
           </a:p>
@@ -5086,7 +5086,7 @@
           <a:p>
             <a:fld id="{0490EA95-AFA9-47FA-B067-612933D1D62E}" type="datetimeFigureOut">
               <a:rPr lang="en-IN" smtClean="0"/>
-              <a:t>07-07-2026</a:t>
+              <a:t>08-07-2026</a:t>
             </a:fld>
             <a:endParaRPr lang="en-IN"/>
           </a:p>
@@ -5354,7 +5354,7 @@
           <a:p>
             <a:fld id="{0490EA95-AFA9-47FA-B067-612933D1D62E}" type="datetimeFigureOut">
               <a:rPr lang="en-IN" smtClean="0"/>
-              <a:t>07-07-2026</a:t>
+              <a:t>08-07-2026</a:t>
             </a:fld>
             <a:endParaRPr lang="en-IN"/>
           </a:p>
@@ -5769,7 +5769,7 @@
           <a:p>
             <a:fld id="{0490EA95-AFA9-47FA-B067-612933D1D62E}" type="datetimeFigureOut">
               <a:rPr lang="en-IN" smtClean="0"/>
-              <a:t>07-07-2026</a:t>
+              <a:t>08-07-2026</a:t>
             </a:fld>
             <a:endParaRPr lang="en-IN"/>
           </a:p>
@@ -5911,7 +5911,7 @@
           <a:p>
             <a:fld id="{0490EA95-AFA9-47FA-B067-612933D1D62E}" type="datetimeFigureOut">
               <a:rPr lang="en-IN" smtClean="0"/>
-              <a:t>07-07-2026</a:t>
+              <a:t>08-07-2026</a:t>
             </a:fld>
             <a:endParaRPr lang="en-IN"/>
           </a:p>
@@ -6024,7 +6024,7 @@
           <a:p>
             <a:fld id="{0490EA95-AFA9-47FA-B067-612933D1D62E}" type="datetimeFigureOut">
               <a:rPr lang="en-IN" smtClean="0"/>
-              <a:t>07-07-2026</a:t>
+              <a:t>08-07-2026</a:t>
             </a:fld>
             <a:endParaRPr lang="en-IN"/>
           </a:p>
@@ -6337,7 +6337,7 @@
           <a:p>
             <a:fld id="{0490EA95-AFA9-47FA-B067-612933D1D62E}" type="datetimeFigureOut">
               <a:rPr lang="en-IN" smtClean="0"/>
-              <a:t>07-07-2026</a:t>
+              <a:t>08-07-2026</a:t>
             </a:fld>
             <a:endParaRPr lang="en-IN"/>
           </a:p>
@@ -6626,7 +6626,7 @@
           <a:p>
             <a:fld id="{0490EA95-AFA9-47FA-B067-612933D1D62E}" type="datetimeFigureOut">
               <a:rPr lang="en-IN" smtClean="0"/>
-              <a:t>07-07-2026</a:t>
+              <a:t>08-07-2026</a:t>
             </a:fld>
             <a:endParaRPr lang="en-IN"/>
           </a:p>
@@ -6869,7 +6869,7 @@
           <a:p>
             <a:fld id="{0490EA95-AFA9-47FA-B067-612933D1D62E}" type="datetimeFigureOut">
               <a:rPr lang="en-IN" smtClean="0"/>
-              <a:t>07-07-2026</a:t>
+              <a:t>08-07-2026</a:t>
             </a:fld>
             <a:endParaRPr lang="en-IN"/>
           </a:p>
@@ -8787,10 +8787,10 @@
       </p:sp>
       <p:graphicFrame>
         <p:nvGraphicFramePr>
-          <p:cNvPr id="2" name="Table 1">
+          <p:cNvPr id="5" name="Board Data">
             <a:extLst>
               <a:ext uri="{FF2B5EF4-FFF2-40B4-BE49-F238E27FC236}">
-                <a16:creationId xmlns:a16="http://schemas.microsoft.com/office/drawing/2014/main" id="{52CC2CEC-1EA9-8E5D-4708-04927606CDAC}"/>
+                <a16:creationId xmlns:a16="http://schemas.microsoft.com/office/drawing/2014/main" id="{99E28619-E8A7-F0D4-9EA1-D7749B17D343}"/>
               </a:ext>
             </a:extLst>
           </p:cNvPr>
@@ -8800,393 +8800,1601 @@
           <p:nvPr>
             <p:extLst>
               <p:ext uri="{D42A27DB-BD31-4B8C-83A1-F6EECF244321}">
-                <p14:modId xmlns:p14="http://schemas.microsoft.com/office/powerpoint/2010/main" val="1004563365"/>
+                <p14:modId xmlns:p14="http://schemas.microsoft.com/office/powerpoint/2010/main" val="1162638668"/>
               </p:ext>
             </p:extLst>
           </p:nvPr>
         </p:nvGraphicFramePr>
         <p:xfrm>
-          <a:off x="6096000" y="40957"/>
-          <a:ext cx="4113823" cy="640080"/>
+          <a:off x="6941467" y="136525"/>
+          <a:ext cx="4334512" cy="457200"/>
         </p:xfrm>
         <a:graphic>
           <a:graphicData uri="http://schemas.openxmlformats.org/drawingml/2006/table">
             <a:tbl>
-              <a:tblPr firstRow="1" bandRow="1">
+              <a:tblPr firstRow="1">
                 <a:tableStyleId>{5C22544A-7EE6-4342-B048-85BDC9FD1C3A}</a:tableStyleId>
               </a:tblPr>
               <a:tblGrid>
-                <a:gridCol w="587689">
+                <a:gridCol w="1209002">
                   <a:extLst>
                     <a:ext uri="{9D8B030D-6E8A-4147-A177-3AD203B41FA5}">
-                      <a16:colId xmlns:a16="http://schemas.microsoft.com/office/drawing/2014/main" val="597839494"/>
+                      <a16:colId xmlns:a16="http://schemas.microsoft.com/office/drawing/2014/main" val="2710512592"/>
                     </a:ext>
                   </a:extLst>
                 </a:gridCol>
-                <a:gridCol w="587689">
+                <a:gridCol w="650631">
                   <a:extLst>
                     <a:ext uri="{9D8B030D-6E8A-4147-A177-3AD203B41FA5}">
-                      <a16:colId xmlns:a16="http://schemas.microsoft.com/office/drawing/2014/main" val="2965758537"/>
+                      <a16:colId xmlns:a16="http://schemas.microsoft.com/office/drawing/2014/main" val="3519371818"/>
                     </a:ext>
                   </a:extLst>
                 </a:gridCol>
-                <a:gridCol w="587689">
+                <a:gridCol w="703385">
                   <a:extLst>
                     <a:ext uri="{9D8B030D-6E8A-4147-A177-3AD203B41FA5}">
-                      <a16:colId xmlns:a16="http://schemas.microsoft.com/office/drawing/2014/main" val="985599110"/>
+                      <a16:colId xmlns:a16="http://schemas.microsoft.com/office/drawing/2014/main" val="4260604003"/>
                     </a:ext>
                   </a:extLst>
                 </a:gridCol>
-                <a:gridCol w="587689">
+                <a:gridCol w="422030">
                   <a:extLst>
                     <a:ext uri="{9D8B030D-6E8A-4147-A177-3AD203B41FA5}">
-                      <a16:colId xmlns:a16="http://schemas.microsoft.com/office/drawing/2014/main" val="2503815855"/>
+                      <a16:colId xmlns:a16="http://schemas.microsoft.com/office/drawing/2014/main" val="958991336"/>
                     </a:ext>
                   </a:extLst>
                 </a:gridCol>
-                <a:gridCol w="587689">
+                <a:gridCol w="483577">
                   <a:extLst>
                     <a:ext uri="{9D8B030D-6E8A-4147-A177-3AD203B41FA5}">
-                      <a16:colId xmlns:a16="http://schemas.microsoft.com/office/drawing/2014/main" val="1132694783"/>
+                      <a16:colId xmlns:a16="http://schemas.microsoft.com/office/drawing/2014/main" val="4239024402"/>
                     </a:ext>
                   </a:extLst>
                 </a:gridCol>
-                <a:gridCol w="587689">
+                <a:gridCol w="501162">
                   <a:extLst>
                     <a:ext uri="{9D8B030D-6E8A-4147-A177-3AD203B41FA5}">
-                      <a16:colId xmlns:a16="http://schemas.microsoft.com/office/drawing/2014/main" val="870538356"/>
+                      <a16:colId xmlns:a16="http://schemas.microsoft.com/office/drawing/2014/main" val="505228023"/>
                     </a:ext>
                   </a:extLst>
                 </a:gridCol>
-                <a:gridCol w="587689">
+                <a:gridCol w="364725">
                   <a:extLst>
                     <a:ext uri="{9D8B030D-6E8A-4147-A177-3AD203B41FA5}">
-                      <a16:colId xmlns:a16="http://schemas.microsoft.com/office/drawing/2014/main" val="140413072"/>
+                      <a16:colId xmlns:a16="http://schemas.microsoft.com/office/drawing/2014/main" val="3014002297"/>
                     </a:ext>
                   </a:extLst>
                 </a:gridCol>
               </a:tblGrid>
-              <a:tr h="0">
+              <a:tr h="182880">
                 <a:tc gridSpan="2">
                   <a:txBody>
                     <a:bodyPr/>
                     <a:lstStyle/>
                     <a:p>
+                      <a:pPr algn="l">
+                        <a:lnSpc>
+                          <a:spcPts val="1300"/>
+                        </a:lnSpc>
+                      </a:pPr>
                       <a:r>
-                        <a:rPr lang="en-US" sz="600" dirty="0"/>
-                        <a:t>Board </a:t>
+                        <a:rPr lang="en-US" sz="600" b="0" i="0" dirty="0">
+                          <a:solidFill>
+                            <a:schemeClr val="bg1"/>
+                          </a:solidFill>
+                          <a:latin typeface="Fund Regular" pitchFamily="2" charset="-78"/>
+                          <a:cs typeface="Fund Regular" pitchFamily="2" charset="-78"/>
+                        </a:rPr>
+                        <a:t>BOARD COMPOSITION DATA</a:t>
                       </a:r>
-                      <a:r>
-                        <a:rPr lang="en-US" sz="600" dirty="0" err="1"/>
-                        <a:t>Compostion</a:t>
-                      </a:r>
-                      <a:r>
-                        <a:rPr lang="en-US" sz="600" dirty="0"/>
-                        <a:t> Data</a:t>
-                      </a:r>
-                      <a:endParaRPr lang="en-IN" sz="600" dirty="0"/>
                     </a:p>
                   </a:txBody>
-                  <a:tcPr/>
+                  <a:tcPr marL="36000" marR="36000" marT="0" marB="0" anchor="ctr">
+                    <a:lnL w="3175" cap="flat" cmpd="sng" algn="ctr">
+                      <a:solidFill>
+                        <a:schemeClr val="bg1"/>
+                      </a:solidFill>
+                      <a:prstDash val="solid"/>
+                      <a:round/>
+                      <a:headEnd type="none" w="med" len="med"/>
+                      <a:tailEnd type="none" w="med" len="med"/>
+                    </a:lnL>
+                    <a:lnR w="3175" cap="flat" cmpd="sng" algn="ctr">
+                      <a:solidFill>
+                        <a:schemeClr val="bg1"/>
+                      </a:solidFill>
+                      <a:prstDash val="solid"/>
+                      <a:round/>
+                      <a:headEnd type="none" w="med" len="med"/>
+                      <a:tailEnd type="none" w="med" len="med"/>
+                    </a:lnR>
+                    <a:lnT w="3175" cap="flat" cmpd="sng" algn="ctr">
+                      <a:solidFill>
+                        <a:schemeClr val="bg1"/>
+                      </a:solidFill>
+                      <a:prstDash val="solid"/>
+                      <a:round/>
+                      <a:headEnd type="none" w="med" len="med"/>
+                      <a:tailEnd type="none" w="med" len="med"/>
+                    </a:lnT>
+                    <a:lnB w="3175" cap="flat" cmpd="sng" algn="ctr">
+                      <a:solidFill>
+                        <a:schemeClr val="bg1"/>
+                      </a:solidFill>
+                      <a:prstDash val="solid"/>
+                      <a:round/>
+                      <a:headEnd type="none" w="med" len="med"/>
+                      <a:tailEnd type="none" w="med" len="med"/>
+                    </a:lnB>
+                    <a:lnTlToBr w="12700" cmpd="sng">
+                      <a:noFill/>
+                      <a:prstDash val="solid"/>
+                    </a:lnTlToBr>
+                    <a:lnBlToTr w="12700" cmpd="sng">
+                      <a:noFill/>
+                      <a:prstDash val="solid"/>
+                    </a:lnBlToTr>
+                    <a:solidFill>
+                      <a:schemeClr val="tx2"/>
+                    </a:solidFill>
+                  </a:tcPr>
                 </a:tc>
                 <a:tc hMerge="1">
                   <a:txBody>
                     <a:bodyPr/>
                     <a:lstStyle/>
                     <a:p>
-                      <a:endParaRPr lang="en-IN" sz="600" dirty="0"/>
+                      <a:pPr>
+                        <a:lnSpc>
+                          <a:spcPts val="1300"/>
+                        </a:lnSpc>
+                      </a:pPr>
+                      <a:endParaRPr lang="en-US" sz="1200" dirty="0">
+                        <a:solidFill>
+                          <a:schemeClr val="bg1"/>
+                        </a:solidFill>
+                        <a:latin typeface="Sakkal Majalla" panose="02000000000000000000" pitchFamily="2" charset="-78"/>
+                        <a:cs typeface="Sakkal Majalla" panose="02000000000000000000" pitchFamily="2" charset="-78"/>
+                      </a:endParaRPr>
                     </a:p>
                   </a:txBody>
-                  <a:tcPr/>
+                  <a:tcPr marL="36000" marR="36000" marT="0" marB="0" anchor="ctr">
+                    <a:lnL w="3175" cap="flat" cmpd="sng" algn="ctr">
+                      <a:solidFill>
+                        <a:schemeClr val="bg1"/>
+                      </a:solidFill>
+                      <a:prstDash val="solid"/>
+                      <a:round/>
+                      <a:headEnd type="none" w="med" len="med"/>
+                      <a:tailEnd type="none" w="med" len="med"/>
+                    </a:lnL>
+                    <a:lnR w="3175" cap="flat" cmpd="sng" algn="ctr">
+                      <a:solidFill>
+                        <a:schemeClr val="bg1"/>
+                      </a:solidFill>
+                      <a:prstDash val="solid"/>
+                      <a:round/>
+                      <a:headEnd type="none" w="med" len="med"/>
+                      <a:tailEnd type="none" w="med" len="med"/>
+                    </a:lnR>
+                    <a:lnT w="3175" cap="flat" cmpd="sng" algn="ctr">
+                      <a:solidFill>
+                        <a:schemeClr val="bg1"/>
+                      </a:solidFill>
+                      <a:prstDash val="solid"/>
+                      <a:round/>
+                      <a:headEnd type="none" w="med" len="med"/>
+                      <a:tailEnd type="none" w="med" len="med"/>
+                    </a:lnT>
+                    <a:lnB w="3175" cap="flat" cmpd="sng" algn="ctr">
+                      <a:solidFill>
+                        <a:schemeClr val="bg1"/>
+                      </a:solidFill>
+                      <a:prstDash val="solid"/>
+                      <a:round/>
+                      <a:headEnd type="none" w="med" len="med"/>
+                      <a:tailEnd type="none" w="med" len="med"/>
+                    </a:lnB>
+                    <a:lnTlToBr w="12700" cmpd="sng">
+                      <a:noFill/>
+                      <a:prstDash val="solid"/>
+                    </a:lnTlToBr>
+                    <a:lnBlToTr w="12700" cmpd="sng">
+                      <a:noFill/>
+                      <a:prstDash val="solid"/>
+                    </a:lnBlToTr>
+                    <a:solidFill>
+                      <a:schemeClr val="tx2"/>
+                    </a:solidFill>
+                  </a:tcPr>
                 </a:tc>
                 <a:tc gridSpan="2">
                   <a:txBody>
                     <a:bodyPr/>
                     <a:lstStyle/>
                     <a:p>
+                      <a:pPr algn="l">
+                        <a:lnSpc>
+                          <a:spcPts val="1300"/>
+                        </a:lnSpc>
+                      </a:pPr>
                       <a:r>
-                        <a:rPr lang="en-US" sz="600" dirty="0"/>
-                        <a:t>Start Date: MMMM-YYYY</a:t>
+                        <a:rPr lang="en-US" sz="600" b="0" i="0" kern="1200" dirty="0">
+                          <a:solidFill>
+                            <a:schemeClr val="bg1"/>
+                          </a:solidFill>
+                          <a:latin typeface="Fund Regular" pitchFamily="2" charset="-78"/>
+                          <a:ea typeface="+mn-ea"/>
+                          <a:cs typeface="Fund Regular" pitchFamily="2" charset="-78"/>
+                        </a:rPr>
+                        <a:t>START DATE: MMMM-YYYY</a:t>
                       </a:r>
-                      <a:endParaRPr lang="en-IN" sz="600" dirty="0"/>
+                      <a:endParaRPr lang="en-US" sz="600" dirty="0">
+                        <a:solidFill>
+                          <a:schemeClr val="bg1"/>
+                        </a:solidFill>
+                        <a:latin typeface="Sakkal Majalla" panose="02000000000000000000" pitchFamily="2" charset="-78"/>
+                        <a:cs typeface="Sakkal Majalla" panose="02000000000000000000" pitchFamily="2" charset="-78"/>
+                      </a:endParaRPr>
                     </a:p>
                   </a:txBody>
-                  <a:tcPr/>
+                  <a:tcPr marL="36000" marR="36000" marT="0" marB="0" anchor="ctr">
+                    <a:lnL w="3175" cap="flat" cmpd="sng" algn="ctr">
+                      <a:solidFill>
+                        <a:schemeClr val="bg1"/>
+                      </a:solidFill>
+                      <a:prstDash val="solid"/>
+                      <a:round/>
+                      <a:headEnd type="none" w="med" len="med"/>
+                      <a:tailEnd type="none" w="med" len="med"/>
+                    </a:lnL>
+                    <a:lnR w="3175" cap="flat" cmpd="sng" algn="ctr">
+                      <a:solidFill>
+                        <a:schemeClr val="bg1"/>
+                      </a:solidFill>
+                      <a:prstDash val="solid"/>
+                      <a:round/>
+                      <a:headEnd type="none" w="med" len="med"/>
+                      <a:tailEnd type="none" w="med" len="med"/>
+                    </a:lnR>
+                    <a:lnT w="3175" cap="flat" cmpd="sng" algn="ctr">
+                      <a:solidFill>
+                        <a:schemeClr val="bg1"/>
+                      </a:solidFill>
+                      <a:prstDash val="solid"/>
+                      <a:round/>
+                      <a:headEnd type="none" w="med" len="med"/>
+                      <a:tailEnd type="none" w="med" len="med"/>
+                    </a:lnT>
+                    <a:lnB w="3175" cap="flat" cmpd="sng" algn="ctr">
+                      <a:solidFill>
+                        <a:schemeClr val="bg1"/>
+                      </a:solidFill>
+                      <a:prstDash val="solid"/>
+                      <a:round/>
+                      <a:headEnd type="none" w="med" len="med"/>
+                      <a:tailEnd type="none" w="med" len="med"/>
+                    </a:lnB>
+                    <a:lnTlToBr w="12700" cmpd="sng">
+                      <a:noFill/>
+                      <a:prstDash val="solid"/>
+                    </a:lnTlToBr>
+                    <a:lnBlToTr w="12700" cmpd="sng">
+                      <a:noFill/>
+                      <a:prstDash val="solid"/>
+                    </a:lnBlToTr>
+                    <a:solidFill>
+                      <a:schemeClr val="tx2"/>
+                    </a:solidFill>
+                  </a:tcPr>
                 </a:tc>
                 <a:tc hMerge="1">
                   <a:txBody>
                     <a:bodyPr/>
                     <a:lstStyle/>
                     <a:p>
-                      <a:endParaRPr lang="en-IN" sz="600" dirty="0"/>
+                      <a:pPr>
+                        <a:lnSpc>
+                          <a:spcPts val="1300"/>
+                        </a:lnSpc>
+                      </a:pPr>
+                      <a:endParaRPr lang="en-US" sz="1200" dirty="0">
+                        <a:solidFill>
+                          <a:schemeClr val="bg1"/>
+                        </a:solidFill>
+                        <a:latin typeface="Sakkal Majalla" panose="02000000000000000000" pitchFamily="2" charset="-78"/>
+                        <a:cs typeface="Sakkal Majalla" panose="02000000000000000000" pitchFamily="2" charset="-78"/>
+                      </a:endParaRPr>
                     </a:p>
                   </a:txBody>
-                  <a:tcPr/>
+                  <a:tcPr marL="36000" marR="36000" marT="0" marB="0" anchor="ctr">
+                    <a:lnL w="3175" cap="flat" cmpd="sng" algn="ctr">
+                      <a:solidFill>
+                        <a:schemeClr val="bg1"/>
+                      </a:solidFill>
+                      <a:prstDash val="solid"/>
+                      <a:round/>
+                      <a:headEnd type="none" w="med" len="med"/>
+                      <a:tailEnd type="none" w="med" len="med"/>
+                    </a:lnL>
+                    <a:lnR w="3175" cap="flat" cmpd="sng" algn="ctr">
+                      <a:solidFill>
+                        <a:schemeClr val="bg1"/>
+                      </a:solidFill>
+                      <a:prstDash val="solid"/>
+                      <a:round/>
+                      <a:headEnd type="none" w="med" len="med"/>
+                      <a:tailEnd type="none" w="med" len="med"/>
+                    </a:lnR>
+                    <a:lnT w="3175" cap="flat" cmpd="sng" algn="ctr">
+                      <a:solidFill>
+                        <a:schemeClr val="bg1"/>
+                      </a:solidFill>
+                      <a:prstDash val="solid"/>
+                      <a:round/>
+                      <a:headEnd type="none" w="med" len="med"/>
+                      <a:tailEnd type="none" w="med" len="med"/>
+                    </a:lnT>
+                    <a:lnB w="3175" cap="flat" cmpd="sng" algn="ctr">
+                      <a:solidFill>
+                        <a:schemeClr val="bg1"/>
+                      </a:solidFill>
+                      <a:prstDash val="solid"/>
+                      <a:round/>
+                      <a:headEnd type="none" w="med" len="med"/>
+                      <a:tailEnd type="none" w="med" len="med"/>
+                    </a:lnB>
+                    <a:lnTlToBr w="12700" cmpd="sng">
+                      <a:noFill/>
+                      <a:prstDash val="solid"/>
+                    </a:lnTlToBr>
+                    <a:lnBlToTr w="12700" cmpd="sng">
+                      <a:noFill/>
+                      <a:prstDash val="solid"/>
+                    </a:lnBlToTr>
+                    <a:solidFill>
+                      <a:schemeClr val="tx2"/>
+                    </a:solidFill>
+                  </a:tcPr>
                 </a:tc>
                 <a:tc gridSpan="3">
                   <a:txBody>
                     <a:bodyPr/>
                     <a:lstStyle/>
                     <a:p>
-                      <a:pPr marL="0" marR="0" lvl="0" indent="0" algn="l" defTabSz="914400" rtl="0" eaLnBrk="1" fontAlgn="auto" latinLnBrk="0" hangingPunct="1">
+                      <a:pPr algn="l">
                         <a:lnSpc>
-                          <a:spcPct val="100000"/>
+                          <a:spcPts val="1300"/>
                         </a:lnSpc>
-                        <a:spcBef>
-                          <a:spcPts val="0"/>
-                        </a:spcBef>
-                        <a:spcAft>
-                          <a:spcPts val="0"/>
-                        </a:spcAft>
-                        <a:buClrTx/>
-                        <a:buSzTx/>
-                        <a:buFontTx/>
-                        <a:buNone/>
-                        <a:tabLst/>
-                        <a:defRPr/>
                       </a:pPr>
                       <a:r>
-                        <a:rPr lang="en-US" sz="600" dirty="0"/>
-                        <a:t>End Date: MMMM-YYYY</a:t>
+                        <a:rPr kumimoji="0" lang="en-US" sz="600" b="0" i="0" u="none" strike="noStrike" kern="1200" cap="none" spc="0" normalizeH="0" baseline="0" noProof="0" dirty="0">
+                          <a:ln>
+                            <a:noFill/>
+                          </a:ln>
+                          <a:solidFill>
+                            <a:srgbClr val="FFFFFF"/>
+                          </a:solidFill>
+                          <a:effectLst/>
+                          <a:uLnTx/>
+                          <a:uFillTx/>
+                          <a:latin typeface="Fund Regular" pitchFamily="2" charset="-78"/>
+                          <a:ea typeface="+mn-ea"/>
+                          <a:cs typeface="Fund Regular" pitchFamily="2" charset="-78"/>
+                        </a:rPr>
+                        <a:t>END DATE: MMMM-YYYY</a:t>
                       </a:r>
-                      <a:endParaRPr lang="en-IN" sz="600" dirty="0"/>
+                      <a:endParaRPr lang="en-US" sz="600" dirty="0">
+                        <a:solidFill>
+                          <a:schemeClr val="bg1"/>
+                        </a:solidFill>
+                        <a:latin typeface="Sakkal Majalla" panose="02000000000000000000" pitchFamily="2" charset="-78"/>
+                        <a:cs typeface="Sakkal Majalla" panose="02000000000000000000" pitchFamily="2" charset="-78"/>
+                      </a:endParaRPr>
                     </a:p>
                   </a:txBody>
-                  <a:tcPr/>
+                  <a:tcPr marL="36000" marR="36000" marT="0" marB="0" anchor="ctr">
+                    <a:lnL w="3175" cap="flat" cmpd="sng" algn="ctr">
+                      <a:solidFill>
+                        <a:schemeClr val="bg1"/>
+                      </a:solidFill>
+                      <a:prstDash val="solid"/>
+                      <a:round/>
+                      <a:headEnd type="none" w="med" len="med"/>
+                      <a:tailEnd type="none" w="med" len="med"/>
+                    </a:lnL>
+                    <a:lnR w="3175" cap="flat" cmpd="sng" algn="ctr">
+                      <a:solidFill>
+                        <a:schemeClr val="bg1"/>
+                      </a:solidFill>
+                      <a:prstDash val="solid"/>
+                      <a:round/>
+                      <a:headEnd type="none" w="med" len="med"/>
+                      <a:tailEnd type="none" w="med" len="med"/>
+                    </a:lnR>
+                    <a:lnT w="3175" cap="flat" cmpd="sng" algn="ctr">
+                      <a:solidFill>
+                        <a:schemeClr val="bg1"/>
+                      </a:solidFill>
+                      <a:prstDash val="solid"/>
+                      <a:round/>
+                      <a:headEnd type="none" w="med" len="med"/>
+                      <a:tailEnd type="none" w="med" len="med"/>
+                    </a:lnT>
+                    <a:lnB w="3175" cap="flat" cmpd="sng" algn="ctr">
+                      <a:solidFill>
+                        <a:schemeClr val="bg1"/>
+                      </a:solidFill>
+                      <a:prstDash val="solid"/>
+                      <a:round/>
+                      <a:headEnd type="none" w="med" len="med"/>
+                      <a:tailEnd type="none" w="med" len="med"/>
+                    </a:lnB>
+                    <a:lnTlToBr w="12700" cmpd="sng">
+                      <a:noFill/>
+                      <a:prstDash val="solid"/>
+                    </a:lnTlToBr>
+                    <a:lnBlToTr w="12700" cmpd="sng">
+                      <a:noFill/>
+                      <a:prstDash val="solid"/>
+                    </a:lnBlToTr>
+                    <a:solidFill>
+                      <a:schemeClr val="tx2"/>
+                    </a:solidFill>
+                  </a:tcPr>
                 </a:tc>
                 <a:tc hMerge="1">
                   <a:txBody>
                     <a:bodyPr/>
                     <a:lstStyle/>
                     <a:p>
-                      <a:endParaRPr lang="en-IN" sz="600" dirty="0"/>
+                      <a:pPr>
+                        <a:lnSpc>
+                          <a:spcPts val="1300"/>
+                        </a:lnSpc>
+                      </a:pPr>
+                      <a:endParaRPr lang="en-US" sz="1200" dirty="0">
+                        <a:solidFill>
+                          <a:schemeClr val="bg1"/>
+                        </a:solidFill>
+                        <a:latin typeface="Sakkal Majalla" panose="02000000000000000000" pitchFamily="2" charset="-78"/>
+                        <a:cs typeface="Sakkal Majalla" panose="02000000000000000000" pitchFamily="2" charset="-78"/>
+                      </a:endParaRPr>
                     </a:p>
                   </a:txBody>
-                  <a:tcPr/>
+                  <a:tcPr marL="36000" marR="36000" marT="0" marB="0" anchor="ctr">
+                    <a:lnL w="3175" cap="flat" cmpd="sng" algn="ctr">
+                      <a:solidFill>
+                        <a:schemeClr val="bg1"/>
+                      </a:solidFill>
+                      <a:prstDash val="solid"/>
+                      <a:round/>
+                      <a:headEnd type="none" w="med" len="med"/>
+                      <a:tailEnd type="none" w="med" len="med"/>
+                    </a:lnL>
+                    <a:lnR w="3175" cap="flat" cmpd="sng" algn="ctr">
+                      <a:solidFill>
+                        <a:schemeClr val="bg1"/>
+                      </a:solidFill>
+                      <a:prstDash val="solid"/>
+                      <a:round/>
+                      <a:headEnd type="none" w="med" len="med"/>
+                      <a:tailEnd type="none" w="med" len="med"/>
+                    </a:lnR>
+                    <a:lnT w="3175" cap="flat" cmpd="sng" algn="ctr">
+                      <a:solidFill>
+                        <a:schemeClr val="bg1"/>
+                      </a:solidFill>
+                      <a:prstDash val="solid"/>
+                      <a:round/>
+                      <a:headEnd type="none" w="med" len="med"/>
+                      <a:tailEnd type="none" w="med" len="med"/>
+                    </a:lnT>
+                    <a:lnB w="3175" cap="flat" cmpd="sng" algn="ctr">
+                      <a:solidFill>
+                        <a:schemeClr val="bg1"/>
+                      </a:solidFill>
+                      <a:prstDash val="solid"/>
+                      <a:round/>
+                      <a:headEnd type="none" w="med" len="med"/>
+                      <a:tailEnd type="none" w="med" len="med"/>
+                    </a:lnB>
+                    <a:lnTlToBr w="12700" cmpd="sng">
+                      <a:noFill/>
+                      <a:prstDash val="solid"/>
+                    </a:lnTlToBr>
+                    <a:lnBlToTr w="12700" cmpd="sng">
+                      <a:noFill/>
+                      <a:prstDash val="solid"/>
+                    </a:lnBlToTr>
+                    <a:solidFill>
+                      <a:schemeClr val="tx2"/>
+                    </a:solidFill>
+                  </a:tcPr>
                 </a:tc>
                 <a:tc hMerge="1">
                   <a:txBody>
                     <a:bodyPr/>
                     <a:lstStyle/>
                     <a:p>
-                      <a:endParaRPr lang="en-IN" sz="600" dirty="0"/>
+                      <a:pPr>
+                        <a:lnSpc>
+                          <a:spcPts val="1300"/>
+                        </a:lnSpc>
+                      </a:pPr>
+                      <a:endParaRPr lang="en-US" sz="1200" dirty="0">
+                        <a:solidFill>
+                          <a:schemeClr val="bg1"/>
+                        </a:solidFill>
+                        <a:latin typeface="Sakkal Majalla" panose="02000000000000000000" pitchFamily="2" charset="-78"/>
+                        <a:cs typeface="Sakkal Majalla" panose="02000000000000000000" pitchFamily="2" charset="-78"/>
+                      </a:endParaRPr>
                     </a:p>
                   </a:txBody>
-                  <a:tcPr/>
+                  <a:tcPr marL="36000" marR="36000" marT="0" marB="0" anchor="ctr">
+                    <a:lnL w="3175" cap="flat" cmpd="sng" algn="ctr">
+                      <a:solidFill>
+                        <a:schemeClr val="bg1"/>
+                      </a:solidFill>
+                      <a:prstDash val="solid"/>
+                      <a:round/>
+                      <a:headEnd type="none" w="med" len="med"/>
+                      <a:tailEnd type="none" w="med" len="med"/>
+                    </a:lnL>
+                    <a:lnR w="3175" cap="flat" cmpd="sng" algn="ctr">
+                      <a:solidFill>
+                        <a:schemeClr val="bg1"/>
+                      </a:solidFill>
+                      <a:prstDash val="solid"/>
+                      <a:round/>
+                      <a:headEnd type="none" w="med" len="med"/>
+                      <a:tailEnd type="none" w="med" len="med"/>
+                    </a:lnR>
+                    <a:lnT w="3175" cap="flat" cmpd="sng" algn="ctr">
+                      <a:solidFill>
+                        <a:schemeClr val="bg1"/>
+                      </a:solidFill>
+                      <a:prstDash val="solid"/>
+                      <a:round/>
+                      <a:headEnd type="none" w="med" len="med"/>
+                      <a:tailEnd type="none" w="med" len="med"/>
+                    </a:lnT>
+                    <a:lnB w="3175" cap="flat" cmpd="sng" algn="ctr">
+                      <a:solidFill>
+                        <a:schemeClr val="bg1"/>
+                      </a:solidFill>
+                      <a:prstDash val="solid"/>
+                      <a:round/>
+                      <a:headEnd type="none" w="med" len="med"/>
+                      <a:tailEnd type="none" w="med" len="med"/>
+                    </a:lnB>
+                    <a:lnTlToBr w="12700" cmpd="sng">
+                      <a:noFill/>
+                      <a:prstDash val="solid"/>
+                    </a:lnTlToBr>
+                    <a:lnBlToTr w="12700" cmpd="sng">
+                      <a:noFill/>
+                      <a:prstDash val="solid"/>
+                    </a:lnBlToTr>
+                    <a:solidFill>
+                      <a:schemeClr val="tx2"/>
+                    </a:solidFill>
+                  </a:tcPr>
                 </a:tc>
                 <a:extLst>
                   <a:ext uri="{0D108BD9-81ED-4DB2-BD59-A6C34878D82A}">
-                    <a16:rowId xmlns:a16="http://schemas.microsoft.com/office/drawing/2014/main" val="611380770"/>
+                    <a16:rowId xmlns:a16="http://schemas.microsoft.com/office/drawing/2014/main" val="3944166192"/>
                   </a:ext>
                 </a:extLst>
               </a:tr>
-              <a:tr h="0">
+              <a:tr h="142016">
                 <a:tc>
                   <a:txBody>
                     <a:bodyPr/>
                     <a:lstStyle/>
                     <a:p>
+                      <a:pPr algn="l">
+                        <a:lnSpc>
+                          <a:spcPts val="1200"/>
+                        </a:lnSpc>
+                      </a:pPr>
                       <a:r>
-                        <a:rPr lang="en-US" sz="600" dirty="0"/>
+                        <a:rPr lang="en-US" sz="600" b="0" i="0" dirty="0">
+                          <a:solidFill>
+                            <a:schemeClr val="tx2"/>
+                          </a:solidFill>
+                          <a:latin typeface="Fund Regular" pitchFamily="2" charset="-78"/>
+                          <a:cs typeface="Fund Regular" pitchFamily="2" charset="-78"/>
+                        </a:rPr>
                         <a:t>NAME</a:t>
                       </a:r>
-                      <a:endParaRPr lang="en-IN" sz="600" dirty="0"/>
                     </a:p>
                   </a:txBody>
-                  <a:tcPr/>
+                  <a:tcPr marL="36000" marR="36000" marT="0" marB="0" anchor="ctr">
+                    <a:lnL w="12700" cap="flat" cmpd="sng" algn="ctr">
+                      <a:noFill/>
+                      <a:prstDash val="solid"/>
+                      <a:round/>
+                      <a:headEnd type="none" w="med" len="med"/>
+                      <a:tailEnd type="none" w="med" len="med"/>
+                    </a:lnL>
+                    <a:lnR w="12700" cap="flat" cmpd="sng" algn="ctr">
+                      <a:noFill/>
+                      <a:prstDash val="solid"/>
+                      <a:round/>
+                      <a:headEnd type="none" w="med" len="med"/>
+                      <a:tailEnd type="none" w="med" len="med"/>
+                    </a:lnR>
+                    <a:lnT w="3175" cap="flat" cmpd="sng" algn="ctr">
+                      <a:solidFill>
+                        <a:schemeClr val="bg1"/>
+                      </a:solidFill>
+                      <a:prstDash val="solid"/>
+                      <a:round/>
+                      <a:headEnd type="none" w="med" len="med"/>
+                      <a:tailEnd type="none" w="med" len="med"/>
+                    </a:lnT>
+                    <a:lnB w="6350" cap="flat" cmpd="sng" algn="ctr">
+                      <a:solidFill>
+                        <a:schemeClr val="bg1">
+                          <a:lumMod val="85000"/>
+                        </a:schemeClr>
+                      </a:solidFill>
+                      <a:prstDash val="solid"/>
+                      <a:round/>
+                      <a:headEnd type="none" w="med" len="med"/>
+                      <a:tailEnd type="none" w="med" len="med"/>
+                    </a:lnB>
+                    <a:lnTlToBr w="12700" cmpd="sng">
+                      <a:noFill/>
+                      <a:prstDash val="solid"/>
+                    </a:lnTlToBr>
+                    <a:lnBlToTr w="12700" cmpd="sng">
+                      <a:noFill/>
+                      <a:prstDash val="solid"/>
+                    </a:lnBlToTr>
+                    <a:solidFill>
+                      <a:schemeClr val="bg1">
+                        <a:lumMod val="95000"/>
+                      </a:schemeClr>
+                    </a:solidFill>
+                  </a:tcPr>
                 </a:tc>
                 <a:tc>
                   <a:txBody>
                     <a:bodyPr/>
                     <a:lstStyle/>
                     <a:p>
+                      <a:pPr algn="l">
+                        <a:lnSpc>
+                          <a:spcPts val="1200"/>
+                        </a:lnSpc>
+                      </a:pPr>
                       <a:r>
-                        <a:rPr lang="en-US" sz="600" dirty="0"/>
+                        <a:rPr lang="en-US" sz="600" b="0" i="0" dirty="0">
+                          <a:solidFill>
+                            <a:schemeClr val="tx2"/>
+                          </a:solidFill>
+                          <a:latin typeface="Fund Regular" pitchFamily="2" charset="-78"/>
+                          <a:cs typeface="Fund Regular" pitchFamily="2" charset="-78"/>
+                        </a:rPr>
                         <a:t>PIF EMPLOYEE</a:t>
                       </a:r>
-                      <a:endParaRPr lang="en-IN" sz="600" dirty="0"/>
                     </a:p>
                   </a:txBody>
-                  <a:tcPr/>
+                  <a:tcPr marL="36000" marR="36000" marT="0" marB="0" anchor="ctr">
+                    <a:lnL w="12700" cap="flat" cmpd="sng" algn="ctr">
+                      <a:noFill/>
+                      <a:prstDash val="solid"/>
+                      <a:round/>
+                      <a:headEnd type="none" w="med" len="med"/>
+                      <a:tailEnd type="none" w="med" len="med"/>
+                    </a:lnL>
+                    <a:lnR w="12700" cap="flat" cmpd="sng" algn="ctr">
+                      <a:noFill/>
+                      <a:prstDash val="solid"/>
+                      <a:round/>
+                      <a:headEnd type="none" w="med" len="med"/>
+                      <a:tailEnd type="none" w="med" len="med"/>
+                    </a:lnR>
+                    <a:lnT w="3175" cap="flat" cmpd="sng" algn="ctr">
+                      <a:solidFill>
+                        <a:schemeClr val="bg1"/>
+                      </a:solidFill>
+                      <a:prstDash val="solid"/>
+                      <a:round/>
+                      <a:headEnd type="none" w="med" len="med"/>
+                      <a:tailEnd type="none" w="med" len="med"/>
+                    </a:lnT>
+                    <a:lnB w="6350" cap="flat" cmpd="sng" algn="ctr">
+                      <a:solidFill>
+                        <a:schemeClr val="bg1">
+                          <a:lumMod val="85000"/>
+                        </a:schemeClr>
+                      </a:solidFill>
+                      <a:prstDash val="solid"/>
+                      <a:round/>
+                      <a:headEnd type="none" w="med" len="med"/>
+                      <a:tailEnd type="none" w="med" len="med"/>
+                    </a:lnB>
+                    <a:lnTlToBr w="12700" cmpd="sng">
+                      <a:noFill/>
+                      <a:prstDash val="solid"/>
+                    </a:lnTlToBr>
+                    <a:lnBlToTr w="12700" cmpd="sng">
+                      <a:noFill/>
+                      <a:prstDash val="solid"/>
+                    </a:lnBlToTr>
+                    <a:solidFill>
+                      <a:schemeClr val="bg1">
+                        <a:lumMod val="95000"/>
+                      </a:schemeClr>
+                    </a:solidFill>
+                  </a:tcPr>
                 </a:tc>
                 <a:tc>
                   <a:txBody>
                     <a:bodyPr/>
                     <a:lstStyle/>
                     <a:p>
+                      <a:pPr algn="l">
+                        <a:lnSpc>
+                          <a:spcPts val="1200"/>
+                        </a:lnSpc>
+                      </a:pPr>
                       <a:r>
-                        <a:rPr lang="en-US" sz="600" dirty="0"/>
+                        <a:rPr lang="en-US" sz="600" b="0" i="0" dirty="0">
+                          <a:solidFill>
+                            <a:schemeClr val="tx2"/>
+                          </a:solidFill>
+                          <a:latin typeface="Fund Regular" pitchFamily="2" charset="-78"/>
+                          <a:cs typeface="Fund Regular" pitchFamily="2" charset="-78"/>
+                        </a:rPr>
                         <a:t>OTHER PIF REP.</a:t>
                       </a:r>
-                      <a:endParaRPr lang="en-IN" sz="600" dirty="0"/>
                     </a:p>
                   </a:txBody>
-                  <a:tcPr/>
+                  <a:tcPr marL="36000" marR="36000" marT="0" marB="0" anchor="ctr">
+                    <a:lnL w="12700" cap="flat" cmpd="sng" algn="ctr">
+                      <a:noFill/>
+                      <a:prstDash val="solid"/>
+                      <a:round/>
+                      <a:headEnd type="none" w="med" len="med"/>
+                      <a:tailEnd type="none" w="med" len="med"/>
+                    </a:lnL>
+                    <a:lnR w="12700" cap="flat" cmpd="sng" algn="ctr">
+                      <a:noFill/>
+                      <a:prstDash val="solid"/>
+                      <a:round/>
+                      <a:headEnd type="none" w="med" len="med"/>
+                      <a:tailEnd type="none" w="med" len="med"/>
+                    </a:lnR>
+                    <a:lnT w="3175" cap="flat" cmpd="sng" algn="ctr">
+                      <a:solidFill>
+                        <a:schemeClr val="bg1"/>
+                      </a:solidFill>
+                      <a:prstDash val="solid"/>
+                      <a:round/>
+                      <a:headEnd type="none" w="med" len="med"/>
+                      <a:tailEnd type="none" w="med" len="med"/>
+                    </a:lnT>
+                    <a:lnB w="6350" cap="flat" cmpd="sng" algn="ctr">
+                      <a:solidFill>
+                        <a:schemeClr val="bg1">
+                          <a:lumMod val="85000"/>
+                        </a:schemeClr>
+                      </a:solidFill>
+                      <a:prstDash val="solid"/>
+                      <a:round/>
+                      <a:headEnd type="none" w="med" len="med"/>
+                      <a:tailEnd type="none" w="med" len="med"/>
+                    </a:lnB>
+                    <a:lnTlToBr w="12700" cmpd="sng">
+                      <a:noFill/>
+                      <a:prstDash val="solid"/>
+                    </a:lnTlToBr>
+                    <a:lnBlToTr w="12700" cmpd="sng">
+                      <a:noFill/>
+                      <a:prstDash val="solid"/>
+                    </a:lnBlToTr>
+                    <a:solidFill>
+                      <a:schemeClr val="bg1">
+                        <a:lumMod val="95000"/>
+                      </a:schemeClr>
+                    </a:solidFill>
+                  </a:tcPr>
                 </a:tc>
                 <a:tc>
                   <a:txBody>
                     <a:bodyPr/>
                     <a:lstStyle/>
                     <a:p>
+                      <a:pPr algn="l">
+                        <a:lnSpc>
+                          <a:spcPts val="1200"/>
+                        </a:lnSpc>
+                      </a:pPr>
                       <a:r>
-                        <a:rPr lang="en-US" sz="600" dirty="0"/>
+                        <a:rPr lang="en-US" sz="600" b="0" i="0" dirty="0">
+                          <a:solidFill>
+                            <a:schemeClr val="tx2"/>
+                          </a:solidFill>
+                          <a:latin typeface="Fund Regular" pitchFamily="2" charset="-78"/>
+                          <a:cs typeface="Fund Regular" pitchFamily="2" charset="-78"/>
+                        </a:rPr>
                         <a:t>BOARD</a:t>
                       </a:r>
-                      <a:endParaRPr lang="en-IN" sz="600" dirty="0"/>
                     </a:p>
                   </a:txBody>
-                  <a:tcPr/>
+                  <a:tcPr marL="36000" marR="36000" marT="0" marB="0" anchor="ctr">
+                    <a:lnL w="12700" cmpd="sng">
+                      <a:noFill/>
+                    </a:lnL>
+                    <a:lnR w="12700" cap="flat" cmpd="sng" algn="ctr">
+                      <a:noFill/>
+                      <a:prstDash val="solid"/>
+                      <a:round/>
+                      <a:headEnd type="none" w="med" len="med"/>
+                      <a:tailEnd type="none" w="med" len="med"/>
+                    </a:lnR>
+                    <a:lnT w="3175" cap="flat" cmpd="sng" algn="ctr">
+                      <a:solidFill>
+                        <a:schemeClr val="bg1"/>
+                      </a:solidFill>
+                      <a:prstDash val="solid"/>
+                      <a:round/>
+                      <a:headEnd type="none" w="med" len="med"/>
+                      <a:tailEnd type="none" w="med" len="med"/>
+                    </a:lnT>
+                    <a:lnB w="6350" cap="flat" cmpd="sng" algn="ctr">
+                      <a:solidFill>
+                        <a:schemeClr val="bg1">
+                          <a:lumMod val="85000"/>
+                        </a:schemeClr>
+                      </a:solidFill>
+                      <a:prstDash val="solid"/>
+                      <a:round/>
+                      <a:headEnd type="none" w="med" len="med"/>
+                      <a:tailEnd type="none" w="med" len="med"/>
+                    </a:lnB>
+                    <a:lnTlToBr w="12700" cmpd="sng">
+                      <a:noFill/>
+                      <a:prstDash val="solid"/>
+                    </a:lnTlToBr>
+                    <a:lnBlToTr w="12700" cmpd="sng">
+                      <a:noFill/>
+                      <a:prstDash val="solid"/>
+                    </a:lnBlToTr>
+                    <a:solidFill>
+                      <a:schemeClr val="bg1">
+                        <a:lumMod val="95000"/>
+                      </a:schemeClr>
+                    </a:solidFill>
+                  </a:tcPr>
                 </a:tc>
                 <a:tc>
                   <a:txBody>
                     <a:bodyPr/>
                     <a:lstStyle/>
                     <a:p>
+                      <a:pPr algn="l">
+                        <a:lnSpc>
+                          <a:spcPts val="1200"/>
+                        </a:lnSpc>
+                      </a:pPr>
                       <a:r>
-                        <a:rPr lang="en-US" sz="600" dirty="0"/>
+                        <a:rPr lang="en-US" sz="600" b="0" i="0" dirty="0">
+                          <a:solidFill>
+                            <a:schemeClr val="tx2"/>
+                          </a:solidFill>
+                          <a:latin typeface="Fund Regular" pitchFamily="2" charset="-78"/>
+                          <a:cs typeface="Fund Regular" pitchFamily="2" charset="-78"/>
+                        </a:rPr>
                         <a:t>EXCOM</a:t>
                       </a:r>
-                      <a:endParaRPr lang="en-IN" sz="600" dirty="0"/>
                     </a:p>
                   </a:txBody>
-                  <a:tcPr/>
+                  <a:tcPr marL="36000" marR="36000" marT="0" marB="0" anchor="ctr">
+                    <a:lnL w="12700" cap="flat" cmpd="sng" algn="ctr">
+                      <a:noFill/>
+                      <a:prstDash val="solid"/>
+                      <a:round/>
+                      <a:headEnd type="none" w="med" len="med"/>
+                      <a:tailEnd type="none" w="med" len="med"/>
+                    </a:lnL>
+                    <a:lnR w="12700" cap="flat" cmpd="sng" algn="ctr">
+                      <a:noFill/>
+                      <a:prstDash val="solid"/>
+                      <a:round/>
+                      <a:headEnd type="none" w="med" len="med"/>
+                      <a:tailEnd type="none" w="med" len="med"/>
+                    </a:lnR>
+                    <a:lnT w="3175" cap="flat" cmpd="sng" algn="ctr">
+                      <a:solidFill>
+                        <a:schemeClr val="bg1"/>
+                      </a:solidFill>
+                      <a:prstDash val="solid"/>
+                      <a:round/>
+                      <a:headEnd type="none" w="med" len="med"/>
+                      <a:tailEnd type="none" w="med" len="med"/>
+                    </a:lnT>
+                    <a:lnB w="6350" cap="flat" cmpd="sng" algn="ctr">
+                      <a:solidFill>
+                        <a:schemeClr val="bg1">
+                          <a:lumMod val="85000"/>
+                        </a:schemeClr>
+                      </a:solidFill>
+                      <a:prstDash val="solid"/>
+                      <a:round/>
+                      <a:headEnd type="none" w="med" len="med"/>
+                      <a:tailEnd type="none" w="med" len="med"/>
+                    </a:lnB>
+                    <a:lnTlToBr w="12700" cmpd="sng">
+                      <a:noFill/>
+                      <a:prstDash val="solid"/>
+                    </a:lnTlToBr>
+                    <a:lnBlToTr w="12700" cmpd="sng">
+                      <a:noFill/>
+                      <a:prstDash val="solid"/>
+                    </a:lnBlToTr>
+                    <a:solidFill>
+                      <a:schemeClr val="bg1">
+                        <a:lumMod val="95000"/>
+                      </a:schemeClr>
+                    </a:solidFill>
+                  </a:tcPr>
                 </a:tc>
                 <a:tc>
                   <a:txBody>
                     <a:bodyPr/>
                     <a:lstStyle/>
                     <a:p>
+                      <a:pPr algn="l">
+                        <a:lnSpc>
+                          <a:spcPts val="1200"/>
+                        </a:lnSpc>
+                      </a:pPr>
                       <a:r>
-                        <a:rPr lang="en-US" sz="600" dirty="0"/>
+                        <a:rPr lang="en-US" sz="600" b="0" i="0" dirty="0">
+                          <a:solidFill>
+                            <a:schemeClr val="tx2"/>
+                          </a:solidFill>
+                          <a:latin typeface="Fund Regular" pitchFamily="2" charset="-78"/>
+                          <a:cs typeface="Fund Regular" pitchFamily="2" charset="-78"/>
+                        </a:rPr>
                         <a:t>AUDIT</a:t>
                       </a:r>
-                      <a:endParaRPr lang="en-IN" sz="600" dirty="0"/>
                     </a:p>
                   </a:txBody>
-                  <a:tcPr/>
+                  <a:tcPr marL="36000" marR="36000" marT="0" marB="0" anchor="ctr">
+                    <a:lnL w="12700" cap="flat" cmpd="sng" algn="ctr">
+                      <a:noFill/>
+                      <a:prstDash val="solid"/>
+                      <a:round/>
+                      <a:headEnd type="none" w="med" len="med"/>
+                      <a:tailEnd type="none" w="med" len="med"/>
+                    </a:lnL>
+                    <a:lnR w="12700" cap="flat" cmpd="sng" algn="ctr">
+                      <a:noFill/>
+                      <a:prstDash val="solid"/>
+                      <a:round/>
+                      <a:headEnd type="none" w="med" len="med"/>
+                      <a:tailEnd type="none" w="med" len="med"/>
+                    </a:lnR>
+                    <a:lnT w="3175" cap="flat" cmpd="sng" algn="ctr">
+                      <a:solidFill>
+                        <a:schemeClr val="bg1"/>
+                      </a:solidFill>
+                      <a:prstDash val="solid"/>
+                      <a:round/>
+                      <a:headEnd type="none" w="med" len="med"/>
+                      <a:tailEnd type="none" w="med" len="med"/>
+                    </a:lnT>
+                    <a:lnB w="6350" cap="flat" cmpd="sng" algn="ctr">
+                      <a:solidFill>
+                        <a:schemeClr val="bg1">
+                          <a:lumMod val="85000"/>
+                        </a:schemeClr>
+                      </a:solidFill>
+                      <a:prstDash val="solid"/>
+                      <a:round/>
+                      <a:headEnd type="none" w="med" len="med"/>
+                      <a:tailEnd type="none" w="med" len="med"/>
+                    </a:lnB>
+                    <a:lnTlToBr w="12700" cmpd="sng">
+                      <a:noFill/>
+                      <a:prstDash val="solid"/>
+                    </a:lnTlToBr>
+                    <a:lnBlToTr w="12700" cmpd="sng">
+                      <a:noFill/>
+                      <a:prstDash val="solid"/>
+                    </a:lnBlToTr>
+                    <a:solidFill>
+                      <a:schemeClr val="bg1">
+                        <a:lumMod val="95000"/>
+                      </a:schemeClr>
+                    </a:solidFill>
+                  </a:tcPr>
                 </a:tc>
                 <a:tc>
                   <a:txBody>
                     <a:bodyPr/>
                     <a:lstStyle/>
                     <a:p>
+                      <a:pPr algn="l">
+                        <a:lnSpc>
+                          <a:spcPts val="1200"/>
+                        </a:lnSpc>
+                      </a:pPr>
                       <a:r>
-                        <a:rPr lang="en-US" sz="600" dirty="0"/>
+                        <a:rPr lang="en-US" sz="600" b="0" i="0" dirty="0">
+                          <a:solidFill>
+                            <a:schemeClr val="tx2"/>
+                          </a:solidFill>
+                          <a:latin typeface="Fund Regular" pitchFamily="2" charset="-78"/>
+                          <a:cs typeface="Fund Regular" pitchFamily="2" charset="-78"/>
+                        </a:rPr>
                         <a:t>NRC</a:t>
                       </a:r>
-                      <a:endParaRPr lang="en-IN" sz="600" dirty="0"/>
                     </a:p>
                   </a:txBody>
-                  <a:tcPr/>
+                  <a:tcPr marL="36000" marR="36000" marT="0" marB="0" anchor="ctr">
+                    <a:lnL w="12700" cap="flat" cmpd="sng" algn="ctr">
+                      <a:noFill/>
+                      <a:prstDash val="solid"/>
+                      <a:round/>
+                      <a:headEnd type="none" w="med" len="med"/>
+                      <a:tailEnd type="none" w="med" len="med"/>
+                    </a:lnL>
+                    <a:lnR w="12700" cap="flat" cmpd="sng" algn="ctr">
+                      <a:noFill/>
+                      <a:prstDash val="solid"/>
+                      <a:round/>
+                      <a:headEnd type="none" w="med" len="med"/>
+                      <a:tailEnd type="none" w="med" len="med"/>
+                    </a:lnR>
+                    <a:lnT w="3175" cap="flat" cmpd="sng" algn="ctr">
+                      <a:solidFill>
+                        <a:schemeClr val="bg1"/>
+                      </a:solidFill>
+                      <a:prstDash val="solid"/>
+                      <a:round/>
+                      <a:headEnd type="none" w="med" len="med"/>
+                      <a:tailEnd type="none" w="med" len="med"/>
+                    </a:lnT>
+                    <a:lnB w="6350" cap="flat" cmpd="sng" algn="ctr">
+                      <a:solidFill>
+                        <a:schemeClr val="bg1">
+                          <a:lumMod val="85000"/>
+                        </a:schemeClr>
+                      </a:solidFill>
+                      <a:prstDash val="solid"/>
+                      <a:round/>
+                      <a:headEnd type="none" w="med" len="med"/>
+                      <a:tailEnd type="none" w="med" len="med"/>
+                    </a:lnB>
+                    <a:lnTlToBr w="12700" cmpd="sng">
+                      <a:noFill/>
+                      <a:prstDash val="solid"/>
+                    </a:lnTlToBr>
+                    <a:lnBlToTr w="12700" cmpd="sng">
+                      <a:noFill/>
+                      <a:prstDash val="solid"/>
+                    </a:lnBlToTr>
+                    <a:solidFill>
+                      <a:schemeClr val="bg1">
+                        <a:lumMod val="95000"/>
+                      </a:schemeClr>
+                    </a:solidFill>
+                  </a:tcPr>
                 </a:tc>
                 <a:extLst>
                   <a:ext uri="{0D108BD9-81ED-4DB2-BD59-A6C34878D82A}">
-                    <a16:rowId xmlns:a16="http://schemas.microsoft.com/office/drawing/2014/main" val="1077373604"/>
+                    <a16:rowId xmlns:a16="http://schemas.microsoft.com/office/drawing/2014/main" val="2147178351"/>
                   </a:ext>
                 </a:extLst>
               </a:tr>
-              <a:tr h="0">
+              <a:tr h="132304">
                 <a:tc>
                   <a:txBody>
                     <a:bodyPr/>
                     <a:lstStyle/>
                     <a:p>
+                      <a:pPr algn="l">
+                        <a:lnSpc>
+                          <a:spcPts val="1200"/>
+                        </a:lnSpc>
+                      </a:pPr>
                       <a:r>
-                        <a:rPr lang="en-US" sz="600" dirty="0"/>
-                        <a:t>a</a:t>
+                        <a:rPr lang="en-US" sz="600" b="0" i="0" dirty="0">
+                          <a:solidFill>
+                            <a:schemeClr val="tx1"/>
+                          </a:solidFill>
+                          <a:latin typeface="Fund Light" pitchFamily="2" charset="-78"/>
+                          <a:cs typeface="Fund Light" pitchFamily="2" charset="-78"/>
+                        </a:rPr>
+                        <a:t>Member #1</a:t>
                       </a:r>
-                      <a:endParaRPr lang="en-IN" sz="600" dirty="0"/>
                     </a:p>
                   </a:txBody>
-                  <a:tcPr/>
+                  <a:tcPr marL="36000" marR="36000" marT="0" marB="0" anchor="ctr">
+                    <a:lnL w="12700" cap="flat" cmpd="sng" algn="ctr">
+                      <a:noFill/>
+                      <a:prstDash val="solid"/>
+                      <a:round/>
+                      <a:headEnd type="none" w="med" len="med"/>
+                      <a:tailEnd type="none" w="med" len="med"/>
+                    </a:lnL>
+                    <a:lnR w="12700" cap="flat" cmpd="sng" algn="ctr">
+                      <a:noFill/>
+                      <a:prstDash val="solid"/>
+                      <a:round/>
+                      <a:headEnd type="none" w="med" len="med"/>
+                      <a:tailEnd type="none" w="med" len="med"/>
+                    </a:lnR>
+                    <a:lnT w="6350" cap="flat" cmpd="sng" algn="ctr">
+                      <a:solidFill>
+                        <a:schemeClr val="bg1">
+                          <a:lumMod val="85000"/>
+                        </a:schemeClr>
+                      </a:solidFill>
+                      <a:prstDash val="solid"/>
+                      <a:round/>
+                      <a:headEnd type="none" w="med" len="med"/>
+                      <a:tailEnd type="none" w="med" len="med"/>
+                    </a:lnT>
+                    <a:lnB w="6350" cap="flat" cmpd="sng" algn="ctr">
+                      <a:solidFill>
+                        <a:schemeClr val="bg1">
+                          <a:lumMod val="85000"/>
+                        </a:schemeClr>
+                      </a:solidFill>
+                      <a:prstDash val="solid"/>
+                      <a:round/>
+                      <a:headEnd type="none" w="med" len="med"/>
+                      <a:tailEnd type="none" w="med" len="med"/>
+                    </a:lnB>
+                    <a:lnTlToBr w="12700" cmpd="sng">
+                      <a:noFill/>
+                      <a:prstDash val="solid"/>
+                    </a:lnTlToBr>
+                    <a:lnBlToTr w="12700" cmpd="sng">
+                      <a:noFill/>
+                      <a:prstDash val="solid"/>
+                    </a:lnBlToTr>
+                    <a:noFill/>
+                  </a:tcPr>
                 </a:tc>
                 <a:tc>
                   <a:txBody>
                     <a:bodyPr/>
                     <a:lstStyle/>
                     <a:p>
+                      <a:pPr algn="l">
+                        <a:lnSpc>
+                          <a:spcPts val="1200"/>
+                        </a:lnSpc>
+                      </a:pPr>
                       <a:r>
-                        <a:rPr lang="en-US" sz="600" dirty="0"/>
-                        <a:t>A</a:t>
+                        <a:rPr lang="en-US" sz="600" b="0" i="0" dirty="0">
+                          <a:solidFill>
+                            <a:schemeClr val="tx1"/>
+                          </a:solidFill>
+                          <a:latin typeface="Fund Light" pitchFamily="2" charset="-78"/>
+                          <a:cs typeface="Fund Light" pitchFamily="2" charset="-78"/>
+                        </a:rPr>
+                        <a:t>No</a:t>
                       </a:r>
-                      <a:endParaRPr lang="en-IN" sz="600" dirty="0"/>
                     </a:p>
                   </a:txBody>
-                  <a:tcPr/>
+                  <a:tcPr marL="36000" marR="36000" marT="0" marB="0" anchor="ctr">
+                    <a:lnL w="12700" cap="flat" cmpd="sng" algn="ctr">
+                      <a:noFill/>
+                      <a:prstDash val="solid"/>
+                      <a:round/>
+                      <a:headEnd type="none" w="med" len="med"/>
+                      <a:tailEnd type="none" w="med" len="med"/>
+                    </a:lnL>
+                    <a:lnR w="12700" cap="flat" cmpd="sng" algn="ctr">
+                      <a:noFill/>
+                      <a:prstDash val="solid"/>
+                      <a:round/>
+                      <a:headEnd type="none" w="med" len="med"/>
+                      <a:tailEnd type="none" w="med" len="med"/>
+                    </a:lnR>
+                    <a:lnT w="6350" cap="flat" cmpd="sng" algn="ctr">
+                      <a:solidFill>
+                        <a:schemeClr val="bg1">
+                          <a:lumMod val="85000"/>
+                        </a:schemeClr>
+                      </a:solidFill>
+                      <a:prstDash val="solid"/>
+                      <a:round/>
+                      <a:headEnd type="none" w="med" len="med"/>
+                      <a:tailEnd type="none" w="med" len="med"/>
+                    </a:lnT>
+                    <a:lnB w="6350" cap="flat" cmpd="sng" algn="ctr">
+                      <a:solidFill>
+                        <a:schemeClr val="bg1">
+                          <a:lumMod val="85000"/>
+                        </a:schemeClr>
+                      </a:solidFill>
+                      <a:prstDash val="solid"/>
+                      <a:round/>
+                      <a:headEnd type="none" w="med" len="med"/>
+                      <a:tailEnd type="none" w="med" len="med"/>
+                    </a:lnB>
+                    <a:lnTlToBr w="12700" cmpd="sng">
+                      <a:noFill/>
+                      <a:prstDash val="solid"/>
+                    </a:lnTlToBr>
+                    <a:lnBlToTr w="12700" cmpd="sng">
+                      <a:noFill/>
+                      <a:prstDash val="solid"/>
+                    </a:lnBlToTr>
+                    <a:noFill/>
+                  </a:tcPr>
                 </a:tc>
                 <a:tc>
                   <a:txBody>
                     <a:bodyPr/>
                     <a:lstStyle/>
                     <a:p>
+                      <a:pPr algn="l">
+                        <a:lnSpc>
+                          <a:spcPts val="1200"/>
+                        </a:lnSpc>
+                      </a:pPr>
                       <a:r>
-                        <a:rPr lang="en-US" sz="600" dirty="0"/>
-                        <a:t>A</a:t>
+                        <a:rPr lang="en-US" sz="600" b="0" i="0">
+                          <a:solidFill>
+                            <a:schemeClr val="tx1"/>
+                          </a:solidFill>
+                          <a:latin typeface="Fund Light" pitchFamily="2" charset="-78"/>
+                          <a:cs typeface="Fund Light" pitchFamily="2" charset="-78"/>
+                        </a:rPr>
+                        <a:t>Yes</a:t>
                       </a:r>
-                      <a:endParaRPr lang="en-IN" sz="600" dirty="0"/>
+                      <a:endParaRPr lang="en-US" sz="600" b="0" i="0" dirty="0">
+                        <a:solidFill>
+                          <a:schemeClr val="tx1"/>
+                        </a:solidFill>
+                        <a:latin typeface="Fund Light" pitchFamily="2" charset="-78"/>
+                        <a:cs typeface="Fund Light" pitchFamily="2" charset="-78"/>
+                      </a:endParaRPr>
                     </a:p>
                   </a:txBody>
-                  <a:tcPr/>
+                  <a:tcPr marL="36000" marR="36000" marT="0" marB="0" anchor="ctr">
+                    <a:lnL w="12700" cap="flat" cmpd="sng" algn="ctr">
+                      <a:noFill/>
+                      <a:prstDash val="solid"/>
+                      <a:round/>
+                      <a:headEnd type="none" w="med" len="med"/>
+                      <a:tailEnd type="none" w="med" len="med"/>
+                    </a:lnL>
+                    <a:lnR w="12700" cap="flat" cmpd="sng" algn="ctr">
+                      <a:noFill/>
+                      <a:prstDash val="solid"/>
+                      <a:round/>
+                      <a:headEnd type="none" w="med" len="med"/>
+                      <a:tailEnd type="none" w="med" len="med"/>
+                    </a:lnR>
+                    <a:lnT w="6350" cap="flat" cmpd="sng" algn="ctr">
+                      <a:solidFill>
+                        <a:schemeClr val="bg1">
+                          <a:lumMod val="85000"/>
+                        </a:schemeClr>
+                      </a:solidFill>
+                      <a:prstDash val="solid"/>
+                      <a:round/>
+                      <a:headEnd type="none" w="med" len="med"/>
+                      <a:tailEnd type="none" w="med" len="med"/>
+                    </a:lnT>
+                    <a:lnB w="6350" cap="flat" cmpd="sng" algn="ctr">
+                      <a:solidFill>
+                        <a:schemeClr val="bg1">
+                          <a:lumMod val="85000"/>
+                        </a:schemeClr>
+                      </a:solidFill>
+                      <a:prstDash val="solid"/>
+                      <a:round/>
+                      <a:headEnd type="none" w="med" len="med"/>
+                      <a:tailEnd type="none" w="med" len="med"/>
+                    </a:lnB>
+                    <a:lnTlToBr w="12700" cmpd="sng">
+                      <a:noFill/>
+                      <a:prstDash val="solid"/>
+                    </a:lnTlToBr>
+                    <a:lnBlToTr w="12700" cmpd="sng">
+                      <a:noFill/>
+                      <a:prstDash val="solid"/>
+                    </a:lnBlToTr>
+                    <a:noFill/>
+                  </a:tcPr>
                 </a:tc>
                 <a:tc>
                   <a:txBody>
                     <a:bodyPr/>
                     <a:lstStyle/>
                     <a:p>
+                      <a:pPr marL="0" algn="l" defTabSz="914400" rtl="0" eaLnBrk="1" latinLnBrk="0" hangingPunct="1">
+                        <a:lnSpc>
+                          <a:spcPts val="1200"/>
+                        </a:lnSpc>
+                      </a:pPr>
                       <a:r>
-                        <a:rPr lang="en-US" sz="600" dirty="0"/>
-                        <a:t>A</a:t>
+                        <a:rPr lang="en-US" sz="600" b="0" i="0" kern="1200" dirty="0">
+                          <a:solidFill>
+                            <a:schemeClr val="tx1"/>
+                          </a:solidFill>
+                          <a:latin typeface="Fund Light" pitchFamily="2" charset="-78"/>
+                          <a:ea typeface="+mn-ea"/>
+                          <a:cs typeface="Fund Light" pitchFamily="2" charset="-78"/>
+                        </a:rPr>
+                        <a:t>q</a:t>
                       </a:r>
-                      <a:endParaRPr lang="en-IN" sz="600" dirty="0"/>
                     </a:p>
                   </a:txBody>
-                  <a:tcPr/>
+                  <a:tcPr marL="36000" marR="36000" marT="0" marB="0" anchor="b">
+                    <a:lnL w="12700" cmpd="sng">
+                      <a:noFill/>
+                    </a:lnL>
+                    <a:lnR w="12700" cap="flat" cmpd="sng" algn="ctr">
+                      <a:noFill/>
+                      <a:prstDash val="solid"/>
+                      <a:round/>
+                      <a:headEnd type="none" w="med" len="med"/>
+                      <a:tailEnd type="none" w="med" len="med"/>
+                    </a:lnR>
+                    <a:lnT w="6350" cap="flat" cmpd="sng" algn="ctr">
+                      <a:solidFill>
+                        <a:schemeClr val="bg1">
+                          <a:lumMod val="85000"/>
+                        </a:schemeClr>
+                      </a:solidFill>
+                      <a:prstDash val="solid"/>
+                      <a:round/>
+                      <a:headEnd type="none" w="med" len="med"/>
+                      <a:tailEnd type="none" w="med" len="med"/>
+                    </a:lnT>
+                    <a:lnB w="6350" cap="flat" cmpd="sng" algn="ctr">
+                      <a:solidFill>
+                        <a:schemeClr val="bg1">
+                          <a:lumMod val="85000"/>
+                        </a:schemeClr>
+                      </a:solidFill>
+                      <a:prstDash val="solid"/>
+                      <a:round/>
+                      <a:headEnd type="none" w="med" len="med"/>
+                      <a:tailEnd type="none" w="med" len="med"/>
+                    </a:lnB>
+                    <a:lnTlToBr w="12700" cmpd="sng">
+                      <a:noFill/>
+                      <a:prstDash val="solid"/>
+                    </a:lnTlToBr>
+                    <a:lnBlToTr w="12700" cmpd="sng">
+                      <a:noFill/>
+                      <a:prstDash val="solid"/>
+                    </a:lnBlToTr>
+                    <a:noFill/>
+                  </a:tcPr>
                 </a:tc>
                 <a:tc>
                   <a:txBody>
                     <a:bodyPr/>
                     <a:lstStyle/>
                     <a:p>
+                      <a:pPr marL="0" algn="l" defTabSz="914400" rtl="0" eaLnBrk="1" latinLnBrk="0" hangingPunct="1">
+                        <a:lnSpc>
+                          <a:spcPts val="1200"/>
+                        </a:lnSpc>
+                      </a:pPr>
                       <a:r>
-                        <a:rPr lang="en-US" sz="600" dirty="0"/>
-                        <a:t>A</a:t>
+                        <a:rPr lang="en-US" sz="600" b="0" i="0" kern="1200" dirty="0">
+                          <a:solidFill>
+                            <a:schemeClr val="tx1"/>
+                          </a:solidFill>
+                          <a:latin typeface="Fund Light" pitchFamily="2" charset="-78"/>
+                          <a:ea typeface="+mn-ea"/>
+                          <a:cs typeface="Fund Light" pitchFamily="2" charset="-78"/>
+                        </a:rPr>
+                        <a:t>q</a:t>
                       </a:r>
-                      <a:endParaRPr lang="en-IN" sz="600" dirty="0"/>
                     </a:p>
                   </a:txBody>
-                  <a:tcPr/>
+                  <a:tcPr marL="36000" marR="36000" marT="0" marB="0" anchor="ctr">
+                    <a:lnL w="12700" cap="flat" cmpd="sng" algn="ctr">
+                      <a:noFill/>
+                      <a:prstDash val="solid"/>
+                      <a:round/>
+                      <a:headEnd type="none" w="med" len="med"/>
+                      <a:tailEnd type="none" w="med" len="med"/>
+                    </a:lnL>
+                    <a:lnR w="12700" cap="flat" cmpd="sng" algn="ctr">
+                      <a:noFill/>
+                      <a:prstDash val="solid"/>
+                      <a:round/>
+                      <a:headEnd type="none" w="med" len="med"/>
+                      <a:tailEnd type="none" w="med" len="med"/>
+                    </a:lnR>
+                    <a:lnT w="6350" cap="flat" cmpd="sng" algn="ctr">
+                      <a:solidFill>
+                        <a:schemeClr val="bg1">
+                          <a:lumMod val="85000"/>
+                        </a:schemeClr>
+                      </a:solidFill>
+                      <a:prstDash val="solid"/>
+                      <a:round/>
+                      <a:headEnd type="none" w="med" len="med"/>
+                      <a:tailEnd type="none" w="med" len="med"/>
+                    </a:lnT>
+                    <a:lnB w="6350" cap="flat" cmpd="sng" algn="ctr">
+                      <a:solidFill>
+                        <a:schemeClr val="bg1">
+                          <a:lumMod val="85000"/>
+                        </a:schemeClr>
+                      </a:solidFill>
+                      <a:prstDash val="solid"/>
+                      <a:round/>
+                      <a:headEnd type="none" w="med" len="med"/>
+                      <a:tailEnd type="none" w="med" len="med"/>
+                    </a:lnB>
+                    <a:lnTlToBr w="12700" cmpd="sng">
+                      <a:noFill/>
+                      <a:prstDash val="solid"/>
+                    </a:lnTlToBr>
+                    <a:lnBlToTr w="12700" cmpd="sng">
+                      <a:noFill/>
+                      <a:prstDash val="solid"/>
+                    </a:lnBlToTr>
+                    <a:noFill/>
+                  </a:tcPr>
                 </a:tc>
                 <a:tc>
                   <a:txBody>
                     <a:bodyPr/>
                     <a:lstStyle/>
                     <a:p>
+                      <a:pPr marL="0" algn="l" defTabSz="914400" rtl="0" eaLnBrk="1" latinLnBrk="0" hangingPunct="1">
+                        <a:lnSpc>
+                          <a:spcPts val="1200"/>
+                        </a:lnSpc>
+                      </a:pPr>
                       <a:r>
-                        <a:rPr lang="en-US" sz="600" dirty="0"/>
-                        <a:t>A</a:t>
+                        <a:rPr lang="en-US" sz="600" b="0" i="0" kern="1200" dirty="0">
+                          <a:solidFill>
+                            <a:schemeClr val="tx1"/>
+                          </a:solidFill>
+                          <a:latin typeface="Fund Light" pitchFamily="2" charset="-78"/>
+                          <a:ea typeface="+mn-ea"/>
+                          <a:cs typeface="Fund Light" pitchFamily="2" charset="-78"/>
+                        </a:rPr>
+                        <a:t>q</a:t>
                       </a:r>
-                      <a:endParaRPr lang="en-IN" sz="600" dirty="0"/>
                     </a:p>
                   </a:txBody>
-                  <a:tcPr/>
+                  <a:tcPr marL="36000" marR="36000" marT="0" marB="0" anchor="ctr">
+                    <a:lnL w="12700" cap="flat" cmpd="sng" algn="ctr">
+                      <a:noFill/>
+                      <a:prstDash val="solid"/>
+                      <a:round/>
+                      <a:headEnd type="none" w="med" len="med"/>
+                      <a:tailEnd type="none" w="med" len="med"/>
+                    </a:lnL>
+                    <a:lnR w="12700" cap="flat" cmpd="sng" algn="ctr">
+                      <a:noFill/>
+                      <a:prstDash val="solid"/>
+                      <a:round/>
+                      <a:headEnd type="none" w="med" len="med"/>
+                      <a:tailEnd type="none" w="med" len="med"/>
+                    </a:lnR>
+                    <a:lnT w="6350" cap="flat" cmpd="sng" algn="ctr">
+                      <a:solidFill>
+                        <a:schemeClr val="bg1">
+                          <a:lumMod val="85000"/>
+                        </a:schemeClr>
+                      </a:solidFill>
+                      <a:prstDash val="solid"/>
+                      <a:round/>
+                      <a:headEnd type="none" w="med" len="med"/>
+                      <a:tailEnd type="none" w="med" len="med"/>
+                    </a:lnT>
+                    <a:lnB w="6350" cap="flat" cmpd="sng" algn="ctr">
+                      <a:solidFill>
+                        <a:schemeClr val="bg1">
+                          <a:lumMod val="85000"/>
+                        </a:schemeClr>
+                      </a:solidFill>
+                      <a:prstDash val="solid"/>
+                      <a:round/>
+                      <a:headEnd type="none" w="med" len="med"/>
+                      <a:tailEnd type="none" w="med" len="med"/>
+                    </a:lnB>
+                    <a:lnTlToBr w="12700" cmpd="sng">
+                      <a:noFill/>
+                      <a:prstDash val="solid"/>
+                    </a:lnTlToBr>
+                    <a:lnBlToTr w="12700" cmpd="sng">
+                      <a:noFill/>
+                      <a:prstDash val="solid"/>
+                    </a:lnBlToTr>
+                    <a:noFill/>
+                  </a:tcPr>
                 </a:tc>
                 <a:tc>
                   <a:txBody>
                     <a:bodyPr/>
                     <a:lstStyle/>
                     <a:p>
+                      <a:pPr marL="0" algn="l" defTabSz="914400" rtl="0" eaLnBrk="1" latinLnBrk="0" hangingPunct="1">
+                        <a:lnSpc>
+                          <a:spcPts val="1200"/>
+                        </a:lnSpc>
+                      </a:pPr>
                       <a:r>
-                        <a:rPr lang="en-US" sz="600" dirty="0"/>
-                        <a:t>a</a:t>
+                        <a:rPr lang="en-US" sz="600" b="0" i="0" kern="1200" dirty="0">
+                          <a:solidFill>
+                            <a:schemeClr val="tx1"/>
+                          </a:solidFill>
+                          <a:latin typeface="Fund Light" pitchFamily="2" charset="-78"/>
+                          <a:ea typeface="+mn-ea"/>
+                          <a:cs typeface="Fund Light" pitchFamily="2" charset="-78"/>
+                        </a:rPr>
+                        <a:t>q</a:t>
                       </a:r>
-                      <a:endParaRPr lang="en-IN" sz="600" dirty="0"/>
                     </a:p>
                   </a:txBody>
-                  <a:tcPr/>
+                  <a:tcPr marL="36000" marR="36000" marT="0" marB="0" anchor="ctr">
+                    <a:lnL w="12700" cap="flat" cmpd="sng" algn="ctr">
+                      <a:noFill/>
+                      <a:prstDash val="solid"/>
+                      <a:round/>
+                      <a:headEnd type="none" w="med" len="med"/>
+                      <a:tailEnd type="none" w="med" len="med"/>
+                    </a:lnL>
+                    <a:lnR w="12700" cap="flat" cmpd="sng" algn="ctr">
+                      <a:noFill/>
+                      <a:prstDash val="solid"/>
+                      <a:round/>
+                      <a:headEnd type="none" w="med" len="med"/>
+                      <a:tailEnd type="none" w="med" len="med"/>
+                    </a:lnR>
+                    <a:lnT w="6350" cap="flat" cmpd="sng" algn="ctr">
+                      <a:solidFill>
+                        <a:schemeClr val="bg1">
+                          <a:lumMod val="85000"/>
+                        </a:schemeClr>
+                      </a:solidFill>
+                      <a:prstDash val="solid"/>
+                      <a:round/>
+                      <a:headEnd type="none" w="med" len="med"/>
+                      <a:tailEnd type="none" w="med" len="med"/>
+                    </a:lnT>
+                    <a:lnB w="6350" cap="flat" cmpd="sng" algn="ctr">
+                      <a:solidFill>
+                        <a:schemeClr val="bg1">
+                          <a:lumMod val="85000"/>
+                        </a:schemeClr>
+                      </a:solidFill>
+                      <a:prstDash val="solid"/>
+                      <a:round/>
+                      <a:headEnd type="none" w="med" len="med"/>
+                      <a:tailEnd type="none" w="med" len="med"/>
+                    </a:lnB>
+                    <a:lnTlToBr w="12700" cmpd="sng">
+                      <a:noFill/>
+                      <a:prstDash val="solid"/>
+                    </a:lnTlToBr>
+                    <a:lnBlToTr w="12700" cmpd="sng">
+                      <a:noFill/>
+                      <a:prstDash val="solid"/>
+                    </a:lnBlToTr>
+                    <a:noFill/>
+                  </a:tcPr>
                 </a:tc>
                 <a:extLst>
                   <a:ext uri="{0D108BD9-81ED-4DB2-BD59-A6C34878D82A}">
-                    <a16:rowId xmlns:a16="http://schemas.microsoft.com/office/drawing/2014/main" val="609257130"/>
+                    <a16:rowId xmlns:a16="http://schemas.microsoft.com/office/drawing/2014/main" val="1961714469"/>
                   </a:ext>
                 </a:extLst>
               </a:tr>

--- a/templates/sample.pptx
+++ b/templates/sample.pptx
@@ -3783,7 +3783,7 @@
           <a:p>
             <a:fld id="{8B1AF6D7-0F32-4F05-B21A-8AF0CB26F94C}" type="datetimeFigureOut">
               <a:rPr lang="en-IN" smtClean="0"/>
-              <a:t>08-07-2026</a:t>
+              <a:t>26-06-2026</a:t>
             </a:fld>
             <a:endParaRPr lang="en-IN"/>
           </a:p>
@@ -4200,7 +4200,7 @@
           <a:p>
             <a:fld id="{0490EA95-AFA9-47FA-B067-612933D1D62E}" type="datetimeFigureOut">
               <a:rPr lang="en-IN" smtClean="0"/>
-              <a:t>08-07-2026</a:t>
+              <a:t>26-06-2026</a:t>
             </a:fld>
             <a:endParaRPr lang="en-IN"/>
           </a:p>
@@ -4400,7 +4400,7 @@
           <a:p>
             <a:fld id="{0490EA95-AFA9-47FA-B067-612933D1D62E}" type="datetimeFigureOut">
               <a:rPr lang="en-IN" smtClean="0"/>
-              <a:t>08-07-2026</a:t>
+              <a:t>26-06-2026</a:t>
             </a:fld>
             <a:endParaRPr lang="en-IN"/>
           </a:p>
@@ -4610,7 +4610,7 @@
           <a:p>
             <a:fld id="{0490EA95-AFA9-47FA-B067-612933D1D62E}" type="datetimeFigureOut">
               <a:rPr lang="en-IN" smtClean="0"/>
-              <a:t>08-07-2026</a:t>
+              <a:t>26-06-2026</a:t>
             </a:fld>
             <a:endParaRPr lang="en-IN"/>
           </a:p>
@@ -4810,7 +4810,7 @@
           <a:p>
             <a:fld id="{0490EA95-AFA9-47FA-B067-612933D1D62E}" type="datetimeFigureOut">
               <a:rPr lang="en-IN" smtClean="0"/>
-              <a:t>08-07-2026</a:t>
+              <a:t>26-06-2026</a:t>
             </a:fld>
             <a:endParaRPr lang="en-IN"/>
           </a:p>
@@ -5086,7 +5086,7 @@
           <a:p>
             <a:fld id="{0490EA95-AFA9-47FA-B067-612933D1D62E}" type="datetimeFigureOut">
               <a:rPr lang="en-IN" smtClean="0"/>
-              <a:t>08-07-2026</a:t>
+              <a:t>26-06-2026</a:t>
             </a:fld>
             <a:endParaRPr lang="en-IN"/>
           </a:p>
@@ -5354,7 +5354,7 @@
           <a:p>
             <a:fld id="{0490EA95-AFA9-47FA-B067-612933D1D62E}" type="datetimeFigureOut">
               <a:rPr lang="en-IN" smtClean="0"/>
-              <a:t>08-07-2026</a:t>
+              <a:t>26-06-2026</a:t>
             </a:fld>
             <a:endParaRPr lang="en-IN"/>
           </a:p>
@@ -5769,7 +5769,7 @@
           <a:p>
             <a:fld id="{0490EA95-AFA9-47FA-B067-612933D1D62E}" type="datetimeFigureOut">
               <a:rPr lang="en-IN" smtClean="0"/>
-              <a:t>08-07-2026</a:t>
+              <a:t>26-06-2026</a:t>
             </a:fld>
             <a:endParaRPr lang="en-IN"/>
           </a:p>
@@ -5911,7 +5911,7 @@
           <a:p>
             <a:fld id="{0490EA95-AFA9-47FA-B067-612933D1D62E}" type="datetimeFigureOut">
               <a:rPr lang="en-IN" smtClean="0"/>
-              <a:t>08-07-2026</a:t>
+              <a:t>26-06-2026</a:t>
             </a:fld>
             <a:endParaRPr lang="en-IN"/>
           </a:p>
@@ -6024,7 +6024,7 @@
           <a:p>
             <a:fld id="{0490EA95-AFA9-47FA-B067-612933D1D62E}" type="datetimeFigureOut">
               <a:rPr lang="en-IN" smtClean="0"/>
-              <a:t>08-07-2026</a:t>
+              <a:t>26-06-2026</a:t>
             </a:fld>
             <a:endParaRPr lang="en-IN"/>
           </a:p>
@@ -6337,7 +6337,7 @@
           <a:p>
             <a:fld id="{0490EA95-AFA9-47FA-B067-612933D1D62E}" type="datetimeFigureOut">
               <a:rPr lang="en-IN" smtClean="0"/>
-              <a:t>08-07-2026</a:t>
+              <a:t>26-06-2026</a:t>
             </a:fld>
             <a:endParaRPr lang="en-IN"/>
           </a:p>
@@ -6626,7 +6626,7 @@
           <a:p>
             <a:fld id="{0490EA95-AFA9-47FA-B067-612933D1D62E}" type="datetimeFigureOut">
               <a:rPr lang="en-IN" smtClean="0"/>
-              <a:t>08-07-2026</a:t>
+              <a:t>26-06-2026</a:t>
             </a:fld>
             <a:endParaRPr lang="en-IN"/>
           </a:p>
@@ -6869,7 +6869,7 @@
           <a:p>
             <a:fld id="{0490EA95-AFA9-47FA-B067-612933D1D62E}" type="datetimeFigureOut">
               <a:rPr lang="en-IN" smtClean="0"/>
-              <a:t>08-07-2026</a:t>
+              <a:t>26-06-2026</a:t>
             </a:fld>
             <a:endParaRPr lang="en-IN"/>
           </a:p>
@@ -8785,1623 +8785,6 @@
           </a:p>
         </p:txBody>
       </p:sp>
-      <p:graphicFrame>
-        <p:nvGraphicFramePr>
-          <p:cNvPr id="5" name="Board Data">
-            <a:extLst>
-              <a:ext uri="{FF2B5EF4-FFF2-40B4-BE49-F238E27FC236}">
-                <a16:creationId xmlns:a16="http://schemas.microsoft.com/office/drawing/2014/main" id="{99E28619-E8A7-F0D4-9EA1-D7749B17D343}"/>
-              </a:ext>
-            </a:extLst>
-          </p:cNvPr>
-          <p:cNvGraphicFramePr>
-            <a:graphicFrameLocks noGrp="1"/>
-          </p:cNvGraphicFramePr>
-          <p:nvPr>
-            <p:extLst>
-              <p:ext uri="{D42A27DB-BD31-4B8C-83A1-F6EECF244321}">
-                <p14:modId xmlns:p14="http://schemas.microsoft.com/office/powerpoint/2010/main" val="1162638668"/>
-              </p:ext>
-            </p:extLst>
-          </p:nvPr>
-        </p:nvGraphicFramePr>
-        <p:xfrm>
-          <a:off x="6941467" y="136525"/>
-          <a:ext cx="4334512" cy="457200"/>
-        </p:xfrm>
-        <a:graphic>
-          <a:graphicData uri="http://schemas.openxmlformats.org/drawingml/2006/table">
-            <a:tbl>
-              <a:tblPr firstRow="1">
-                <a:tableStyleId>{5C22544A-7EE6-4342-B048-85BDC9FD1C3A}</a:tableStyleId>
-              </a:tblPr>
-              <a:tblGrid>
-                <a:gridCol w="1209002">
-                  <a:extLst>
-                    <a:ext uri="{9D8B030D-6E8A-4147-A177-3AD203B41FA5}">
-                      <a16:colId xmlns:a16="http://schemas.microsoft.com/office/drawing/2014/main" val="2710512592"/>
-                    </a:ext>
-                  </a:extLst>
-                </a:gridCol>
-                <a:gridCol w="650631">
-                  <a:extLst>
-                    <a:ext uri="{9D8B030D-6E8A-4147-A177-3AD203B41FA5}">
-                      <a16:colId xmlns:a16="http://schemas.microsoft.com/office/drawing/2014/main" val="3519371818"/>
-                    </a:ext>
-                  </a:extLst>
-                </a:gridCol>
-                <a:gridCol w="703385">
-                  <a:extLst>
-                    <a:ext uri="{9D8B030D-6E8A-4147-A177-3AD203B41FA5}">
-                      <a16:colId xmlns:a16="http://schemas.microsoft.com/office/drawing/2014/main" val="4260604003"/>
-                    </a:ext>
-                  </a:extLst>
-                </a:gridCol>
-                <a:gridCol w="422030">
-                  <a:extLst>
-                    <a:ext uri="{9D8B030D-6E8A-4147-A177-3AD203B41FA5}">
-                      <a16:colId xmlns:a16="http://schemas.microsoft.com/office/drawing/2014/main" val="958991336"/>
-                    </a:ext>
-                  </a:extLst>
-                </a:gridCol>
-                <a:gridCol w="483577">
-                  <a:extLst>
-                    <a:ext uri="{9D8B030D-6E8A-4147-A177-3AD203B41FA5}">
-                      <a16:colId xmlns:a16="http://schemas.microsoft.com/office/drawing/2014/main" val="4239024402"/>
-                    </a:ext>
-                  </a:extLst>
-                </a:gridCol>
-                <a:gridCol w="501162">
-                  <a:extLst>
-                    <a:ext uri="{9D8B030D-6E8A-4147-A177-3AD203B41FA5}">
-                      <a16:colId xmlns:a16="http://schemas.microsoft.com/office/drawing/2014/main" val="505228023"/>
-                    </a:ext>
-                  </a:extLst>
-                </a:gridCol>
-                <a:gridCol w="364725">
-                  <a:extLst>
-                    <a:ext uri="{9D8B030D-6E8A-4147-A177-3AD203B41FA5}">
-                      <a16:colId xmlns:a16="http://schemas.microsoft.com/office/drawing/2014/main" val="3014002297"/>
-                    </a:ext>
-                  </a:extLst>
-                </a:gridCol>
-              </a:tblGrid>
-              <a:tr h="182880">
-                <a:tc gridSpan="2">
-                  <a:txBody>
-                    <a:bodyPr/>
-                    <a:lstStyle/>
-                    <a:p>
-                      <a:pPr algn="l">
-                        <a:lnSpc>
-                          <a:spcPts val="1300"/>
-                        </a:lnSpc>
-                      </a:pPr>
-                      <a:r>
-                        <a:rPr lang="en-US" sz="600" b="0" i="0" dirty="0">
-                          <a:solidFill>
-                            <a:schemeClr val="bg1"/>
-                          </a:solidFill>
-                          <a:latin typeface="Fund Regular" pitchFamily="2" charset="-78"/>
-                          <a:cs typeface="Fund Regular" pitchFamily="2" charset="-78"/>
-                        </a:rPr>
-                        <a:t>BOARD COMPOSITION DATA</a:t>
-                      </a:r>
-                    </a:p>
-                  </a:txBody>
-                  <a:tcPr marL="36000" marR="36000" marT="0" marB="0" anchor="ctr">
-                    <a:lnL w="3175" cap="flat" cmpd="sng" algn="ctr">
-                      <a:solidFill>
-                        <a:schemeClr val="bg1"/>
-                      </a:solidFill>
-                      <a:prstDash val="solid"/>
-                      <a:round/>
-                      <a:headEnd type="none" w="med" len="med"/>
-                      <a:tailEnd type="none" w="med" len="med"/>
-                    </a:lnL>
-                    <a:lnR w="3175" cap="flat" cmpd="sng" algn="ctr">
-                      <a:solidFill>
-                        <a:schemeClr val="bg1"/>
-                      </a:solidFill>
-                      <a:prstDash val="solid"/>
-                      <a:round/>
-                      <a:headEnd type="none" w="med" len="med"/>
-                      <a:tailEnd type="none" w="med" len="med"/>
-                    </a:lnR>
-                    <a:lnT w="3175" cap="flat" cmpd="sng" algn="ctr">
-                      <a:solidFill>
-                        <a:schemeClr val="bg1"/>
-                      </a:solidFill>
-                      <a:prstDash val="solid"/>
-                      <a:round/>
-                      <a:headEnd type="none" w="med" len="med"/>
-                      <a:tailEnd type="none" w="med" len="med"/>
-                    </a:lnT>
-                    <a:lnB w="3175" cap="flat" cmpd="sng" algn="ctr">
-                      <a:solidFill>
-                        <a:schemeClr val="bg1"/>
-                      </a:solidFill>
-                      <a:prstDash val="solid"/>
-                      <a:round/>
-                      <a:headEnd type="none" w="med" len="med"/>
-                      <a:tailEnd type="none" w="med" len="med"/>
-                    </a:lnB>
-                    <a:lnTlToBr w="12700" cmpd="sng">
-                      <a:noFill/>
-                      <a:prstDash val="solid"/>
-                    </a:lnTlToBr>
-                    <a:lnBlToTr w="12700" cmpd="sng">
-                      <a:noFill/>
-                      <a:prstDash val="solid"/>
-                    </a:lnBlToTr>
-                    <a:solidFill>
-                      <a:schemeClr val="tx2"/>
-                    </a:solidFill>
-                  </a:tcPr>
-                </a:tc>
-                <a:tc hMerge="1">
-                  <a:txBody>
-                    <a:bodyPr/>
-                    <a:lstStyle/>
-                    <a:p>
-                      <a:pPr>
-                        <a:lnSpc>
-                          <a:spcPts val="1300"/>
-                        </a:lnSpc>
-                      </a:pPr>
-                      <a:endParaRPr lang="en-US" sz="1200" dirty="0">
-                        <a:solidFill>
-                          <a:schemeClr val="bg1"/>
-                        </a:solidFill>
-                        <a:latin typeface="Sakkal Majalla" panose="02000000000000000000" pitchFamily="2" charset="-78"/>
-                        <a:cs typeface="Sakkal Majalla" panose="02000000000000000000" pitchFamily="2" charset="-78"/>
-                      </a:endParaRPr>
-                    </a:p>
-                  </a:txBody>
-                  <a:tcPr marL="36000" marR="36000" marT="0" marB="0" anchor="ctr">
-                    <a:lnL w="3175" cap="flat" cmpd="sng" algn="ctr">
-                      <a:solidFill>
-                        <a:schemeClr val="bg1"/>
-                      </a:solidFill>
-                      <a:prstDash val="solid"/>
-                      <a:round/>
-                      <a:headEnd type="none" w="med" len="med"/>
-                      <a:tailEnd type="none" w="med" len="med"/>
-                    </a:lnL>
-                    <a:lnR w="3175" cap="flat" cmpd="sng" algn="ctr">
-                      <a:solidFill>
-                        <a:schemeClr val="bg1"/>
-                      </a:solidFill>
-                      <a:prstDash val="solid"/>
-                      <a:round/>
-                      <a:headEnd type="none" w="med" len="med"/>
-                      <a:tailEnd type="none" w="med" len="med"/>
-                    </a:lnR>
-                    <a:lnT w="3175" cap="flat" cmpd="sng" algn="ctr">
-                      <a:solidFill>
-                        <a:schemeClr val="bg1"/>
-                      </a:solidFill>
-                      <a:prstDash val="solid"/>
-                      <a:round/>
-                      <a:headEnd type="none" w="med" len="med"/>
-                      <a:tailEnd type="none" w="med" len="med"/>
-                    </a:lnT>
-                    <a:lnB w="3175" cap="flat" cmpd="sng" algn="ctr">
-                      <a:solidFill>
-                        <a:schemeClr val="bg1"/>
-                      </a:solidFill>
-                      <a:prstDash val="solid"/>
-                      <a:round/>
-                      <a:headEnd type="none" w="med" len="med"/>
-                      <a:tailEnd type="none" w="med" len="med"/>
-                    </a:lnB>
-                    <a:lnTlToBr w="12700" cmpd="sng">
-                      <a:noFill/>
-                      <a:prstDash val="solid"/>
-                    </a:lnTlToBr>
-                    <a:lnBlToTr w="12700" cmpd="sng">
-                      <a:noFill/>
-                      <a:prstDash val="solid"/>
-                    </a:lnBlToTr>
-                    <a:solidFill>
-                      <a:schemeClr val="tx2"/>
-                    </a:solidFill>
-                  </a:tcPr>
-                </a:tc>
-                <a:tc gridSpan="2">
-                  <a:txBody>
-                    <a:bodyPr/>
-                    <a:lstStyle/>
-                    <a:p>
-                      <a:pPr algn="l">
-                        <a:lnSpc>
-                          <a:spcPts val="1300"/>
-                        </a:lnSpc>
-                      </a:pPr>
-                      <a:r>
-                        <a:rPr lang="en-US" sz="600" b="0" i="0" kern="1200" dirty="0">
-                          <a:solidFill>
-                            <a:schemeClr val="bg1"/>
-                          </a:solidFill>
-                          <a:latin typeface="Fund Regular" pitchFamily="2" charset="-78"/>
-                          <a:ea typeface="+mn-ea"/>
-                          <a:cs typeface="Fund Regular" pitchFamily="2" charset="-78"/>
-                        </a:rPr>
-                        <a:t>START DATE: MMMM-YYYY</a:t>
-                      </a:r>
-                      <a:endParaRPr lang="en-US" sz="600" dirty="0">
-                        <a:solidFill>
-                          <a:schemeClr val="bg1"/>
-                        </a:solidFill>
-                        <a:latin typeface="Sakkal Majalla" panose="02000000000000000000" pitchFamily="2" charset="-78"/>
-                        <a:cs typeface="Sakkal Majalla" panose="02000000000000000000" pitchFamily="2" charset="-78"/>
-                      </a:endParaRPr>
-                    </a:p>
-                  </a:txBody>
-                  <a:tcPr marL="36000" marR="36000" marT="0" marB="0" anchor="ctr">
-                    <a:lnL w="3175" cap="flat" cmpd="sng" algn="ctr">
-                      <a:solidFill>
-                        <a:schemeClr val="bg1"/>
-                      </a:solidFill>
-                      <a:prstDash val="solid"/>
-                      <a:round/>
-                      <a:headEnd type="none" w="med" len="med"/>
-                      <a:tailEnd type="none" w="med" len="med"/>
-                    </a:lnL>
-                    <a:lnR w="3175" cap="flat" cmpd="sng" algn="ctr">
-                      <a:solidFill>
-                        <a:schemeClr val="bg1"/>
-                      </a:solidFill>
-                      <a:prstDash val="solid"/>
-                      <a:round/>
-                      <a:headEnd type="none" w="med" len="med"/>
-                      <a:tailEnd type="none" w="med" len="med"/>
-                    </a:lnR>
-                    <a:lnT w="3175" cap="flat" cmpd="sng" algn="ctr">
-                      <a:solidFill>
-                        <a:schemeClr val="bg1"/>
-                      </a:solidFill>
-                      <a:prstDash val="solid"/>
-                      <a:round/>
-                      <a:headEnd type="none" w="med" len="med"/>
-                      <a:tailEnd type="none" w="med" len="med"/>
-                    </a:lnT>
-                    <a:lnB w="3175" cap="flat" cmpd="sng" algn="ctr">
-                      <a:solidFill>
-                        <a:schemeClr val="bg1"/>
-                      </a:solidFill>
-                      <a:prstDash val="solid"/>
-                      <a:round/>
-                      <a:headEnd type="none" w="med" len="med"/>
-                      <a:tailEnd type="none" w="med" len="med"/>
-                    </a:lnB>
-                    <a:lnTlToBr w="12700" cmpd="sng">
-                      <a:noFill/>
-                      <a:prstDash val="solid"/>
-                    </a:lnTlToBr>
-                    <a:lnBlToTr w="12700" cmpd="sng">
-                      <a:noFill/>
-                      <a:prstDash val="solid"/>
-                    </a:lnBlToTr>
-                    <a:solidFill>
-                      <a:schemeClr val="tx2"/>
-                    </a:solidFill>
-                  </a:tcPr>
-                </a:tc>
-                <a:tc hMerge="1">
-                  <a:txBody>
-                    <a:bodyPr/>
-                    <a:lstStyle/>
-                    <a:p>
-                      <a:pPr>
-                        <a:lnSpc>
-                          <a:spcPts val="1300"/>
-                        </a:lnSpc>
-                      </a:pPr>
-                      <a:endParaRPr lang="en-US" sz="1200" dirty="0">
-                        <a:solidFill>
-                          <a:schemeClr val="bg1"/>
-                        </a:solidFill>
-                        <a:latin typeface="Sakkal Majalla" panose="02000000000000000000" pitchFamily="2" charset="-78"/>
-                        <a:cs typeface="Sakkal Majalla" panose="02000000000000000000" pitchFamily="2" charset="-78"/>
-                      </a:endParaRPr>
-                    </a:p>
-                  </a:txBody>
-                  <a:tcPr marL="36000" marR="36000" marT="0" marB="0" anchor="ctr">
-                    <a:lnL w="3175" cap="flat" cmpd="sng" algn="ctr">
-                      <a:solidFill>
-                        <a:schemeClr val="bg1"/>
-                      </a:solidFill>
-                      <a:prstDash val="solid"/>
-                      <a:round/>
-                      <a:headEnd type="none" w="med" len="med"/>
-                      <a:tailEnd type="none" w="med" len="med"/>
-                    </a:lnL>
-                    <a:lnR w="3175" cap="flat" cmpd="sng" algn="ctr">
-                      <a:solidFill>
-                        <a:schemeClr val="bg1"/>
-                      </a:solidFill>
-                      <a:prstDash val="solid"/>
-                      <a:round/>
-                      <a:headEnd type="none" w="med" len="med"/>
-                      <a:tailEnd type="none" w="med" len="med"/>
-                    </a:lnR>
-                    <a:lnT w="3175" cap="flat" cmpd="sng" algn="ctr">
-                      <a:solidFill>
-                        <a:schemeClr val="bg1"/>
-                      </a:solidFill>
-                      <a:prstDash val="solid"/>
-                      <a:round/>
-                      <a:headEnd type="none" w="med" len="med"/>
-                      <a:tailEnd type="none" w="med" len="med"/>
-                    </a:lnT>
-                    <a:lnB w="3175" cap="flat" cmpd="sng" algn="ctr">
-                      <a:solidFill>
-                        <a:schemeClr val="bg1"/>
-                      </a:solidFill>
-                      <a:prstDash val="solid"/>
-                      <a:round/>
-                      <a:headEnd type="none" w="med" len="med"/>
-                      <a:tailEnd type="none" w="med" len="med"/>
-                    </a:lnB>
-                    <a:lnTlToBr w="12700" cmpd="sng">
-                      <a:noFill/>
-                      <a:prstDash val="solid"/>
-                    </a:lnTlToBr>
-                    <a:lnBlToTr w="12700" cmpd="sng">
-                      <a:noFill/>
-                      <a:prstDash val="solid"/>
-                    </a:lnBlToTr>
-                    <a:solidFill>
-                      <a:schemeClr val="tx2"/>
-                    </a:solidFill>
-                  </a:tcPr>
-                </a:tc>
-                <a:tc gridSpan="3">
-                  <a:txBody>
-                    <a:bodyPr/>
-                    <a:lstStyle/>
-                    <a:p>
-                      <a:pPr algn="l">
-                        <a:lnSpc>
-                          <a:spcPts val="1300"/>
-                        </a:lnSpc>
-                      </a:pPr>
-                      <a:r>
-                        <a:rPr kumimoji="0" lang="en-US" sz="600" b="0" i="0" u="none" strike="noStrike" kern="1200" cap="none" spc="0" normalizeH="0" baseline="0" noProof="0" dirty="0">
-                          <a:ln>
-                            <a:noFill/>
-                          </a:ln>
-                          <a:solidFill>
-                            <a:srgbClr val="FFFFFF"/>
-                          </a:solidFill>
-                          <a:effectLst/>
-                          <a:uLnTx/>
-                          <a:uFillTx/>
-                          <a:latin typeface="Fund Regular" pitchFamily="2" charset="-78"/>
-                          <a:ea typeface="+mn-ea"/>
-                          <a:cs typeface="Fund Regular" pitchFamily="2" charset="-78"/>
-                        </a:rPr>
-                        <a:t>END DATE: MMMM-YYYY</a:t>
-                      </a:r>
-                      <a:endParaRPr lang="en-US" sz="600" dirty="0">
-                        <a:solidFill>
-                          <a:schemeClr val="bg1"/>
-                        </a:solidFill>
-                        <a:latin typeface="Sakkal Majalla" panose="02000000000000000000" pitchFamily="2" charset="-78"/>
-                        <a:cs typeface="Sakkal Majalla" panose="02000000000000000000" pitchFamily="2" charset="-78"/>
-                      </a:endParaRPr>
-                    </a:p>
-                  </a:txBody>
-                  <a:tcPr marL="36000" marR="36000" marT="0" marB="0" anchor="ctr">
-                    <a:lnL w="3175" cap="flat" cmpd="sng" algn="ctr">
-                      <a:solidFill>
-                        <a:schemeClr val="bg1"/>
-                      </a:solidFill>
-                      <a:prstDash val="solid"/>
-                      <a:round/>
-                      <a:headEnd type="none" w="med" len="med"/>
-                      <a:tailEnd type="none" w="med" len="med"/>
-                    </a:lnL>
-                    <a:lnR w="3175" cap="flat" cmpd="sng" algn="ctr">
-                      <a:solidFill>
-                        <a:schemeClr val="bg1"/>
-                      </a:solidFill>
-                      <a:prstDash val="solid"/>
-                      <a:round/>
-                      <a:headEnd type="none" w="med" len="med"/>
-                      <a:tailEnd type="none" w="med" len="med"/>
-                    </a:lnR>
-                    <a:lnT w="3175" cap="flat" cmpd="sng" algn="ctr">
-                      <a:solidFill>
-                        <a:schemeClr val="bg1"/>
-                      </a:solidFill>
-                      <a:prstDash val="solid"/>
-                      <a:round/>
-                      <a:headEnd type="none" w="med" len="med"/>
-                      <a:tailEnd type="none" w="med" len="med"/>
-                    </a:lnT>
-                    <a:lnB w="3175" cap="flat" cmpd="sng" algn="ctr">
-                      <a:solidFill>
-                        <a:schemeClr val="bg1"/>
-                      </a:solidFill>
-                      <a:prstDash val="solid"/>
-                      <a:round/>
-                      <a:headEnd type="none" w="med" len="med"/>
-                      <a:tailEnd type="none" w="med" len="med"/>
-                    </a:lnB>
-                    <a:lnTlToBr w="12700" cmpd="sng">
-                      <a:noFill/>
-                      <a:prstDash val="solid"/>
-                    </a:lnTlToBr>
-                    <a:lnBlToTr w="12700" cmpd="sng">
-                      <a:noFill/>
-                      <a:prstDash val="solid"/>
-                    </a:lnBlToTr>
-                    <a:solidFill>
-                      <a:schemeClr val="tx2"/>
-                    </a:solidFill>
-                  </a:tcPr>
-                </a:tc>
-                <a:tc hMerge="1">
-                  <a:txBody>
-                    <a:bodyPr/>
-                    <a:lstStyle/>
-                    <a:p>
-                      <a:pPr>
-                        <a:lnSpc>
-                          <a:spcPts val="1300"/>
-                        </a:lnSpc>
-                      </a:pPr>
-                      <a:endParaRPr lang="en-US" sz="1200" dirty="0">
-                        <a:solidFill>
-                          <a:schemeClr val="bg1"/>
-                        </a:solidFill>
-                        <a:latin typeface="Sakkal Majalla" panose="02000000000000000000" pitchFamily="2" charset="-78"/>
-                        <a:cs typeface="Sakkal Majalla" panose="02000000000000000000" pitchFamily="2" charset="-78"/>
-                      </a:endParaRPr>
-                    </a:p>
-                  </a:txBody>
-                  <a:tcPr marL="36000" marR="36000" marT="0" marB="0" anchor="ctr">
-                    <a:lnL w="3175" cap="flat" cmpd="sng" algn="ctr">
-                      <a:solidFill>
-                        <a:schemeClr val="bg1"/>
-                      </a:solidFill>
-                      <a:prstDash val="solid"/>
-                      <a:round/>
-                      <a:headEnd type="none" w="med" len="med"/>
-                      <a:tailEnd type="none" w="med" len="med"/>
-                    </a:lnL>
-                    <a:lnR w="3175" cap="flat" cmpd="sng" algn="ctr">
-                      <a:solidFill>
-                        <a:schemeClr val="bg1"/>
-                      </a:solidFill>
-                      <a:prstDash val="solid"/>
-                      <a:round/>
-                      <a:headEnd type="none" w="med" len="med"/>
-                      <a:tailEnd type="none" w="med" len="med"/>
-                    </a:lnR>
-                    <a:lnT w="3175" cap="flat" cmpd="sng" algn="ctr">
-                      <a:solidFill>
-                        <a:schemeClr val="bg1"/>
-                      </a:solidFill>
-                      <a:prstDash val="solid"/>
-                      <a:round/>
-                      <a:headEnd type="none" w="med" len="med"/>
-                      <a:tailEnd type="none" w="med" len="med"/>
-                    </a:lnT>
-                    <a:lnB w="3175" cap="flat" cmpd="sng" algn="ctr">
-                      <a:solidFill>
-                        <a:schemeClr val="bg1"/>
-                      </a:solidFill>
-                      <a:prstDash val="solid"/>
-                      <a:round/>
-                      <a:headEnd type="none" w="med" len="med"/>
-                      <a:tailEnd type="none" w="med" len="med"/>
-                    </a:lnB>
-                    <a:lnTlToBr w="12700" cmpd="sng">
-                      <a:noFill/>
-                      <a:prstDash val="solid"/>
-                    </a:lnTlToBr>
-                    <a:lnBlToTr w="12700" cmpd="sng">
-                      <a:noFill/>
-                      <a:prstDash val="solid"/>
-                    </a:lnBlToTr>
-                    <a:solidFill>
-                      <a:schemeClr val="tx2"/>
-                    </a:solidFill>
-                  </a:tcPr>
-                </a:tc>
-                <a:tc hMerge="1">
-                  <a:txBody>
-                    <a:bodyPr/>
-                    <a:lstStyle/>
-                    <a:p>
-                      <a:pPr>
-                        <a:lnSpc>
-                          <a:spcPts val="1300"/>
-                        </a:lnSpc>
-                      </a:pPr>
-                      <a:endParaRPr lang="en-US" sz="1200" dirty="0">
-                        <a:solidFill>
-                          <a:schemeClr val="bg1"/>
-                        </a:solidFill>
-                        <a:latin typeface="Sakkal Majalla" panose="02000000000000000000" pitchFamily="2" charset="-78"/>
-                        <a:cs typeface="Sakkal Majalla" panose="02000000000000000000" pitchFamily="2" charset="-78"/>
-                      </a:endParaRPr>
-                    </a:p>
-                  </a:txBody>
-                  <a:tcPr marL="36000" marR="36000" marT="0" marB="0" anchor="ctr">
-                    <a:lnL w="3175" cap="flat" cmpd="sng" algn="ctr">
-                      <a:solidFill>
-                        <a:schemeClr val="bg1"/>
-                      </a:solidFill>
-                      <a:prstDash val="solid"/>
-                      <a:round/>
-                      <a:headEnd type="none" w="med" len="med"/>
-                      <a:tailEnd type="none" w="med" len="med"/>
-                    </a:lnL>
-                    <a:lnR w="3175" cap="flat" cmpd="sng" algn="ctr">
-                      <a:solidFill>
-                        <a:schemeClr val="bg1"/>
-                      </a:solidFill>
-                      <a:prstDash val="solid"/>
-                      <a:round/>
-                      <a:headEnd type="none" w="med" len="med"/>
-                      <a:tailEnd type="none" w="med" len="med"/>
-                    </a:lnR>
-                    <a:lnT w="3175" cap="flat" cmpd="sng" algn="ctr">
-                      <a:solidFill>
-                        <a:schemeClr val="bg1"/>
-                      </a:solidFill>
-                      <a:prstDash val="solid"/>
-                      <a:round/>
-                      <a:headEnd type="none" w="med" len="med"/>
-                      <a:tailEnd type="none" w="med" len="med"/>
-                    </a:lnT>
-                    <a:lnB w="3175" cap="flat" cmpd="sng" algn="ctr">
-                      <a:solidFill>
-                        <a:schemeClr val="bg1"/>
-                      </a:solidFill>
-                      <a:prstDash val="solid"/>
-                      <a:round/>
-                      <a:headEnd type="none" w="med" len="med"/>
-                      <a:tailEnd type="none" w="med" len="med"/>
-                    </a:lnB>
-                    <a:lnTlToBr w="12700" cmpd="sng">
-                      <a:noFill/>
-                      <a:prstDash val="solid"/>
-                    </a:lnTlToBr>
-                    <a:lnBlToTr w="12700" cmpd="sng">
-                      <a:noFill/>
-                      <a:prstDash val="solid"/>
-                    </a:lnBlToTr>
-                    <a:solidFill>
-                      <a:schemeClr val="tx2"/>
-                    </a:solidFill>
-                  </a:tcPr>
-                </a:tc>
-                <a:extLst>
-                  <a:ext uri="{0D108BD9-81ED-4DB2-BD59-A6C34878D82A}">
-                    <a16:rowId xmlns:a16="http://schemas.microsoft.com/office/drawing/2014/main" val="3944166192"/>
-                  </a:ext>
-                </a:extLst>
-              </a:tr>
-              <a:tr h="142016">
-                <a:tc>
-                  <a:txBody>
-                    <a:bodyPr/>
-                    <a:lstStyle/>
-                    <a:p>
-                      <a:pPr algn="l">
-                        <a:lnSpc>
-                          <a:spcPts val="1200"/>
-                        </a:lnSpc>
-                      </a:pPr>
-                      <a:r>
-                        <a:rPr lang="en-US" sz="600" b="0" i="0" dirty="0">
-                          <a:solidFill>
-                            <a:schemeClr val="tx2"/>
-                          </a:solidFill>
-                          <a:latin typeface="Fund Regular" pitchFamily="2" charset="-78"/>
-                          <a:cs typeface="Fund Regular" pitchFamily="2" charset="-78"/>
-                        </a:rPr>
-                        <a:t>NAME</a:t>
-                      </a:r>
-                    </a:p>
-                  </a:txBody>
-                  <a:tcPr marL="36000" marR="36000" marT="0" marB="0" anchor="ctr">
-                    <a:lnL w="12700" cap="flat" cmpd="sng" algn="ctr">
-                      <a:noFill/>
-                      <a:prstDash val="solid"/>
-                      <a:round/>
-                      <a:headEnd type="none" w="med" len="med"/>
-                      <a:tailEnd type="none" w="med" len="med"/>
-                    </a:lnL>
-                    <a:lnR w="12700" cap="flat" cmpd="sng" algn="ctr">
-                      <a:noFill/>
-                      <a:prstDash val="solid"/>
-                      <a:round/>
-                      <a:headEnd type="none" w="med" len="med"/>
-                      <a:tailEnd type="none" w="med" len="med"/>
-                    </a:lnR>
-                    <a:lnT w="3175" cap="flat" cmpd="sng" algn="ctr">
-                      <a:solidFill>
-                        <a:schemeClr val="bg1"/>
-                      </a:solidFill>
-                      <a:prstDash val="solid"/>
-                      <a:round/>
-                      <a:headEnd type="none" w="med" len="med"/>
-                      <a:tailEnd type="none" w="med" len="med"/>
-                    </a:lnT>
-                    <a:lnB w="6350" cap="flat" cmpd="sng" algn="ctr">
-                      <a:solidFill>
-                        <a:schemeClr val="bg1">
-                          <a:lumMod val="85000"/>
-                        </a:schemeClr>
-                      </a:solidFill>
-                      <a:prstDash val="solid"/>
-                      <a:round/>
-                      <a:headEnd type="none" w="med" len="med"/>
-                      <a:tailEnd type="none" w="med" len="med"/>
-                    </a:lnB>
-                    <a:lnTlToBr w="12700" cmpd="sng">
-                      <a:noFill/>
-                      <a:prstDash val="solid"/>
-                    </a:lnTlToBr>
-                    <a:lnBlToTr w="12700" cmpd="sng">
-                      <a:noFill/>
-                      <a:prstDash val="solid"/>
-                    </a:lnBlToTr>
-                    <a:solidFill>
-                      <a:schemeClr val="bg1">
-                        <a:lumMod val="95000"/>
-                      </a:schemeClr>
-                    </a:solidFill>
-                  </a:tcPr>
-                </a:tc>
-                <a:tc>
-                  <a:txBody>
-                    <a:bodyPr/>
-                    <a:lstStyle/>
-                    <a:p>
-                      <a:pPr algn="l">
-                        <a:lnSpc>
-                          <a:spcPts val="1200"/>
-                        </a:lnSpc>
-                      </a:pPr>
-                      <a:r>
-                        <a:rPr lang="en-US" sz="600" b="0" i="0" dirty="0">
-                          <a:solidFill>
-                            <a:schemeClr val="tx2"/>
-                          </a:solidFill>
-                          <a:latin typeface="Fund Regular" pitchFamily="2" charset="-78"/>
-                          <a:cs typeface="Fund Regular" pitchFamily="2" charset="-78"/>
-                        </a:rPr>
-                        <a:t>PIF EMPLOYEE</a:t>
-                      </a:r>
-                    </a:p>
-                  </a:txBody>
-                  <a:tcPr marL="36000" marR="36000" marT="0" marB="0" anchor="ctr">
-                    <a:lnL w="12700" cap="flat" cmpd="sng" algn="ctr">
-                      <a:noFill/>
-                      <a:prstDash val="solid"/>
-                      <a:round/>
-                      <a:headEnd type="none" w="med" len="med"/>
-                      <a:tailEnd type="none" w="med" len="med"/>
-                    </a:lnL>
-                    <a:lnR w="12700" cap="flat" cmpd="sng" algn="ctr">
-                      <a:noFill/>
-                      <a:prstDash val="solid"/>
-                      <a:round/>
-                      <a:headEnd type="none" w="med" len="med"/>
-                      <a:tailEnd type="none" w="med" len="med"/>
-                    </a:lnR>
-                    <a:lnT w="3175" cap="flat" cmpd="sng" algn="ctr">
-                      <a:solidFill>
-                        <a:schemeClr val="bg1"/>
-                      </a:solidFill>
-                      <a:prstDash val="solid"/>
-                      <a:round/>
-                      <a:headEnd type="none" w="med" len="med"/>
-                      <a:tailEnd type="none" w="med" len="med"/>
-                    </a:lnT>
-                    <a:lnB w="6350" cap="flat" cmpd="sng" algn="ctr">
-                      <a:solidFill>
-                        <a:schemeClr val="bg1">
-                          <a:lumMod val="85000"/>
-                        </a:schemeClr>
-                      </a:solidFill>
-                      <a:prstDash val="solid"/>
-                      <a:round/>
-                      <a:headEnd type="none" w="med" len="med"/>
-                      <a:tailEnd type="none" w="med" len="med"/>
-                    </a:lnB>
-                    <a:lnTlToBr w="12700" cmpd="sng">
-                      <a:noFill/>
-                      <a:prstDash val="solid"/>
-                    </a:lnTlToBr>
-                    <a:lnBlToTr w="12700" cmpd="sng">
-                      <a:noFill/>
-                      <a:prstDash val="solid"/>
-                    </a:lnBlToTr>
-                    <a:solidFill>
-                      <a:schemeClr val="bg1">
-                        <a:lumMod val="95000"/>
-                      </a:schemeClr>
-                    </a:solidFill>
-                  </a:tcPr>
-                </a:tc>
-                <a:tc>
-                  <a:txBody>
-                    <a:bodyPr/>
-                    <a:lstStyle/>
-                    <a:p>
-                      <a:pPr algn="l">
-                        <a:lnSpc>
-                          <a:spcPts val="1200"/>
-                        </a:lnSpc>
-                      </a:pPr>
-                      <a:r>
-                        <a:rPr lang="en-US" sz="600" b="0" i="0" dirty="0">
-                          <a:solidFill>
-                            <a:schemeClr val="tx2"/>
-                          </a:solidFill>
-                          <a:latin typeface="Fund Regular" pitchFamily="2" charset="-78"/>
-                          <a:cs typeface="Fund Regular" pitchFamily="2" charset="-78"/>
-                        </a:rPr>
-                        <a:t>OTHER PIF REP.</a:t>
-                      </a:r>
-                    </a:p>
-                  </a:txBody>
-                  <a:tcPr marL="36000" marR="36000" marT="0" marB="0" anchor="ctr">
-                    <a:lnL w="12700" cap="flat" cmpd="sng" algn="ctr">
-                      <a:noFill/>
-                      <a:prstDash val="solid"/>
-                      <a:round/>
-                      <a:headEnd type="none" w="med" len="med"/>
-                      <a:tailEnd type="none" w="med" len="med"/>
-                    </a:lnL>
-                    <a:lnR w="12700" cap="flat" cmpd="sng" algn="ctr">
-                      <a:noFill/>
-                      <a:prstDash val="solid"/>
-                      <a:round/>
-                      <a:headEnd type="none" w="med" len="med"/>
-                      <a:tailEnd type="none" w="med" len="med"/>
-                    </a:lnR>
-                    <a:lnT w="3175" cap="flat" cmpd="sng" algn="ctr">
-                      <a:solidFill>
-                        <a:schemeClr val="bg1"/>
-                      </a:solidFill>
-                      <a:prstDash val="solid"/>
-                      <a:round/>
-                      <a:headEnd type="none" w="med" len="med"/>
-                      <a:tailEnd type="none" w="med" len="med"/>
-                    </a:lnT>
-                    <a:lnB w="6350" cap="flat" cmpd="sng" algn="ctr">
-                      <a:solidFill>
-                        <a:schemeClr val="bg1">
-                          <a:lumMod val="85000"/>
-                        </a:schemeClr>
-                      </a:solidFill>
-                      <a:prstDash val="solid"/>
-                      <a:round/>
-                      <a:headEnd type="none" w="med" len="med"/>
-                      <a:tailEnd type="none" w="med" len="med"/>
-                    </a:lnB>
-                    <a:lnTlToBr w="12700" cmpd="sng">
-                      <a:noFill/>
-                      <a:prstDash val="solid"/>
-                    </a:lnTlToBr>
-                    <a:lnBlToTr w="12700" cmpd="sng">
-                      <a:noFill/>
-                      <a:prstDash val="solid"/>
-                    </a:lnBlToTr>
-                    <a:solidFill>
-                      <a:schemeClr val="bg1">
-                        <a:lumMod val="95000"/>
-                      </a:schemeClr>
-                    </a:solidFill>
-                  </a:tcPr>
-                </a:tc>
-                <a:tc>
-                  <a:txBody>
-                    <a:bodyPr/>
-                    <a:lstStyle/>
-                    <a:p>
-                      <a:pPr algn="l">
-                        <a:lnSpc>
-                          <a:spcPts val="1200"/>
-                        </a:lnSpc>
-                      </a:pPr>
-                      <a:r>
-                        <a:rPr lang="en-US" sz="600" b="0" i="0" dirty="0">
-                          <a:solidFill>
-                            <a:schemeClr val="tx2"/>
-                          </a:solidFill>
-                          <a:latin typeface="Fund Regular" pitchFamily="2" charset="-78"/>
-                          <a:cs typeface="Fund Regular" pitchFamily="2" charset="-78"/>
-                        </a:rPr>
-                        <a:t>BOARD</a:t>
-                      </a:r>
-                    </a:p>
-                  </a:txBody>
-                  <a:tcPr marL="36000" marR="36000" marT="0" marB="0" anchor="ctr">
-                    <a:lnL w="12700" cmpd="sng">
-                      <a:noFill/>
-                    </a:lnL>
-                    <a:lnR w="12700" cap="flat" cmpd="sng" algn="ctr">
-                      <a:noFill/>
-                      <a:prstDash val="solid"/>
-                      <a:round/>
-                      <a:headEnd type="none" w="med" len="med"/>
-                      <a:tailEnd type="none" w="med" len="med"/>
-                    </a:lnR>
-                    <a:lnT w="3175" cap="flat" cmpd="sng" algn="ctr">
-                      <a:solidFill>
-                        <a:schemeClr val="bg1"/>
-                      </a:solidFill>
-                      <a:prstDash val="solid"/>
-                      <a:round/>
-                      <a:headEnd type="none" w="med" len="med"/>
-                      <a:tailEnd type="none" w="med" len="med"/>
-                    </a:lnT>
-                    <a:lnB w="6350" cap="flat" cmpd="sng" algn="ctr">
-                      <a:solidFill>
-                        <a:schemeClr val="bg1">
-                          <a:lumMod val="85000"/>
-                        </a:schemeClr>
-                      </a:solidFill>
-                      <a:prstDash val="solid"/>
-                      <a:round/>
-                      <a:headEnd type="none" w="med" len="med"/>
-                      <a:tailEnd type="none" w="med" len="med"/>
-                    </a:lnB>
-                    <a:lnTlToBr w="12700" cmpd="sng">
-                      <a:noFill/>
-                      <a:prstDash val="solid"/>
-                    </a:lnTlToBr>
-                    <a:lnBlToTr w="12700" cmpd="sng">
-                      <a:noFill/>
-                      <a:prstDash val="solid"/>
-                    </a:lnBlToTr>
-                    <a:solidFill>
-                      <a:schemeClr val="bg1">
-                        <a:lumMod val="95000"/>
-                      </a:schemeClr>
-                    </a:solidFill>
-                  </a:tcPr>
-                </a:tc>
-                <a:tc>
-                  <a:txBody>
-                    <a:bodyPr/>
-                    <a:lstStyle/>
-                    <a:p>
-                      <a:pPr algn="l">
-                        <a:lnSpc>
-                          <a:spcPts val="1200"/>
-                        </a:lnSpc>
-                      </a:pPr>
-                      <a:r>
-                        <a:rPr lang="en-US" sz="600" b="0" i="0" dirty="0">
-                          <a:solidFill>
-                            <a:schemeClr val="tx2"/>
-                          </a:solidFill>
-                          <a:latin typeface="Fund Regular" pitchFamily="2" charset="-78"/>
-                          <a:cs typeface="Fund Regular" pitchFamily="2" charset="-78"/>
-                        </a:rPr>
-                        <a:t>EXCOM</a:t>
-                      </a:r>
-                    </a:p>
-                  </a:txBody>
-                  <a:tcPr marL="36000" marR="36000" marT="0" marB="0" anchor="ctr">
-                    <a:lnL w="12700" cap="flat" cmpd="sng" algn="ctr">
-                      <a:noFill/>
-                      <a:prstDash val="solid"/>
-                      <a:round/>
-                      <a:headEnd type="none" w="med" len="med"/>
-                      <a:tailEnd type="none" w="med" len="med"/>
-                    </a:lnL>
-                    <a:lnR w="12700" cap="flat" cmpd="sng" algn="ctr">
-                      <a:noFill/>
-                      <a:prstDash val="solid"/>
-                      <a:round/>
-                      <a:headEnd type="none" w="med" len="med"/>
-                      <a:tailEnd type="none" w="med" len="med"/>
-                    </a:lnR>
-                    <a:lnT w="3175" cap="flat" cmpd="sng" algn="ctr">
-                      <a:solidFill>
-                        <a:schemeClr val="bg1"/>
-                      </a:solidFill>
-                      <a:prstDash val="solid"/>
-                      <a:round/>
-                      <a:headEnd type="none" w="med" len="med"/>
-                      <a:tailEnd type="none" w="med" len="med"/>
-                    </a:lnT>
-                    <a:lnB w="6350" cap="flat" cmpd="sng" algn="ctr">
-                      <a:solidFill>
-                        <a:schemeClr val="bg1">
-                          <a:lumMod val="85000"/>
-                        </a:schemeClr>
-                      </a:solidFill>
-                      <a:prstDash val="solid"/>
-                      <a:round/>
-                      <a:headEnd type="none" w="med" len="med"/>
-                      <a:tailEnd type="none" w="med" len="med"/>
-                    </a:lnB>
-                    <a:lnTlToBr w="12700" cmpd="sng">
-                      <a:noFill/>
-                      <a:prstDash val="solid"/>
-                    </a:lnTlToBr>
-                    <a:lnBlToTr w="12700" cmpd="sng">
-                      <a:noFill/>
-                      <a:prstDash val="solid"/>
-                    </a:lnBlToTr>
-                    <a:solidFill>
-                      <a:schemeClr val="bg1">
-                        <a:lumMod val="95000"/>
-                      </a:schemeClr>
-                    </a:solidFill>
-                  </a:tcPr>
-                </a:tc>
-                <a:tc>
-                  <a:txBody>
-                    <a:bodyPr/>
-                    <a:lstStyle/>
-                    <a:p>
-                      <a:pPr algn="l">
-                        <a:lnSpc>
-                          <a:spcPts val="1200"/>
-                        </a:lnSpc>
-                      </a:pPr>
-                      <a:r>
-                        <a:rPr lang="en-US" sz="600" b="0" i="0" dirty="0">
-                          <a:solidFill>
-                            <a:schemeClr val="tx2"/>
-                          </a:solidFill>
-                          <a:latin typeface="Fund Regular" pitchFamily="2" charset="-78"/>
-                          <a:cs typeface="Fund Regular" pitchFamily="2" charset="-78"/>
-                        </a:rPr>
-                        <a:t>AUDIT</a:t>
-                      </a:r>
-                    </a:p>
-                  </a:txBody>
-                  <a:tcPr marL="36000" marR="36000" marT="0" marB="0" anchor="ctr">
-                    <a:lnL w="12700" cap="flat" cmpd="sng" algn="ctr">
-                      <a:noFill/>
-                      <a:prstDash val="solid"/>
-                      <a:round/>
-                      <a:headEnd type="none" w="med" len="med"/>
-                      <a:tailEnd type="none" w="med" len="med"/>
-                    </a:lnL>
-                    <a:lnR w="12700" cap="flat" cmpd="sng" algn="ctr">
-                      <a:noFill/>
-                      <a:prstDash val="solid"/>
-                      <a:round/>
-                      <a:headEnd type="none" w="med" len="med"/>
-                      <a:tailEnd type="none" w="med" len="med"/>
-                    </a:lnR>
-                    <a:lnT w="3175" cap="flat" cmpd="sng" algn="ctr">
-                      <a:solidFill>
-                        <a:schemeClr val="bg1"/>
-                      </a:solidFill>
-                      <a:prstDash val="solid"/>
-                      <a:round/>
-                      <a:headEnd type="none" w="med" len="med"/>
-                      <a:tailEnd type="none" w="med" len="med"/>
-                    </a:lnT>
-                    <a:lnB w="6350" cap="flat" cmpd="sng" algn="ctr">
-                      <a:solidFill>
-                        <a:schemeClr val="bg1">
-                          <a:lumMod val="85000"/>
-                        </a:schemeClr>
-                      </a:solidFill>
-                      <a:prstDash val="solid"/>
-                      <a:round/>
-                      <a:headEnd type="none" w="med" len="med"/>
-                      <a:tailEnd type="none" w="med" len="med"/>
-                    </a:lnB>
-                    <a:lnTlToBr w="12700" cmpd="sng">
-                      <a:noFill/>
-                      <a:prstDash val="solid"/>
-                    </a:lnTlToBr>
-                    <a:lnBlToTr w="12700" cmpd="sng">
-                      <a:noFill/>
-                      <a:prstDash val="solid"/>
-                    </a:lnBlToTr>
-                    <a:solidFill>
-                      <a:schemeClr val="bg1">
-                        <a:lumMod val="95000"/>
-                      </a:schemeClr>
-                    </a:solidFill>
-                  </a:tcPr>
-                </a:tc>
-                <a:tc>
-                  <a:txBody>
-                    <a:bodyPr/>
-                    <a:lstStyle/>
-                    <a:p>
-                      <a:pPr algn="l">
-                        <a:lnSpc>
-                          <a:spcPts val="1200"/>
-                        </a:lnSpc>
-                      </a:pPr>
-                      <a:r>
-                        <a:rPr lang="en-US" sz="600" b="0" i="0" dirty="0">
-                          <a:solidFill>
-                            <a:schemeClr val="tx2"/>
-                          </a:solidFill>
-                          <a:latin typeface="Fund Regular" pitchFamily="2" charset="-78"/>
-                          <a:cs typeface="Fund Regular" pitchFamily="2" charset="-78"/>
-                        </a:rPr>
-                        <a:t>NRC</a:t>
-                      </a:r>
-                    </a:p>
-                  </a:txBody>
-                  <a:tcPr marL="36000" marR="36000" marT="0" marB="0" anchor="ctr">
-                    <a:lnL w="12700" cap="flat" cmpd="sng" algn="ctr">
-                      <a:noFill/>
-                      <a:prstDash val="solid"/>
-                      <a:round/>
-                      <a:headEnd type="none" w="med" len="med"/>
-                      <a:tailEnd type="none" w="med" len="med"/>
-                    </a:lnL>
-                    <a:lnR w="12700" cap="flat" cmpd="sng" algn="ctr">
-                      <a:noFill/>
-                      <a:prstDash val="solid"/>
-                      <a:round/>
-                      <a:headEnd type="none" w="med" len="med"/>
-                      <a:tailEnd type="none" w="med" len="med"/>
-                    </a:lnR>
-                    <a:lnT w="3175" cap="flat" cmpd="sng" algn="ctr">
-                      <a:solidFill>
-                        <a:schemeClr val="bg1"/>
-                      </a:solidFill>
-                      <a:prstDash val="solid"/>
-                      <a:round/>
-                      <a:headEnd type="none" w="med" len="med"/>
-                      <a:tailEnd type="none" w="med" len="med"/>
-                    </a:lnT>
-                    <a:lnB w="6350" cap="flat" cmpd="sng" algn="ctr">
-                      <a:solidFill>
-                        <a:schemeClr val="bg1">
-                          <a:lumMod val="85000"/>
-                        </a:schemeClr>
-                      </a:solidFill>
-                      <a:prstDash val="solid"/>
-                      <a:round/>
-                      <a:headEnd type="none" w="med" len="med"/>
-                      <a:tailEnd type="none" w="med" len="med"/>
-                    </a:lnB>
-                    <a:lnTlToBr w="12700" cmpd="sng">
-                      <a:noFill/>
-                      <a:prstDash val="solid"/>
-                    </a:lnTlToBr>
-                    <a:lnBlToTr w="12700" cmpd="sng">
-                      <a:noFill/>
-                      <a:prstDash val="solid"/>
-                    </a:lnBlToTr>
-                    <a:solidFill>
-                      <a:schemeClr val="bg1">
-                        <a:lumMod val="95000"/>
-                      </a:schemeClr>
-                    </a:solidFill>
-                  </a:tcPr>
-                </a:tc>
-                <a:extLst>
-                  <a:ext uri="{0D108BD9-81ED-4DB2-BD59-A6C34878D82A}">
-                    <a16:rowId xmlns:a16="http://schemas.microsoft.com/office/drawing/2014/main" val="2147178351"/>
-                  </a:ext>
-                </a:extLst>
-              </a:tr>
-              <a:tr h="132304">
-                <a:tc>
-                  <a:txBody>
-                    <a:bodyPr/>
-                    <a:lstStyle/>
-                    <a:p>
-                      <a:pPr algn="l">
-                        <a:lnSpc>
-                          <a:spcPts val="1200"/>
-                        </a:lnSpc>
-                      </a:pPr>
-                      <a:r>
-                        <a:rPr lang="en-US" sz="600" b="0" i="0" dirty="0">
-                          <a:solidFill>
-                            <a:schemeClr val="tx1"/>
-                          </a:solidFill>
-                          <a:latin typeface="Fund Light" pitchFamily="2" charset="-78"/>
-                          <a:cs typeface="Fund Light" pitchFamily="2" charset="-78"/>
-                        </a:rPr>
-                        <a:t>Member #1</a:t>
-                      </a:r>
-                    </a:p>
-                  </a:txBody>
-                  <a:tcPr marL="36000" marR="36000" marT="0" marB="0" anchor="ctr">
-                    <a:lnL w="12700" cap="flat" cmpd="sng" algn="ctr">
-                      <a:noFill/>
-                      <a:prstDash val="solid"/>
-                      <a:round/>
-                      <a:headEnd type="none" w="med" len="med"/>
-                      <a:tailEnd type="none" w="med" len="med"/>
-                    </a:lnL>
-                    <a:lnR w="12700" cap="flat" cmpd="sng" algn="ctr">
-                      <a:noFill/>
-                      <a:prstDash val="solid"/>
-                      <a:round/>
-                      <a:headEnd type="none" w="med" len="med"/>
-                      <a:tailEnd type="none" w="med" len="med"/>
-                    </a:lnR>
-                    <a:lnT w="6350" cap="flat" cmpd="sng" algn="ctr">
-                      <a:solidFill>
-                        <a:schemeClr val="bg1">
-                          <a:lumMod val="85000"/>
-                        </a:schemeClr>
-                      </a:solidFill>
-                      <a:prstDash val="solid"/>
-                      <a:round/>
-                      <a:headEnd type="none" w="med" len="med"/>
-                      <a:tailEnd type="none" w="med" len="med"/>
-                    </a:lnT>
-                    <a:lnB w="6350" cap="flat" cmpd="sng" algn="ctr">
-                      <a:solidFill>
-                        <a:schemeClr val="bg1">
-                          <a:lumMod val="85000"/>
-                        </a:schemeClr>
-                      </a:solidFill>
-                      <a:prstDash val="solid"/>
-                      <a:round/>
-                      <a:headEnd type="none" w="med" len="med"/>
-                      <a:tailEnd type="none" w="med" len="med"/>
-                    </a:lnB>
-                    <a:lnTlToBr w="12700" cmpd="sng">
-                      <a:noFill/>
-                      <a:prstDash val="solid"/>
-                    </a:lnTlToBr>
-                    <a:lnBlToTr w="12700" cmpd="sng">
-                      <a:noFill/>
-                      <a:prstDash val="solid"/>
-                    </a:lnBlToTr>
-                    <a:noFill/>
-                  </a:tcPr>
-                </a:tc>
-                <a:tc>
-                  <a:txBody>
-                    <a:bodyPr/>
-                    <a:lstStyle/>
-                    <a:p>
-                      <a:pPr algn="l">
-                        <a:lnSpc>
-                          <a:spcPts val="1200"/>
-                        </a:lnSpc>
-                      </a:pPr>
-                      <a:r>
-                        <a:rPr lang="en-US" sz="600" b="0" i="0" dirty="0">
-                          <a:solidFill>
-                            <a:schemeClr val="tx1"/>
-                          </a:solidFill>
-                          <a:latin typeface="Fund Light" pitchFamily="2" charset="-78"/>
-                          <a:cs typeface="Fund Light" pitchFamily="2" charset="-78"/>
-                        </a:rPr>
-                        <a:t>No</a:t>
-                      </a:r>
-                    </a:p>
-                  </a:txBody>
-                  <a:tcPr marL="36000" marR="36000" marT="0" marB="0" anchor="ctr">
-                    <a:lnL w="12700" cap="flat" cmpd="sng" algn="ctr">
-                      <a:noFill/>
-                      <a:prstDash val="solid"/>
-                      <a:round/>
-                      <a:headEnd type="none" w="med" len="med"/>
-                      <a:tailEnd type="none" w="med" len="med"/>
-                    </a:lnL>
-                    <a:lnR w="12700" cap="flat" cmpd="sng" algn="ctr">
-                      <a:noFill/>
-                      <a:prstDash val="solid"/>
-                      <a:round/>
-                      <a:headEnd type="none" w="med" len="med"/>
-                      <a:tailEnd type="none" w="med" len="med"/>
-                    </a:lnR>
-                    <a:lnT w="6350" cap="flat" cmpd="sng" algn="ctr">
-                      <a:solidFill>
-                        <a:schemeClr val="bg1">
-                          <a:lumMod val="85000"/>
-                        </a:schemeClr>
-                      </a:solidFill>
-                      <a:prstDash val="solid"/>
-                      <a:round/>
-                      <a:headEnd type="none" w="med" len="med"/>
-                      <a:tailEnd type="none" w="med" len="med"/>
-                    </a:lnT>
-                    <a:lnB w="6350" cap="flat" cmpd="sng" algn="ctr">
-                      <a:solidFill>
-                        <a:schemeClr val="bg1">
-                          <a:lumMod val="85000"/>
-                        </a:schemeClr>
-                      </a:solidFill>
-                      <a:prstDash val="solid"/>
-                      <a:round/>
-                      <a:headEnd type="none" w="med" len="med"/>
-                      <a:tailEnd type="none" w="med" len="med"/>
-                    </a:lnB>
-                    <a:lnTlToBr w="12700" cmpd="sng">
-                      <a:noFill/>
-                      <a:prstDash val="solid"/>
-                    </a:lnTlToBr>
-                    <a:lnBlToTr w="12700" cmpd="sng">
-                      <a:noFill/>
-                      <a:prstDash val="solid"/>
-                    </a:lnBlToTr>
-                    <a:noFill/>
-                  </a:tcPr>
-                </a:tc>
-                <a:tc>
-                  <a:txBody>
-                    <a:bodyPr/>
-                    <a:lstStyle/>
-                    <a:p>
-                      <a:pPr algn="l">
-                        <a:lnSpc>
-                          <a:spcPts val="1200"/>
-                        </a:lnSpc>
-                      </a:pPr>
-                      <a:r>
-                        <a:rPr lang="en-US" sz="600" b="0" i="0">
-                          <a:solidFill>
-                            <a:schemeClr val="tx1"/>
-                          </a:solidFill>
-                          <a:latin typeface="Fund Light" pitchFamily="2" charset="-78"/>
-                          <a:cs typeface="Fund Light" pitchFamily="2" charset="-78"/>
-                        </a:rPr>
-                        <a:t>Yes</a:t>
-                      </a:r>
-                      <a:endParaRPr lang="en-US" sz="600" b="0" i="0" dirty="0">
-                        <a:solidFill>
-                          <a:schemeClr val="tx1"/>
-                        </a:solidFill>
-                        <a:latin typeface="Fund Light" pitchFamily="2" charset="-78"/>
-                        <a:cs typeface="Fund Light" pitchFamily="2" charset="-78"/>
-                      </a:endParaRPr>
-                    </a:p>
-                  </a:txBody>
-                  <a:tcPr marL="36000" marR="36000" marT="0" marB="0" anchor="ctr">
-                    <a:lnL w="12700" cap="flat" cmpd="sng" algn="ctr">
-                      <a:noFill/>
-                      <a:prstDash val="solid"/>
-                      <a:round/>
-                      <a:headEnd type="none" w="med" len="med"/>
-                      <a:tailEnd type="none" w="med" len="med"/>
-                    </a:lnL>
-                    <a:lnR w="12700" cap="flat" cmpd="sng" algn="ctr">
-                      <a:noFill/>
-                      <a:prstDash val="solid"/>
-                      <a:round/>
-                      <a:headEnd type="none" w="med" len="med"/>
-                      <a:tailEnd type="none" w="med" len="med"/>
-                    </a:lnR>
-                    <a:lnT w="6350" cap="flat" cmpd="sng" algn="ctr">
-                      <a:solidFill>
-                        <a:schemeClr val="bg1">
-                          <a:lumMod val="85000"/>
-                        </a:schemeClr>
-                      </a:solidFill>
-                      <a:prstDash val="solid"/>
-                      <a:round/>
-                      <a:headEnd type="none" w="med" len="med"/>
-                      <a:tailEnd type="none" w="med" len="med"/>
-                    </a:lnT>
-                    <a:lnB w="6350" cap="flat" cmpd="sng" algn="ctr">
-                      <a:solidFill>
-                        <a:schemeClr val="bg1">
-                          <a:lumMod val="85000"/>
-                        </a:schemeClr>
-                      </a:solidFill>
-                      <a:prstDash val="solid"/>
-                      <a:round/>
-                      <a:headEnd type="none" w="med" len="med"/>
-                      <a:tailEnd type="none" w="med" len="med"/>
-                    </a:lnB>
-                    <a:lnTlToBr w="12700" cmpd="sng">
-                      <a:noFill/>
-                      <a:prstDash val="solid"/>
-                    </a:lnTlToBr>
-                    <a:lnBlToTr w="12700" cmpd="sng">
-                      <a:noFill/>
-                      <a:prstDash val="solid"/>
-                    </a:lnBlToTr>
-                    <a:noFill/>
-                  </a:tcPr>
-                </a:tc>
-                <a:tc>
-                  <a:txBody>
-                    <a:bodyPr/>
-                    <a:lstStyle/>
-                    <a:p>
-                      <a:pPr marL="0" algn="l" defTabSz="914400" rtl="0" eaLnBrk="1" latinLnBrk="0" hangingPunct="1">
-                        <a:lnSpc>
-                          <a:spcPts val="1200"/>
-                        </a:lnSpc>
-                      </a:pPr>
-                      <a:r>
-                        <a:rPr lang="en-US" sz="600" b="0" i="0" kern="1200" dirty="0">
-                          <a:solidFill>
-                            <a:schemeClr val="tx1"/>
-                          </a:solidFill>
-                          <a:latin typeface="Fund Light" pitchFamily="2" charset="-78"/>
-                          <a:ea typeface="+mn-ea"/>
-                          <a:cs typeface="Fund Light" pitchFamily="2" charset="-78"/>
-                        </a:rPr>
-                        <a:t>q</a:t>
-                      </a:r>
-                    </a:p>
-                  </a:txBody>
-                  <a:tcPr marL="36000" marR="36000" marT="0" marB="0" anchor="b">
-                    <a:lnL w="12700" cmpd="sng">
-                      <a:noFill/>
-                    </a:lnL>
-                    <a:lnR w="12700" cap="flat" cmpd="sng" algn="ctr">
-                      <a:noFill/>
-                      <a:prstDash val="solid"/>
-                      <a:round/>
-                      <a:headEnd type="none" w="med" len="med"/>
-                      <a:tailEnd type="none" w="med" len="med"/>
-                    </a:lnR>
-                    <a:lnT w="6350" cap="flat" cmpd="sng" algn="ctr">
-                      <a:solidFill>
-                        <a:schemeClr val="bg1">
-                          <a:lumMod val="85000"/>
-                        </a:schemeClr>
-                      </a:solidFill>
-                      <a:prstDash val="solid"/>
-                      <a:round/>
-                      <a:headEnd type="none" w="med" len="med"/>
-                      <a:tailEnd type="none" w="med" len="med"/>
-                    </a:lnT>
-                    <a:lnB w="6350" cap="flat" cmpd="sng" algn="ctr">
-                      <a:solidFill>
-                        <a:schemeClr val="bg1">
-                          <a:lumMod val="85000"/>
-                        </a:schemeClr>
-                      </a:solidFill>
-                      <a:prstDash val="solid"/>
-                      <a:round/>
-                      <a:headEnd type="none" w="med" len="med"/>
-                      <a:tailEnd type="none" w="med" len="med"/>
-                    </a:lnB>
-                    <a:lnTlToBr w="12700" cmpd="sng">
-                      <a:noFill/>
-                      <a:prstDash val="solid"/>
-                    </a:lnTlToBr>
-                    <a:lnBlToTr w="12700" cmpd="sng">
-                      <a:noFill/>
-                      <a:prstDash val="solid"/>
-                    </a:lnBlToTr>
-                    <a:noFill/>
-                  </a:tcPr>
-                </a:tc>
-                <a:tc>
-                  <a:txBody>
-                    <a:bodyPr/>
-                    <a:lstStyle/>
-                    <a:p>
-                      <a:pPr marL="0" algn="l" defTabSz="914400" rtl="0" eaLnBrk="1" latinLnBrk="0" hangingPunct="1">
-                        <a:lnSpc>
-                          <a:spcPts val="1200"/>
-                        </a:lnSpc>
-                      </a:pPr>
-                      <a:r>
-                        <a:rPr lang="en-US" sz="600" b="0" i="0" kern="1200" dirty="0">
-                          <a:solidFill>
-                            <a:schemeClr val="tx1"/>
-                          </a:solidFill>
-                          <a:latin typeface="Fund Light" pitchFamily="2" charset="-78"/>
-                          <a:ea typeface="+mn-ea"/>
-                          <a:cs typeface="Fund Light" pitchFamily="2" charset="-78"/>
-                        </a:rPr>
-                        <a:t>q</a:t>
-                      </a:r>
-                    </a:p>
-                  </a:txBody>
-                  <a:tcPr marL="36000" marR="36000" marT="0" marB="0" anchor="ctr">
-                    <a:lnL w="12700" cap="flat" cmpd="sng" algn="ctr">
-                      <a:noFill/>
-                      <a:prstDash val="solid"/>
-                      <a:round/>
-                      <a:headEnd type="none" w="med" len="med"/>
-                      <a:tailEnd type="none" w="med" len="med"/>
-                    </a:lnL>
-                    <a:lnR w="12700" cap="flat" cmpd="sng" algn="ctr">
-                      <a:noFill/>
-                      <a:prstDash val="solid"/>
-                      <a:round/>
-                      <a:headEnd type="none" w="med" len="med"/>
-                      <a:tailEnd type="none" w="med" len="med"/>
-                    </a:lnR>
-                    <a:lnT w="6350" cap="flat" cmpd="sng" algn="ctr">
-                      <a:solidFill>
-                        <a:schemeClr val="bg1">
-                          <a:lumMod val="85000"/>
-                        </a:schemeClr>
-                      </a:solidFill>
-                      <a:prstDash val="solid"/>
-                      <a:round/>
-                      <a:headEnd type="none" w="med" len="med"/>
-                      <a:tailEnd type="none" w="med" len="med"/>
-                    </a:lnT>
-                    <a:lnB w="6350" cap="flat" cmpd="sng" algn="ctr">
-                      <a:solidFill>
-                        <a:schemeClr val="bg1">
-                          <a:lumMod val="85000"/>
-                        </a:schemeClr>
-                      </a:solidFill>
-                      <a:prstDash val="solid"/>
-                      <a:round/>
-                      <a:headEnd type="none" w="med" len="med"/>
-                      <a:tailEnd type="none" w="med" len="med"/>
-                    </a:lnB>
-                    <a:lnTlToBr w="12700" cmpd="sng">
-                      <a:noFill/>
-                      <a:prstDash val="solid"/>
-                    </a:lnTlToBr>
-                    <a:lnBlToTr w="12700" cmpd="sng">
-                      <a:noFill/>
-                      <a:prstDash val="solid"/>
-                    </a:lnBlToTr>
-                    <a:noFill/>
-                  </a:tcPr>
-                </a:tc>
-                <a:tc>
-                  <a:txBody>
-                    <a:bodyPr/>
-                    <a:lstStyle/>
-                    <a:p>
-                      <a:pPr marL="0" algn="l" defTabSz="914400" rtl="0" eaLnBrk="1" latinLnBrk="0" hangingPunct="1">
-                        <a:lnSpc>
-                          <a:spcPts val="1200"/>
-                        </a:lnSpc>
-                      </a:pPr>
-                      <a:r>
-                        <a:rPr lang="en-US" sz="600" b="0" i="0" kern="1200" dirty="0">
-                          <a:solidFill>
-                            <a:schemeClr val="tx1"/>
-                          </a:solidFill>
-                          <a:latin typeface="Fund Light" pitchFamily="2" charset="-78"/>
-                          <a:ea typeface="+mn-ea"/>
-                          <a:cs typeface="Fund Light" pitchFamily="2" charset="-78"/>
-                        </a:rPr>
-                        <a:t>q</a:t>
-                      </a:r>
-                    </a:p>
-                  </a:txBody>
-                  <a:tcPr marL="36000" marR="36000" marT="0" marB="0" anchor="ctr">
-                    <a:lnL w="12700" cap="flat" cmpd="sng" algn="ctr">
-                      <a:noFill/>
-                      <a:prstDash val="solid"/>
-                      <a:round/>
-                      <a:headEnd type="none" w="med" len="med"/>
-                      <a:tailEnd type="none" w="med" len="med"/>
-                    </a:lnL>
-                    <a:lnR w="12700" cap="flat" cmpd="sng" algn="ctr">
-                      <a:noFill/>
-                      <a:prstDash val="solid"/>
-                      <a:round/>
-                      <a:headEnd type="none" w="med" len="med"/>
-                      <a:tailEnd type="none" w="med" len="med"/>
-                    </a:lnR>
-                    <a:lnT w="6350" cap="flat" cmpd="sng" algn="ctr">
-                      <a:solidFill>
-                        <a:schemeClr val="bg1">
-                          <a:lumMod val="85000"/>
-                        </a:schemeClr>
-                      </a:solidFill>
-                      <a:prstDash val="solid"/>
-                      <a:round/>
-                      <a:headEnd type="none" w="med" len="med"/>
-                      <a:tailEnd type="none" w="med" len="med"/>
-                    </a:lnT>
-                    <a:lnB w="6350" cap="flat" cmpd="sng" algn="ctr">
-                      <a:solidFill>
-                        <a:schemeClr val="bg1">
-                          <a:lumMod val="85000"/>
-                        </a:schemeClr>
-                      </a:solidFill>
-                      <a:prstDash val="solid"/>
-                      <a:round/>
-                      <a:headEnd type="none" w="med" len="med"/>
-                      <a:tailEnd type="none" w="med" len="med"/>
-                    </a:lnB>
-                    <a:lnTlToBr w="12700" cmpd="sng">
-                      <a:noFill/>
-                      <a:prstDash val="solid"/>
-                    </a:lnTlToBr>
-                    <a:lnBlToTr w="12700" cmpd="sng">
-                      <a:noFill/>
-                      <a:prstDash val="solid"/>
-                    </a:lnBlToTr>
-                    <a:noFill/>
-                  </a:tcPr>
-                </a:tc>
-                <a:tc>
-                  <a:txBody>
-                    <a:bodyPr/>
-                    <a:lstStyle/>
-                    <a:p>
-                      <a:pPr marL="0" algn="l" defTabSz="914400" rtl="0" eaLnBrk="1" latinLnBrk="0" hangingPunct="1">
-                        <a:lnSpc>
-                          <a:spcPts val="1200"/>
-                        </a:lnSpc>
-                      </a:pPr>
-                      <a:r>
-                        <a:rPr lang="en-US" sz="600" b="0" i="0" kern="1200" dirty="0">
-                          <a:solidFill>
-                            <a:schemeClr val="tx1"/>
-                          </a:solidFill>
-                          <a:latin typeface="Fund Light" pitchFamily="2" charset="-78"/>
-                          <a:ea typeface="+mn-ea"/>
-                          <a:cs typeface="Fund Light" pitchFamily="2" charset="-78"/>
-                        </a:rPr>
-                        <a:t>q</a:t>
-                      </a:r>
-                    </a:p>
-                  </a:txBody>
-                  <a:tcPr marL="36000" marR="36000" marT="0" marB="0" anchor="ctr">
-                    <a:lnL w="12700" cap="flat" cmpd="sng" algn="ctr">
-                      <a:noFill/>
-                      <a:prstDash val="solid"/>
-                      <a:round/>
-                      <a:headEnd type="none" w="med" len="med"/>
-                      <a:tailEnd type="none" w="med" len="med"/>
-                    </a:lnL>
-                    <a:lnR w="12700" cap="flat" cmpd="sng" algn="ctr">
-                      <a:noFill/>
-                      <a:prstDash val="solid"/>
-                      <a:round/>
-                      <a:headEnd type="none" w="med" len="med"/>
-                      <a:tailEnd type="none" w="med" len="med"/>
-                    </a:lnR>
-                    <a:lnT w="6350" cap="flat" cmpd="sng" algn="ctr">
-                      <a:solidFill>
-                        <a:schemeClr val="bg1">
-                          <a:lumMod val="85000"/>
-                        </a:schemeClr>
-                      </a:solidFill>
-                      <a:prstDash val="solid"/>
-                      <a:round/>
-                      <a:headEnd type="none" w="med" len="med"/>
-                      <a:tailEnd type="none" w="med" len="med"/>
-                    </a:lnT>
-                    <a:lnB w="6350" cap="flat" cmpd="sng" algn="ctr">
-                      <a:solidFill>
-                        <a:schemeClr val="bg1">
-                          <a:lumMod val="85000"/>
-                        </a:schemeClr>
-                      </a:solidFill>
-                      <a:prstDash val="solid"/>
-                      <a:round/>
-                      <a:headEnd type="none" w="med" len="med"/>
-                      <a:tailEnd type="none" w="med" len="med"/>
-                    </a:lnB>
-                    <a:lnTlToBr w="12700" cmpd="sng">
-                      <a:noFill/>
-                      <a:prstDash val="solid"/>
-                    </a:lnTlToBr>
-                    <a:lnBlToTr w="12700" cmpd="sng">
-                      <a:noFill/>
-                      <a:prstDash val="solid"/>
-                    </a:lnBlToTr>
-                    <a:noFill/>
-                  </a:tcPr>
-                </a:tc>
-                <a:extLst>
-                  <a:ext uri="{0D108BD9-81ED-4DB2-BD59-A6C34878D82A}">
-                    <a16:rowId xmlns:a16="http://schemas.microsoft.com/office/drawing/2014/main" val="1961714469"/>
-                  </a:ext>
-                </a:extLst>
-              </a:tr>
-            </a:tbl>
-          </a:graphicData>
-        </a:graphic>
-      </p:graphicFrame>
     </p:spTree>
     <p:extLst>
       <p:ext uri="{BB962C8B-B14F-4D97-AF65-F5344CB8AC3E}">

--- a/templates/sample.pptx
+++ b/templates/sample.pptx
@@ -3783,7 +3783,7 @@
           <a:p>
             <a:fld id="{8B1AF6D7-0F32-4F05-B21A-8AF0CB26F94C}" type="datetimeFigureOut">
               <a:rPr lang="en-IN" smtClean="0"/>
-              <a:t>26-06-2026</a:t>
+              <a:t>08-07-2026</a:t>
             </a:fld>
             <a:endParaRPr lang="en-IN"/>
           </a:p>
@@ -4200,7 +4200,7 @@
           <a:p>
             <a:fld id="{0490EA95-AFA9-47FA-B067-612933D1D62E}" type="datetimeFigureOut">
               <a:rPr lang="en-IN" smtClean="0"/>
-              <a:t>26-06-2026</a:t>
+              <a:t>08-07-2026</a:t>
             </a:fld>
             <a:endParaRPr lang="en-IN"/>
           </a:p>
@@ -4400,7 +4400,7 @@
           <a:p>
             <a:fld id="{0490EA95-AFA9-47FA-B067-612933D1D62E}" type="datetimeFigureOut">
               <a:rPr lang="en-IN" smtClean="0"/>
-              <a:t>26-06-2026</a:t>
+              <a:t>08-07-2026</a:t>
             </a:fld>
             <a:endParaRPr lang="en-IN"/>
           </a:p>
@@ -4610,7 +4610,7 @@
           <a:p>
             <a:fld id="{0490EA95-AFA9-47FA-B067-612933D1D62E}" type="datetimeFigureOut">
               <a:rPr lang="en-IN" smtClean="0"/>
-              <a:t>26-06-2026</a:t>
+              <a:t>08-07-2026</a:t>
             </a:fld>
             <a:endParaRPr lang="en-IN"/>
           </a:p>
@@ -4810,7 +4810,7 @@
           <a:p>
             <a:fld id="{0490EA95-AFA9-47FA-B067-612933D1D62E}" type="datetimeFigureOut">
               <a:rPr lang="en-IN" smtClean="0"/>
-              <a:t>26-06-2026</a:t>
+              <a:t>08-07-2026</a:t>
             </a:fld>
             <a:endParaRPr lang="en-IN"/>
           </a:p>
@@ -5086,7 +5086,7 @@
           <a:p>
             <a:fld id="{0490EA95-AFA9-47FA-B067-612933D1D62E}" type="datetimeFigureOut">
               <a:rPr lang="en-IN" smtClean="0"/>
-              <a:t>26-06-2026</a:t>
+              <a:t>08-07-2026</a:t>
             </a:fld>
             <a:endParaRPr lang="en-IN"/>
           </a:p>
@@ -5354,7 +5354,7 @@
           <a:p>
             <a:fld id="{0490EA95-AFA9-47FA-B067-612933D1D62E}" type="datetimeFigureOut">
               <a:rPr lang="en-IN" smtClean="0"/>
-              <a:t>26-06-2026</a:t>
+              <a:t>08-07-2026</a:t>
             </a:fld>
             <a:endParaRPr lang="en-IN"/>
           </a:p>
@@ -5769,7 +5769,7 @@
           <a:p>
             <a:fld id="{0490EA95-AFA9-47FA-B067-612933D1D62E}" type="datetimeFigureOut">
               <a:rPr lang="en-IN" smtClean="0"/>
-              <a:t>26-06-2026</a:t>
+              <a:t>08-07-2026</a:t>
             </a:fld>
             <a:endParaRPr lang="en-IN"/>
           </a:p>
@@ -5911,7 +5911,7 @@
           <a:p>
             <a:fld id="{0490EA95-AFA9-47FA-B067-612933D1D62E}" type="datetimeFigureOut">
               <a:rPr lang="en-IN" smtClean="0"/>
-              <a:t>26-06-2026</a:t>
+              <a:t>08-07-2026</a:t>
             </a:fld>
             <a:endParaRPr lang="en-IN"/>
           </a:p>
@@ -6024,7 +6024,7 @@
           <a:p>
             <a:fld id="{0490EA95-AFA9-47FA-B067-612933D1D62E}" type="datetimeFigureOut">
               <a:rPr lang="en-IN" smtClean="0"/>
-              <a:t>26-06-2026</a:t>
+              <a:t>08-07-2026</a:t>
             </a:fld>
             <a:endParaRPr lang="en-IN"/>
           </a:p>
@@ -6337,7 +6337,7 @@
           <a:p>
             <a:fld id="{0490EA95-AFA9-47FA-B067-612933D1D62E}" type="datetimeFigureOut">
               <a:rPr lang="en-IN" smtClean="0"/>
-              <a:t>26-06-2026</a:t>
+              <a:t>08-07-2026</a:t>
             </a:fld>
             <a:endParaRPr lang="en-IN"/>
           </a:p>
@@ -6626,7 +6626,7 @@
           <a:p>
             <a:fld id="{0490EA95-AFA9-47FA-B067-612933D1D62E}" type="datetimeFigureOut">
               <a:rPr lang="en-IN" smtClean="0"/>
-              <a:t>26-06-2026</a:t>
+              <a:t>08-07-2026</a:t>
             </a:fld>
             <a:endParaRPr lang="en-IN"/>
           </a:p>
@@ -6869,7 +6869,7 @@
           <a:p>
             <a:fld id="{0490EA95-AFA9-47FA-B067-612933D1D62E}" type="datetimeFigureOut">
               <a:rPr lang="en-IN" smtClean="0"/>
-              <a:t>26-06-2026</a:t>
+              <a:t>08-07-2026</a:t>
             </a:fld>
             <a:endParaRPr lang="en-IN"/>
           </a:p>
@@ -8785,6 +8785,1623 @@
           </a:p>
         </p:txBody>
       </p:sp>
+      <p:graphicFrame>
+        <p:nvGraphicFramePr>
+          <p:cNvPr id="5" name="Board Data">
+            <a:extLst>
+              <a:ext uri="{FF2B5EF4-FFF2-40B4-BE49-F238E27FC236}">
+                <a16:creationId xmlns:a16="http://schemas.microsoft.com/office/drawing/2014/main" id="{99E28619-E8A7-F0D4-9EA1-D7749B17D343}"/>
+              </a:ext>
+            </a:extLst>
+          </p:cNvPr>
+          <p:cNvGraphicFramePr>
+            <a:graphicFrameLocks noGrp="1"/>
+          </p:cNvGraphicFramePr>
+          <p:nvPr>
+            <p:extLst>
+              <p:ext uri="{D42A27DB-BD31-4B8C-83A1-F6EECF244321}">
+                <p14:modId xmlns:p14="http://schemas.microsoft.com/office/powerpoint/2010/main" val="1162638668"/>
+              </p:ext>
+            </p:extLst>
+          </p:nvPr>
+        </p:nvGraphicFramePr>
+        <p:xfrm>
+          <a:off x="6941467" y="136525"/>
+          <a:ext cx="4334512" cy="457200"/>
+        </p:xfrm>
+        <a:graphic>
+          <a:graphicData uri="http://schemas.openxmlformats.org/drawingml/2006/table">
+            <a:tbl>
+              <a:tblPr firstRow="1">
+                <a:tableStyleId>{5C22544A-7EE6-4342-B048-85BDC9FD1C3A}</a:tableStyleId>
+              </a:tblPr>
+              <a:tblGrid>
+                <a:gridCol w="1209002">
+                  <a:extLst>
+                    <a:ext uri="{9D8B030D-6E8A-4147-A177-3AD203B41FA5}">
+                      <a16:colId xmlns:a16="http://schemas.microsoft.com/office/drawing/2014/main" val="2710512592"/>
+                    </a:ext>
+                  </a:extLst>
+                </a:gridCol>
+                <a:gridCol w="650631">
+                  <a:extLst>
+                    <a:ext uri="{9D8B030D-6E8A-4147-A177-3AD203B41FA5}">
+                      <a16:colId xmlns:a16="http://schemas.microsoft.com/office/drawing/2014/main" val="3519371818"/>
+                    </a:ext>
+                  </a:extLst>
+                </a:gridCol>
+                <a:gridCol w="703385">
+                  <a:extLst>
+                    <a:ext uri="{9D8B030D-6E8A-4147-A177-3AD203B41FA5}">
+                      <a16:colId xmlns:a16="http://schemas.microsoft.com/office/drawing/2014/main" val="4260604003"/>
+                    </a:ext>
+                  </a:extLst>
+                </a:gridCol>
+                <a:gridCol w="422030">
+                  <a:extLst>
+                    <a:ext uri="{9D8B030D-6E8A-4147-A177-3AD203B41FA5}">
+                      <a16:colId xmlns:a16="http://schemas.microsoft.com/office/drawing/2014/main" val="958991336"/>
+                    </a:ext>
+                  </a:extLst>
+                </a:gridCol>
+                <a:gridCol w="483577">
+                  <a:extLst>
+                    <a:ext uri="{9D8B030D-6E8A-4147-A177-3AD203B41FA5}">
+                      <a16:colId xmlns:a16="http://schemas.microsoft.com/office/drawing/2014/main" val="4239024402"/>
+                    </a:ext>
+                  </a:extLst>
+                </a:gridCol>
+                <a:gridCol w="501162">
+                  <a:extLst>
+                    <a:ext uri="{9D8B030D-6E8A-4147-A177-3AD203B41FA5}">
+                      <a16:colId xmlns:a16="http://schemas.microsoft.com/office/drawing/2014/main" val="505228023"/>
+                    </a:ext>
+                  </a:extLst>
+                </a:gridCol>
+                <a:gridCol w="364725">
+                  <a:extLst>
+                    <a:ext uri="{9D8B030D-6E8A-4147-A177-3AD203B41FA5}">
+                      <a16:colId xmlns:a16="http://schemas.microsoft.com/office/drawing/2014/main" val="3014002297"/>
+                    </a:ext>
+                  </a:extLst>
+                </a:gridCol>
+              </a:tblGrid>
+              <a:tr h="182880">
+                <a:tc gridSpan="2">
+                  <a:txBody>
+                    <a:bodyPr/>
+                    <a:lstStyle/>
+                    <a:p>
+                      <a:pPr algn="l">
+                        <a:lnSpc>
+                          <a:spcPts val="1300"/>
+                        </a:lnSpc>
+                      </a:pPr>
+                      <a:r>
+                        <a:rPr lang="en-US" sz="600" b="0" i="0" dirty="0">
+                          <a:solidFill>
+                            <a:schemeClr val="bg1"/>
+                          </a:solidFill>
+                          <a:latin typeface="Fund Regular" pitchFamily="2" charset="-78"/>
+                          <a:cs typeface="Fund Regular" pitchFamily="2" charset="-78"/>
+                        </a:rPr>
+                        <a:t>BOARD COMPOSITION DATA</a:t>
+                      </a:r>
+                    </a:p>
+                  </a:txBody>
+                  <a:tcPr marL="36000" marR="36000" marT="0" marB="0" anchor="ctr">
+                    <a:lnL w="3175" cap="flat" cmpd="sng" algn="ctr">
+                      <a:solidFill>
+                        <a:schemeClr val="bg1"/>
+                      </a:solidFill>
+                      <a:prstDash val="solid"/>
+                      <a:round/>
+                      <a:headEnd type="none" w="med" len="med"/>
+                      <a:tailEnd type="none" w="med" len="med"/>
+                    </a:lnL>
+                    <a:lnR w="3175" cap="flat" cmpd="sng" algn="ctr">
+                      <a:solidFill>
+                        <a:schemeClr val="bg1"/>
+                      </a:solidFill>
+                      <a:prstDash val="solid"/>
+                      <a:round/>
+                      <a:headEnd type="none" w="med" len="med"/>
+                      <a:tailEnd type="none" w="med" len="med"/>
+                    </a:lnR>
+                    <a:lnT w="3175" cap="flat" cmpd="sng" algn="ctr">
+                      <a:solidFill>
+                        <a:schemeClr val="bg1"/>
+                      </a:solidFill>
+                      <a:prstDash val="solid"/>
+                      <a:round/>
+                      <a:headEnd type="none" w="med" len="med"/>
+                      <a:tailEnd type="none" w="med" len="med"/>
+                    </a:lnT>
+                    <a:lnB w="3175" cap="flat" cmpd="sng" algn="ctr">
+                      <a:solidFill>
+                        <a:schemeClr val="bg1"/>
+                      </a:solidFill>
+                      <a:prstDash val="solid"/>
+                      <a:round/>
+                      <a:headEnd type="none" w="med" len="med"/>
+                      <a:tailEnd type="none" w="med" len="med"/>
+                    </a:lnB>
+                    <a:lnTlToBr w="12700" cmpd="sng">
+                      <a:noFill/>
+                      <a:prstDash val="solid"/>
+                    </a:lnTlToBr>
+                    <a:lnBlToTr w="12700" cmpd="sng">
+                      <a:noFill/>
+                      <a:prstDash val="solid"/>
+                    </a:lnBlToTr>
+                    <a:solidFill>
+                      <a:schemeClr val="tx2"/>
+                    </a:solidFill>
+                  </a:tcPr>
+                </a:tc>
+                <a:tc hMerge="1">
+                  <a:txBody>
+                    <a:bodyPr/>
+                    <a:lstStyle/>
+                    <a:p>
+                      <a:pPr>
+                        <a:lnSpc>
+                          <a:spcPts val="1300"/>
+                        </a:lnSpc>
+                      </a:pPr>
+                      <a:endParaRPr lang="en-US" sz="1200" dirty="0">
+                        <a:solidFill>
+                          <a:schemeClr val="bg1"/>
+                        </a:solidFill>
+                        <a:latin typeface="Sakkal Majalla" panose="02000000000000000000" pitchFamily="2" charset="-78"/>
+                        <a:cs typeface="Sakkal Majalla" panose="02000000000000000000" pitchFamily="2" charset="-78"/>
+                      </a:endParaRPr>
+                    </a:p>
+                  </a:txBody>
+                  <a:tcPr marL="36000" marR="36000" marT="0" marB="0" anchor="ctr">
+                    <a:lnL w="3175" cap="flat" cmpd="sng" algn="ctr">
+                      <a:solidFill>
+                        <a:schemeClr val="bg1"/>
+                      </a:solidFill>
+                      <a:prstDash val="solid"/>
+                      <a:round/>
+                      <a:headEnd type="none" w="med" len="med"/>
+                      <a:tailEnd type="none" w="med" len="med"/>
+                    </a:lnL>
+                    <a:lnR w="3175" cap="flat" cmpd="sng" algn="ctr">
+                      <a:solidFill>
+                        <a:schemeClr val="bg1"/>
+                      </a:solidFill>
+                      <a:prstDash val="solid"/>
+                      <a:round/>
+                      <a:headEnd type="none" w="med" len="med"/>
+                      <a:tailEnd type="none" w="med" len="med"/>
+                    </a:lnR>
+                    <a:lnT w="3175" cap="flat" cmpd="sng" algn="ctr">
+                      <a:solidFill>
+                        <a:schemeClr val="bg1"/>
+                      </a:solidFill>
+                      <a:prstDash val="solid"/>
+                      <a:round/>
+                      <a:headEnd type="none" w="med" len="med"/>
+                      <a:tailEnd type="none" w="med" len="med"/>
+                    </a:lnT>
+                    <a:lnB w="3175" cap="flat" cmpd="sng" algn="ctr">
+                      <a:solidFill>
+                        <a:schemeClr val="bg1"/>
+                      </a:solidFill>
+                      <a:prstDash val="solid"/>
+                      <a:round/>
+                      <a:headEnd type="none" w="med" len="med"/>
+                      <a:tailEnd type="none" w="med" len="med"/>
+                    </a:lnB>
+                    <a:lnTlToBr w="12700" cmpd="sng">
+                      <a:noFill/>
+                      <a:prstDash val="solid"/>
+                    </a:lnTlToBr>
+                    <a:lnBlToTr w="12700" cmpd="sng">
+                      <a:noFill/>
+                      <a:prstDash val="solid"/>
+                    </a:lnBlToTr>
+                    <a:solidFill>
+                      <a:schemeClr val="tx2"/>
+                    </a:solidFill>
+                  </a:tcPr>
+                </a:tc>
+                <a:tc gridSpan="2">
+                  <a:txBody>
+                    <a:bodyPr/>
+                    <a:lstStyle/>
+                    <a:p>
+                      <a:pPr algn="l">
+                        <a:lnSpc>
+                          <a:spcPts val="1300"/>
+                        </a:lnSpc>
+                      </a:pPr>
+                      <a:r>
+                        <a:rPr lang="en-US" sz="600" b="0" i="0" kern="1200" dirty="0">
+                          <a:solidFill>
+                            <a:schemeClr val="bg1"/>
+                          </a:solidFill>
+                          <a:latin typeface="Fund Regular" pitchFamily="2" charset="-78"/>
+                          <a:ea typeface="+mn-ea"/>
+                          <a:cs typeface="Fund Regular" pitchFamily="2" charset="-78"/>
+                        </a:rPr>
+                        <a:t>START DATE: MMMM-YYYY</a:t>
+                      </a:r>
+                      <a:endParaRPr lang="en-US" sz="600" dirty="0">
+                        <a:solidFill>
+                          <a:schemeClr val="bg1"/>
+                        </a:solidFill>
+                        <a:latin typeface="Sakkal Majalla" panose="02000000000000000000" pitchFamily="2" charset="-78"/>
+                        <a:cs typeface="Sakkal Majalla" panose="02000000000000000000" pitchFamily="2" charset="-78"/>
+                      </a:endParaRPr>
+                    </a:p>
+                  </a:txBody>
+                  <a:tcPr marL="36000" marR="36000" marT="0" marB="0" anchor="ctr">
+                    <a:lnL w="3175" cap="flat" cmpd="sng" algn="ctr">
+                      <a:solidFill>
+                        <a:schemeClr val="bg1"/>
+                      </a:solidFill>
+                      <a:prstDash val="solid"/>
+                      <a:round/>
+                      <a:headEnd type="none" w="med" len="med"/>
+                      <a:tailEnd type="none" w="med" len="med"/>
+                    </a:lnL>
+                    <a:lnR w="3175" cap="flat" cmpd="sng" algn="ctr">
+                      <a:solidFill>
+                        <a:schemeClr val="bg1"/>
+                      </a:solidFill>
+                      <a:prstDash val="solid"/>
+                      <a:round/>
+                      <a:headEnd type="none" w="med" len="med"/>
+                      <a:tailEnd type="none" w="med" len="med"/>
+                    </a:lnR>
+                    <a:lnT w="3175" cap="flat" cmpd="sng" algn="ctr">
+                      <a:solidFill>
+                        <a:schemeClr val="bg1"/>
+                      </a:solidFill>
+                      <a:prstDash val="solid"/>
+                      <a:round/>
+                      <a:headEnd type="none" w="med" len="med"/>
+                      <a:tailEnd type="none" w="med" len="med"/>
+                    </a:lnT>
+                    <a:lnB w="3175" cap="flat" cmpd="sng" algn="ctr">
+                      <a:solidFill>
+                        <a:schemeClr val="bg1"/>
+                      </a:solidFill>
+                      <a:prstDash val="solid"/>
+                      <a:round/>
+                      <a:headEnd type="none" w="med" len="med"/>
+                      <a:tailEnd type="none" w="med" len="med"/>
+                    </a:lnB>
+                    <a:lnTlToBr w="12700" cmpd="sng">
+                      <a:noFill/>
+                      <a:prstDash val="solid"/>
+                    </a:lnTlToBr>
+                    <a:lnBlToTr w="12700" cmpd="sng">
+                      <a:noFill/>
+                      <a:prstDash val="solid"/>
+                    </a:lnBlToTr>
+                    <a:solidFill>
+                      <a:schemeClr val="tx2"/>
+                    </a:solidFill>
+                  </a:tcPr>
+                </a:tc>
+                <a:tc hMerge="1">
+                  <a:txBody>
+                    <a:bodyPr/>
+                    <a:lstStyle/>
+                    <a:p>
+                      <a:pPr>
+                        <a:lnSpc>
+                          <a:spcPts val="1300"/>
+                        </a:lnSpc>
+                      </a:pPr>
+                      <a:endParaRPr lang="en-US" sz="1200" dirty="0">
+                        <a:solidFill>
+                          <a:schemeClr val="bg1"/>
+                        </a:solidFill>
+                        <a:latin typeface="Sakkal Majalla" panose="02000000000000000000" pitchFamily="2" charset="-78"/>
+                        <a:cs typeface="Sakkal Majalla" panose="02000000000000000000" pitchFamily="2" charset="-78"/>
+                      </a:endParaRPr>
+                    </a:p>
+                  </a:txBody>
+                  <a:tcPr marL="36000" marR="36000" marT="0" marB="0" anchor="ctr">
+                    <a:lnL w="3175" cap="flat" cmpd="sng" algn="ctr">
+                      <a:solidFill>
+                        <a:schemeClr val="bg1"/>
+                      </a:solidFill>
+                      <a:prstDash val="solid"/>
+                      <a:round/>
+                      <a:headEnd type="none" w="med" len="med"/>
+                      <a:tailEnd type="none" w="med" len="med"/>
+                    </a:lnL>
+                    <a:lnR w="3175" cap="flat" cmpd="sng" algn="ctr">
+                      <a:solidFill>
+                        <a:schemeClr val="bg1"/>
+                      </a:solidFill>
+                      <a:prstDash val="solid"/>
+                      <a:round/>
+                      <a:headEnd type="none" w="med" len="med"/>
+                      <a:tailEnd type="none" w="med" len="med"/>
+                    </a:lnR>
+                    <a:lnT w="3175" cap="flat" cmpd="sng" algn="ctr">
+                      <a:solidFill>
+                        <a:schemeClr val="bg1"/>
+                      </a:solidFill>
+                      <a:prstDash val="solid"/>
+                      <a:round/>
+                      <a:headEnd type="none" w="med" len="med"/>
+                      <a:tailEnd type="none" w="med" len="med"/>
+                    </a:lnT>
+                    <a:lnB w="3175" cap="flat" cmpd="sng" algn="ctr">
+                      <a:solidFill>
+                        <a:schemeClr val="bg1"/>
+                      </a:solidFill>
+                      <a:prstDash val="solid"/>
+                      <a:round/>
+                      <a:headEnd type="none" w="med" len="med"/>
+                      <a:tailEnd type="none" w="med" len="med"/>
+                    </a:lnB>
+                    <a:lnTlToBr w="12700" cmpd="sng">
+                      <a:noFill/>
+                      <a:prstDash val="solid"/>
+                    </a:lnTlToBr>
+                    <a:lnBlToTr w="12700" cmpd="sng">
+                      <a:noFill/>
+                      <a:prstDash val="solid"/>
+                    </a:lnBlToTr>
+                    <a:solidFill>
+                      <a:schemeClr val="tx2"/>
+                    </a:solidFill>
+                  </a:tcPr>
+                </a:tc>
+                <a:tc gridSpan="3">
+                  <a:txBody>
+                    <a:bodyPr/>
+                    <a:lstStyle/>
+                    <a:p>
+                      <a:pPr algn="l">
+                        <a:lnSpc>
+                          <a:spcPts val="1300"/>
+                        </a:lnSpc>
+                      </a:pPr>
+                      <a:r>
+                        <a:rPr kumimoji="0" lang="en-US" sz="600" b="0" i="0" u="none" strike="noStrike" kern="1200" cap="none" spc="0" normalizeH="0" baseline="0" noProof="0" dirty="0">
+                          <a:ln>
+                            <a:noFill/>
+                          </a:ln>
+                          <a:solidFill>
+                            <a:srgbClr val="FFFFFF"/>
+                          </a:solidFill>
+                          <a:effectLst/>
+                          <a:uLnTx/>
+                          <a:uFillTx/>
+                          <a:latin typeface="Fund Regular" pitchFamily="2" charset="-78"/>
+                          <a:ea typeface="+mn-ea"/>
+                          <a:cs typeface="Fund Regular" pitchFamily="2" charset="-78"/>
+                        </a:rPr>
+                        <a:t>END DATE: MMMM-YYYY</a:t>
+                      </a:r>
+                      <a:endParaRPr lang="en-US" sz="600" dirty="0">
+                        <a:solidFill>
+                          <a:schemeClr val="bg1"/>
+                        </a:solidFill>
+                        <a:latin typeface="Sakkal Majalla" panose="02000000000000000000" pitchFamily="2" charset="-78"/>
+                        <a:cs typeface="Sakkal Majalla" panose="02000000000000000000" pitchFamily="2" charset="-78"/>
+                      </a:endParaRPr>
+                    </a:p>
+                  </a:txBody>
+                  <a:tcPr marL="36000" marR="36000" marT="0" marB="0" anchor="ctr">
+                    <a:lnL w="3175" cap="flat" cmpd="sng" algn="ctr">
+                      <a:solidFill>
+                        <a:schemeClr val="bg1"/>
+                      </a:solidFill>
+                      <a:prstDash val="solid"/>
+                      <a:round/>
+                      <a:headEnd type="none" w="med" len="med"/>
+                      <a:tailEnd type="none" w="med" len="med"/>
+                    </a:lnL>
+                    <a:lnR w="3175" cap="flat" cmpd="sng" algn="ctr">
+                      <a:solidFill>
+                        <a:schemeClr val="bg1"/>
+                      </a:solidFill>
+                      <a:prstDash val="solid"/>
+                      <a:round/>
+                      <a:headEnd type="none" w="med" len="med"/>
+                      <a:tailEnd type="none" w="med" len="med"/>
+                    </a:lnR>
+                    <a:lnT w="3175" cap="flat" cmpd="sng" algn="ctr">
+                      <a:solidFill>
+                        <a:schemeClr val="bg1"/>
+                      </a:solidFill>
+                      <a:prstDash val="solid"/>
+                      <a:round/>
+                      <a:headEnd type="none" w="med" len="med"/>
+                      <a:tailEnd type="none" w="med" len="med"/>
+                    </a:lnT>
+                    <a:lnB w="3175" cap="flat" cmpd="sng" algn="ctr">
+                      <a:solidFill>
+                        <a:schemeClr val="bg1"/>
+                      </a:solidFill>
+                      <a:prstDash val="solid"/>
+                      <a:round/>
+                      <a:headEnd type="none" w="med" len="med"/>
+                      <a:tailEnd type="none" w="med" len="med"/>
+                    </a:lnB>
+                    <a:lnTlToBr w="12700" cmpd="sng">
+                      <a:noFill/>
+                      <a:prstDash val="solid"/>
+                    </a:lnTlToBr>
+                    <a:lnBlToTr w="12700" cmpd="sng">
+                      <a:noFill/>
+                      <a:prstDash val="solid"/>
+                    </a:lnBlToTr>
+                    <a:solidFill>
+                      <a:schemeClr val="tx2"/>
+                    </a:solidFill>
+                  </a:tcPr>
+                </a:tc>
+                <a:tc hMerge="1">
+                  <a:txBody>
+                    <a:bodyPr/>
+                    <a:lstStyle/>
+                    <a:p>
+                      <a:pPr>
+                        <a:lnSpc>
+                          <a:spcPts val="1300"/>
+                        </a:lnSpc>
+                      </a:pPr>
+                      <a:endParaRPr lang="en-US" sz="1200" dirty="0">
+                        <a:solidFill>
+                          <a:schemeClr val="bg1"/>
+                        </a:solidFill>
+                        <a:latin typeface="Sakkal Majalla" panose="02000000000000000000" pitchFamily="2" charset="-78"/>
+                        <a:cs typeface="Sakkal Majalla" panose="02000000000000000000" pitchFamily="2" charset="-78"/>
+                      </a:endParaRPr>
+                    </a:p>
+                  </a:txBody>
+                  <a:tcPr marL="36000" marR="36000" marT="0" marB="0" anchor="ctr">
+                    <a:lnL w="3175" cap="flat" cmpd="sng" algn="ctr">
+                      <a:solidFill>
+                        <a:schemeClr val="bg1"/>
+                      </a:solidFill>
+                      <a:prstDash val="solid"/>
+                      <a:round/>
+                      <a:headEnd type="none" w="med" len="med"/>
+                      <a:tailEnd type="none" w="med" len="med"/>
+                    </a:lnL>
+                    <a:lnR w="3175" cap="flat" cmpd="sng" algn="ctr">
+                      <a:solidFill>
+                        <a:schemeClr val="bg1"/>
+                      </a:solidFill>
+                      <a:prstDash val="solid"/>
+                      <a:round/>
+                      <a:headEnd type="none" w="med" len="med"/>
+                      <a:tailEnd type="none" w="med" len="med"/>
+                    </a:lnR>
+                    <a:lnT w="3175" cap="flat" cmpd="sng" algn="ctr">
+                      <a:solidFill>
+                        <a:schemeClr val="bg1"/>
+                      </a:solidFill>
+                      <a:prstDash val="solid"/>
+                      <a:round/>
+                      <a:headEnd type="none" w="med" len="med"/>
+                      <a:tailEnd type="none" w="med" len="med"/>
+                    </a:lnT>
+                    <a:lnB w="3175" cap="flat" cmpd="sng" algn="ctr">
+                      <a:solidFill>
+                        <a:schemeClr val="bg1"/>
+                      </a:solidFill>
+                      <a:prstDash val="solid"/>
+                      <a:round/>
+                      <a:headEnd type="none" w="med" len="med"/>
+                      <a:tailEnd type="none" w="med" len="med"/>
+                    </a:lnB>
+                    <a:lnTlToBr w="12700" cmpd="sng">
+                      <a:noFill/>
+                      <a:prstDash val="solid"/>
+                    </a:lnTlToBr>
+                    <a:lnBlToTr w="12700" cmpd="sng">
+                      <a:noFill/>
+                      <a:prstDash val="solid"/>
+                    </a:lnBlToTr>
+                    <a:solidFill>
+                      <a:schemeClr val="tx2"/>
+                    </a:solidFill>
+                  </a:tcPr>
+                </a:tc>
+                <a:tc hMerge="1">
+                  <a:txBody>
+                    <a:bodyPr/>
+                    <a:lstStyle/>
+                    <a:p>
+                      <a:pPr>
+                        <a:lnSpc>
+                          <a:spcPts val="1300"/>
+                        </a:lnSpc>
+                      </a:pPr>
+                      <a:endParaRPr lang="en-US" sz="1200" dirty="0">
+                        <a:solidFill>
+                          <a:schemeClr val="bg1"/>
+                        </a:solidFill>
+                        <a:latin typeface="Sakkal Majalla" panose="02000000000000000000" pitchFamily="2" charset="-78"/>
+                        <a:cs typeface="Sakkal Majalla" panose="02000000000000000000" pitchFamily="2" charset="-78"/>
+                      </a:endParaRPr>
+                    </a:p>
+                  </a:txBody>
+                  <a:tcPr marL="36000" marR="36000" marT="0" marB="0" anchor="ctr">
+                    <a:lnL w="3175" cap="flat" cmpd="sng" algn="ctr">
+                      <a:solidFill>
+                        <a:schemeClr val="bg1"/>
+                      </a:solidFill>
+                      <a:prstDash val="solid"/>
+                      <a:round/>
+                      <a:headEnd type="none" w="med" len="med"/>
+                      <a:tailEnd type="none" w="med" len="med"/>
+                    </a:lnL>
+                    <a:lnR w="3175" cap="flat" cmpd="sng" algn="ctr">
+                      <a:solidFill>
+                        <a:schemeClr val="bg1"/>
+                      </a:solidFill>
+                      <a:prstDash val="solid"/>
+                      <a:round/>
+                      <a:headEnd type="none" w="med" len="med"/>
+                      <a:tailEnd type="none" w="med" len="med"/>
+                    </a:lnR>
+                    <a:lnT w="3175" cap="flat" cmpd="sng" algn="ctr">
+                      <a:solidFill>
+                        <a:schemeClr val="bg1"/>
+                      </a:solidFill>
+                      <a:prstDash val="solid"/>
+                      <a:round/>
+                      <a:headEnd type="none" w="med" len="med"/>
+                      <a:tailEnd type="none" w="med" len="med"/>
+                    </a:lnT>
+                    <a:lnB w="3175" cap="flat" cmpd="sng" algn="ctr">
+                      <a:solidFill>
+                        <a:schemeClr val="bg1"/>
+                      </a:solidFill>
+                      <a:prstDash val="solid"/>
+                      <a:round/>
+                      <a:headEnd type="none" w="med" len="med"/>
+                      <a:tailEnd type="none" w="med" len="med"/>
+                    </a:lnB>
+                    <a:lnTlToBr w="12700" cmpd="sng">
+                      <a:noFill/>
+                      <a:prstDash val="solid"/>
+                    </a:lnTlToBr>
+                    <a:lnBlToTr w="12700" cmpd="sng">
+                      <a:noFill/>
+                      <a:prstDash val="solid"/>
+                    </a:lnBlToTr>
+                    <a:solidFill>
+                      <a:schemeClr val="tx2"/>
+                    </a:solidFill>
+                  </a:tcPr>
+                </a:tc>
+                <a:extLst>
+                  <a:ext uri="{0D108BD9-81ED-4DB2-BD59-A6C34878D82A}">
+                    <a16:rowId xmlns:a16="http://schemas.microsoft.com/office/drawing/2014/main" val="3944166192"/>
+                  </a:ext>
+                </a:extLst>
+              </a:tr>
+              <a:tr h="142016">
+                <a:tc>
+                  <a:txBody>
+                    <a:bodyPr/>
+                    <a:lstStyle/>
+                    <a:p>
+                      <a:pPr algn="l">
+                        <a:lnSpc>
+                          <a:spcPts val="1200"/>
+                        </a:lnSpc>
+                      </a:pPr>
+                      <a:r>
+                        <a:rPr lang="en-US" sz="600" b="0" i="0" dirty="0">
+                          <a:solidFill>
+                            <a:schemeClr val="tx2"/>
+                          </a:solidFill>
+                          <a:latin typeface="Fund Regular" pitchFamily="2" charset="-78"/>
+                          <a:cs typeface="Fund Regular" pitchFamily="2" charset="-78"/>
+                        </a:rPr>
+                        <a:t>NAME</a:t>
+                      </a:r>
+                    </a:p>
+                  </a:txBody>
+                  <a:tcPr marL="36000" marR="36000" marT="0" marB="0" anchor="ctr">
+                    <a:lnL w="12700" cap="flat" cmpd="sng" algn="ctr">
+                      <a:noFill/>
+                      <a:prstDash val="solid"/>
+                      <a:round/>
+                      <a:headEnd type="none" w="med" len="med"/>
+                      <a:tailEnd type="none" w="med" len="med"/>
+                    </a:lnL>
+                    <a:lnR w="12700" cap="flat" cmpd="sng" algn="ctr">
+                      <a:noFill/>
+                      <a:prstDash val="solid"/>
+                      <a:round/>
+                      <a:headEnd type="none" w="med" len="med"/>
+                      <a:tailEnd type="none" w="med" len="med"/>
+                    </a:lnR>
+                    <a:lnT w="3175" cap="flat" cmpd="sng" algn="ctr">
+                      <a:solidFill>
+                        <a:schemeClr val="bg1"/>
+                      </a:solidFill>
+                      <a:prstDash val="solid"/>
+                      <a:round/>
+                      <a:headEnd type="none" w="med" len="med"/>
+                      <a:tailEnd type="none" w="med" len="med"/>
+                    </a:lnT>
+                    <a:lnB w="6350" cap="flat" cmpd="sng" algn="ctr">
+                      <a:solidFill>
+                        <a:schemeClr val="bg1">
+                          <a:lumMod val="85000"/>
+                        </a:schemeClr>
+                      </a:solidFill>
+                      <a:prstDash val="solid"/>
+                      <a:round/>
+                      <a:headEnd type="none" w="med" len="med"/>
+                      <a:tailEnd type="none" w="med" len="med"/>
+                    </a:lnB>
+                    <a:lnTlToBr w="12700" cmpd="sng">
+                      <a:noFill/>
+                      <a:prstDash val="solid"/>
+                    </a:lnTlToBr>
+                    <a:lnBlToTr w="12700" cmpd="sng">
+                      <a:noFill/>
+                      <a:prstDash val="solid"/>
+                    </a:lnBlToTr>
+                    <a:solidFill>
+                      <a:schemeClr val="bg1">
+                        <a:lumMod val="95000"/>
+                      </a:schemeClr>
+                    </a:solidFill>
+                  </a:tcPr>
+                </a:tc>
+                <a:tc>
+                  <a:txBody>
+                    <a:bodyPr/>
+                    <a:lstStyle/>
+                    <a:p>
+                      <a:pPr algn="l">
+                        <a:lnSpc>
+                          <a:spcPts val="1200"/>
+                        </a:lnSpc>
+                      </a:pPr>
+                      <a:r>
+                        <a:rPr lang="en-US" sz="600" b="0" i="0" dirty="0">
+                          <a:solidFill>
+                            <a:schemeClr val="tx2"/>
+                          </a:solidFill>
+                          <a:latin typeface="Fund Regular" pitchFamily="2" charset="-78"/>
+                          <a:cs typeface="Fund Regular" pitchFamily="2" charset="-78"/>
+                        </a:rPr>
+                        <a:t>PIF EMPLOYEE</a:t>
+                      </a:r>
+                    </a:p>
+                  </a:txBody>
+                  <a:tcPr marL="36000" marR="36000" marT="0" marB="0" anchor="ctr">
+                    <a:lnL w="12700" cap="flat" cmpd="sng" algn="ctr">
+                      <a:noFill/>
+                      <a:prstDash val="solid"/>
+                      <a:round/>
+                      <a:headEnd type="none" w="med" len="med"/>
+                      <a:tailEnd type="none" w="med" len="med"/>
+                    </a:lnL>
+                    <a:lnR w="12700" cap="flat" cmpd="sng" algn="ctr">
+                      <a:noFill/>
+                      <a:prstDash val="solid"/>
+                      <a:round/>
+                      <a:headEnd type="none" w="med" len="med"/>
+                      <a:tailEnd type="none" w="med" len="med"/>
+                    </a:lnR>
+                    <a:lnT w="3175" cap="flat" cmpd="sng" algn="ctr">
+                      <a:solidFill>
+                        <a:schemeClr val="bg1"/>
+                      </a:solidFill>
+                      <a:prstDash val="solid"/>
+                      <a:round/>
+                      <a:headEnd type="none" w="med" len="med"/>
+                      <a:tailEnd type="none" w="med" len="med"/>
+                    </a:lnT>
+                    <a:lnB w="6350" cap="flat" cmpd="sng" algn="ctr">
+                      <a:solidFill>
+                        <a:schemeClr val="bg1">
+                          <a:lumMod val="85000"/>
+                        </a:schemeClr>
+                      </a:solidFill>
+                      <a:prstDash val="solid"/>
+                      <a:round/>
+                      <a:headEnd type="none" w="med" len="med"/>
+                      <a:tailEnd type="none" w="med" len="med"/>
+                    </a:lnB>
+                    <a:lnTlToBr w="12700" cmpd="sng">
+                      <a:noFill/>
+                      <a:prstDash val="solid"/>
+                    </a:lnTlToBr>
+                    <a:lnBlToTr w="12700" cmpd="sng">
+                      <a:noFill/>
+                      <a:prstDash val="solid"/>
+                    </a:lnBlToTr>
+                    <a:solidFill>
+                      <a:schemeClr val="bg1">
+                        <a:lumMod val="95000"/>
+                      </a:schemeClr>
+                    </a:solidFill>
+                  </a:tcPr>
+                </a:tc>
+                <a:tc>
+                  <a:txBody>
+                    <a:bodyPr/>
+                    <a:lstStyle/>
+                    <a:p>
+                      <a:pPr algn="l">
+                        <a:lnSpc>
+                          <a:spcPts val="1200"/>
+                        </a:lnSpc>
+                      </a:pPr>
+                      <a:r>
+                        <a:rPr lang="en-US" sz="600" b="0" i="0" dirty="0">
+                          <a:solidFill>
+                            <a:schemeClr val="tx2"/>
+                          </a:solidFill>
+                          <a:latin typeface="Fund Regular" pitchFamily="2" charset="-78"/>
+                          <a:cs typeface="Fund Regular" pitchFamily="2" charset="-78"/>
+                        </a:rPr>
+                        <a:t>OTHER PIF REP.</a:t>
+                      </a:r>
+                    </a:p>
+                  </a:txBody>
+                  <a:tcPr marL="36000" marR="36000" marT="0" marB="0" anchor="ctr">
+                    <a:lnL w="12700" cap="flat" cmpd="sng" algn="ctr">
+                      <a:noFill/>
+                      <a:prstDash val="solid"/>
+                      <a:round/>
+                      <a:headEnd type="none" w="med" len="med"/>
+                      <a:tailEnd type="none" w="med" len="med"/>
+                    </a:lnL>
+                    <a:lnR w="12700" cap="flat" cmpd="sng" algn="ctr">
+                      <a:noFill/>
+                      <a:prstDash val="solid"/>
+                      <a:round/>
+                      <a:headEnd type="none" w="med" len="med"/>
+                      <a:tailEnd type="none" w="med" len="med"/>
+                    </a:lnR>
+                    <a:lnT w="3175" cap="flat" cmpd="sng" algn="ctr">
+                      <a:solidFill>
+                        <a:schemeClr val="bg1"/>
+                      </a:solidFill>
+                      <a:prstDash val="solid"/>
+                      <a:round/>
+                      <a:headEnd type="none" w="med" len="med"/>
+                      <a:tailEnd type="none" w="med" len="med"/>
+                    </a:lnT>
+                    <a:lnB w="6350" cap="flat" cmpd="sng" algn="ctr">
+                      <a:solidFill>
+                        <a:schemeClr val="bg1">
+                          <a:lumMod val="85000"/>
+                        </a:schemeClr>
+                      </a:solidFill>
+                      <a:prstDash val="solid"/>
+                      <a:round/>
+                      <a:headEnd type="none" w="med" len="med"/>
+                      <a:tailEnd type="none" w="med" len="med"/>
+                    </a:lnB>
+                    <a:lnTlToBr w="12700" cmpd="sng">
+                      <a:noFill/>
+                      <a:prstDash val="solid"/>
+                    </a:lnTlToBr>
+                    <a:lnBlToTr w="12700" cmpd="sng">
+                      <a:noFill/>
+                      <a:prstDash val="solid"/>
+                    </a:lnBlToTr>
+                    <a:solidFill>
+                      <a:schemeClr val="bg1">
+                        <a:lumMod val="95000"/>
+                      </a:schemeClr>
+                    </a:solidFill>
+                  </a:tcPr>
+                </a:tc>
+                <a:tc>
+                  <a:txBody>
+                    <a:bodyPr/>
+                    <a:lstStyle/>
+                    <a:p>
+                      <a:pPr algn="l">
+                        <a:lnSpc>
+                          <a:spcPts val="1200"/>
+                        </a:lnSpc>
+                      </a:pPr>
+                      <a:r>
+                        <a:rPr lang="en-US" sz="600" b="0" i="0" dirty="0">
+                          <a:solidFill>
+                            <a:schemeClr val="tx2"/>
+                          </a:solidFill>
+                          <a:latin typeface="Fund Regular" pitchFamily="2" charset="-78"/>
+                          <a:cs typeface="Fund Regular" pitchFamily="2" charset="-78"/>
+                        </a:rPr>
+                        <a:t>BOARD</a:t>
+                      </a:r>
+                    </a:p>
+                  </a:txBody>
+                  <a:tcPr marL="36000" marR="36000" marT="0" marB="0" anchor="ctr">
+                    <a:lnL w="12700" cmpd="sng">
+                      <a:noFill/>
+                    </a:lnL>
+                    <a:lnR w="12700" cap="flat" cmpd="sng" algn="ctr">
+                      <a:noFill/>
+                      <a:prstDash val="solid"/>
+                      <a:round/>
+                      <a:headEnd type="none" w="med" len="med"/>
+                      <a:tailEnd type="none" w="med" len="med"/>
+                    </a:lnR>
+                    <a:lnT w="3175" cap="flat" cmpd="sng" algn="ctr">
+                      <a:solidFill>
+                        <a:schemeClr val="bg1"/>
+                      </a:solidFill>
+                      <a:prstDash val="solid"/>
+                      <a:round/>
+                      <a:headEnd type="none" w="med" len="med"/>
+                      <a:tailEnd type="none" w="med" len="med"/>
+                    </a:lnT>
+                    <a:lnB w="6350" cap="flat" cmpd="sng" algn="ctr">
+                      <a:solidFill>
+                        <a:schemeClr val="bg1">
+                          <a:lumMod val="85000"/>
+                        </a:schemeClr>
+                      </a:solidFill>
+                      <a:prstDash val="solid"/>
+                      <a:round/>
+                      <a:headEnd type="none" w="med" len="med"/>
+                      <a:tailEnd type="none" w="med" len="med"/>
+                    </a:lnB>
+                    <a:lnTlToBr w="12700" cmpd="sng">
+                      <a:noFill/>
+                      <a:prstDash val="solid"/>
+                    </a:lnTlToBr>
+                    <a:lnBlToTr w="12700" cmpd="sng">
+                      <a:noFill/>
+                      <a:prstDash val="solid"/>
+                    </a:lnBlToTr>
+                    <a:solidFill>
+                      <a:schemeClr val="bg1">
+                        <a:lumMod val="95000"/>
+                      </a:schemeClr>
+                    </a:solidFill>
+                  </a:tcPr>
+                </a:tc>
+                <a:tc>
+                  <a:txBody>
+                    <a:bodyPr/>
+                    <a:lstStyle/>
+                    <a:p>
+                      <a:pPr algn="l">
+                        <a:lnSpc>
+                          <a:spcPts val="1200"/>
+                        </a:lnSpc>
+                      </a:pPr>
+                      <a:r>
+                        <a:rPr lang="en-US" sz="600" b="0" i="0" dirty="0">
+                          <a:solidFill>
+                            <a:schemeClr val="tx2"/>
+                          </a:solidFill>
+                          <a:latin typeface="Fund Regular" pitchFamily="2" charset="-78"/>
+                          <a:cs typeface="Fund Regular" pitchFamily="2" charset="-78"/>
+                        </a:rPr>
+                        <a:t>EXCOM</a:t>
+                      </a:r>
+                    </a:p>
+                  </a:txBody>
+                  <a:tcPr marL="36000" marR="36000" marT="0" marB="0" anchor="ctr">
+                    <a:lnL w="12700" cap="flat" cmpd="sng" algn="ctr">
+                      <a:noFill/>
+                      <a:prstDash val="solid"/>
+                      <a:round/>
+                      <a:headEnd type="none" w="med" len="med"/>
+                      <a:tailEnd type="none" w="med" len="med"/>
+                    </a:lnL>
+                    <a:lnR w="12700" cap="flat" cmpd="sng" algn="ctr">
+                      <a:noFill/>
+                      <a:prstDash val="solid"/>
+                      <a:round/>
+                      <a:headEnd type="none" w="med" len="med"/>
+                      <a:tailEnd type="none" w="med" len="med"/>
+                    </a:lnR>
+                    <a:lnT w="3175" cap="flat" cmpd="sng" algn="ctr">
+                      <a:solidFill>
+                        <a:schemeClr val="bg1"/>
+                      </a:solidFill>
+                      <a:prstDash val="solid"/>
+                      <a:round/>
+                      <a:headEnd type="none" w="med" len="med"/>
+                      <a:tailEnd type="none" w="med" len="med"/>
+                    </a:lnT>
+                    <a:lnB w="6350" cap="flat" cmpd="sng" algn="ctr">
+                      <a:solidFill>
+                        <a:schemeClr val="bg1">
+                          <a:lumMod val="85000"/>
+                        </a:schemeClr>
+                      </a:solidFill>
+                      <a:prstDash val="solid"/>
+                      <a:round/>
+                      <a:headEnd type="none" w="med" len="med"/>
+                      <a:tailEnd type="none" w="med" len="med"/>
+                    </a:lnB>
+                    <a:lnTlToBr w="12700" cmpd="sng">
+                      <a:noFill/>
+                      <a:prstDash val="solid"/>
+                    </a:lnTlToBr>
+                    <a:lnBlToTr w="12700" cmpd="sng">
+                      <a:noFill/>
+                      <a:prstDash val="solid"/>
+                    </a:lnBlToTr>
+                    <a:solidFill>
+                      <a:schemeClr val="bg1">
+                        <a:lumMod val="95000"/>
+                      </a:schemeClr>
+                    </a:solidFill>
+                  </a:tcPr>
+                </a:tc>
+                <a:tc>
+                  <a:txBody>
+                    <a:bodyPr/>
+                    <a:lstStyle/>
+                    <a:p>
+                      <a:pPr algn="l">
+                        <a:lnSpc>
+                          <a:spcPts val="1200"/>
+                        </a:lnSpc>
+                      </a:pPr>
+                      <a:r>
+                        <a:rPr lang="en-US" sz="600" b="0" i="0" dirty="0">
+                          <a:solidFill>
+                            <a:schemeClr val="tx2"/>
+                          </a:solidFill>
+                          <a:latin typeface="Fund Regular" pitchFamily="2" charset="-78"/>
+                          <a:cs typeface="Fund Regular" pitchFamily="2" charset="-78"/>
+                        </a:rPr>
+                        <a:t>AUDIT</a:t>
+                      </a:r>
+                    </a:p>
+                  </a:txBody>
+                  <a:tcPr marL="36000" marR="36000" marT="0" marB="0" anchor="ctr">
+                    <a:lnL w="12700" cap="flat" cmpd="sng" algn="ctr">
+                      <a:noFill/>
+                      <a:prstDash val="solid"/>
+                      <a:round/>
+                      <a:headEnd type="none" w="med" len="med"/>
+                      <a:tailEnd type="none" w="med" len="med"/>
+                    </a:lnL>
+                    <a:lnR w="12700" cap="flat" cmpd="sng" algn="ctr">
+                      <a:noFill/>
+                      <a:prstDash val="solid"/>
+                      <a:round/>
+                      <a:headEnd type="none" w="med" len="med"/>
+                      <a:tailEnd type="none" w="med" len="med"/>
+                    </a:lnR>
+                    <a:lnT w="3175" cap="flat" cmpd="sng" algn="ctr">
+                      <a:solidFill>
+                        <a:schemeClr val="bg1"/>
+                      </a:solidFill>
+                      <a:prstDash val="solid"/>
+                      <a:round/>
+                      <a:headEnd type="none" w="med" len="med"/>
+                      <a:tailEnd type="none" w="med" len="med"/>
+                    </a:lnT>
+                    <a:lnB w="6350" cap="flat" cmpd="sng" algn="ctr">
+                      <a:solidFill>
+                        <a:schemeClr val="bg1">
+                          <a:lumMod val="85000"/>
+                        </a:schemeClr>
+                      </a:solidFill>
+                      <a:prstDash val="solid"/>
+                      <a:round/>
+                      <a:headEnd type="none" w="med" len="med"/>
+                      <a:tailEnd type="none" w="med" len="med"/>
+                    </a:lnB>
+                    <a:lnTlToBr w="12700" cmpd="sng">
+                      <a:noFill/>
+                      <a:prstDash val="solid"/>
+                    </a:lnTlToBr>
+                    <a:lnBlToTr w="12700" cmpd="sng">
+                      <a:noFill/>
+                      <a:prstDash val="solid"/>
+                    </a:lnBlToTr>
+                    <a:solidFill>
+                      <a:schemeClr val="bg1">
+                        <a:lumMod val="95000"/>
+                      </a:schemeClr>
+                    </a:solidFill>
+                  </a:tcPr>
+                </a:tc>
+                <a:tc>
+                  <a:txBody>
+                    <a:bodyPr/>
+                    <a:lstStyle/>
+                    <a:p>
+                      <a:pPr algn="l">
+                        <a:lnSpc>
+                          <a:spcPts val="1200"/>
+                        </a:lnSpc>
+                      </a:pPr>
+                      <a:r>
+                        <a:rPr lang="en-US" sz="600" b="0" i="0" dirty="0">
+                          <a:solidFill>
+                            <a:schemeClr val="tx2"/>
+                          </a:solidFill>
+                          <a:latin typeface="Fund Regular" pitchFamily="2" charset="-78"/>
+                          <a:cs typeface="Fund Regular" pitchFamily="2" charset="-78"/>
+                        </a:rPr>
+                        <a:t>NRC</a:t>
+                      </a:r>
+                    </a:p>
+                  </a:txBody>
+                  <a:tcPr marL="36000" marR="36000" marT="0" marB="0" anchor="ctr">
+                    <a:lnL w="12700" cap="flat" cmpd="sng" algn="ctr">
+                      <a:noFill/>
+                      <a:prstDash val="solid"/>
+                      <a:round/>
+                      <a:headEnd type="none" w="med" len="med"/>
+                      <a:tailEnd type="none" w="med" len="med"/>
+                    </a:lnL>
+                    <a:lnR w="12700" cap="flat" cmpd="sng" algn="ctr">
+                      <a:noFill/>
+                      <a:prstDash val="solid"/>
+                      <a:round/>
+                      <a:headEnd type="none" w="med" len="med"/>
+                      <a:tailEnd type="none" w="med" len="med"/>
+                    </a:lnR>
+                    <a:lnT w="3175" cap="flat" cmpd="sng" algn="ctr">
+                      <a:solidFill>
+                        <a:schemeClr val="bg1"/>
+                      </a:solidFill>
+                      <a:prstDash val="solid"/>
+                      <a:round/>
+                      <a:headEnd type="none" w="med" len="med"/>
+                      <a:tailEnd type="none" w="med" len="med"/>
+                    </a:lnT>
+                    <a:lnB w="6350" cap="flat" cmpd="sng" algn="ctr">
+                      <a:solidFill>
+                        <a:schemeClr val="bg1">
+                          <a:lumMod val="85000"/>
+                        </a:schemeClr>
+                      </a:solidFill>
+                      <a:prstDash val="solid"/>
+                      <a:round/>
+                      <a:headEnd type="none" w="med" len="med"/>
+                      <a:tailEnd type="none" w="med" len="med"/>
+                    </a:lnB>
+                    <a:lnTlToBr w="12700" cmpd="sng">
+                      <a:noFill/>
+                      <a:prstDash val="solid"/>
+                    </a:lnTlToBr>
+                    <a:lnBlToTr w="12700" cmpd="sng">
+                      <a:noFill/>
+                      <a:prstDash val="solid"/>
+                    </a:lnBlToTr>
+                    <a:solidFill>
+                      <a:schemeClr val="bg1">
+                        <a:lumMod val="95000"/>
+                      </a:schemeClr>
+                    </a:solidFill>
+                  </a:tcPr>
+                </a:tc>
+                <a:extLst>
+                  <a:ext uri="{0D108BD9-81ED-4DB2-BD59-A6C34878D82A}">
+                    <a16:rowId xmlns:a16="http://schemas.microsoft.com/office/drawing/2014/main" val="2147178351"/>
+                  </a:ext>
+                </a:extLst>
+              </a:tr>
+              <a:tr h="132304">
+                <a:tc>
+                  <a:txBody>
+                    <a:bodyPr/>
+                    <a:lstStyle/>
+                    <a:p>
+                      <a:pPr algn="l">
+                        <a:lnSpc>
+                          <a:spcPts val="1200"/>
+                        </a:lnSpc>
+                      </a:pPr>
+                      <a:r>
+                        <a:rPr lang="en-US" sz="600" b="0" i="0" dirty="0">
+                          <a:solidFill>
+                            <a:schemeClr val="tx1"/>
+                          </a:solidFill>
+                          <a:latin typeface="Fund Light" pitchFamily="2" charset="-78"/>
+                          <a:cs typeface="Fund Light" pitchFamily="2" charset="-78"/>
+                        </a:rPr>
+                        <a:t>Member #1</a:t>
+                      </a:r>
+                    </a:p>
+                  </a:txBody>
+                  <a:tcPr marL="36000" marR="36000" marT="0" marB="0" anchor="ctr">
+                    <a:lnL w="12700" cap="flat" cmpd="sng" algn="ctr">
+                      <a:noFill/>
+                      <a:prstDash val="solid"/>
+                      <a:round/>
+                      <a:headEnd type="none" w="med" len="med"/>
+                      <a:tailEnd type="none" w="med" len="med"/>
+                    </a:lnL>
+                    <a:lnR w="12700" cap="flat" cmpd="sng" algn="ctr">
+                      <a:noFill/>
+                      <a:prstDash val="solid"/>
+                      <a:round/>
+                      <a:headEnd type="none" w="med" len="med"/>
+                      <a:tailEnd type="none" w="med" len="med"/>
+                    </a:lnR>
+                    <a:lnT w="6350" cap="flat" cmpd="sng" algn="ctr">
+                      <a:solidFill>
+                        <a:schemeClr val="bg1">
+                          <a:lumMod val="85000"/>
+                        </a:schemeClr>
+                      </a:solidFill>
+                      <a:prstDash val="solid"/>
+                      <a:round/>
+                      <a:headEnd type="none" w="med" len="med"/>
+                      <a:tailEnd type="none" w="med" len="med"/>
+                    </a:lnT>
+                    <a:lnB w="6350" cap="flat" cmpd="sng" algn="ctr">
+                      <a:solidFill>
+                        <a:schemeClr val="bg1">
+                          <a:lumMod val="85000"/>
+                        </a:schemeClr>
+                      </a:solidFill>
+                      <a:prstDash val="solid"/>
+                      <a:round/>
+                      <a:headEnd type="none" w="med" len="med"/>
+                      <a:tailEnd type="none" w="med" len="med"/>
+                    </a:lnB>
+                    <a:lnTlToBr w="12700" cmpd="sng">
+                      <a:noFill/>
+                      <a:prstDash val="solid"/>
+                    </a:lnTlToBr>
+                    <a:lnBlToTr w="12700" cmpd="sng">
+                      <a:noFill/>
+                      <a:prstDash val="solid"/>
+                    </a:lnBlToTr>
+                    <a:noFill/>
+                  </a:tcPr>
+                </a:tc>
+                <a:tc>
+                  <a:txBody>
+                    <a:bodyPr/>
+                    <a:lstStyle/>
+                    <a:p>
+                      <a:pPr algn="l">
+                        <a:lnSpc>
+                          <a:spcPts val="1200"/>
+                        </a:lnSpc>
+                      </a:pPr>
+                      <a:r>
+                        <a:rPr lang="en-US" sz="600" b="0" i="0" dirty="0">
+                          <a:solidFill>
+                            <a:schemeClr val="tx1"/>
+                          </a:solidFill>
+                          <a:latin typeface="Fund Light" pitchFamily="2" charset="-78"/>
+                          <a:cs typeface="Fund Light" pitchFamily="2" charset="-78"/>
+                        </a:rPr>
+                        <a:t>No</a:t>
+                      </a:r>
+                    </a:p>
+                  </a:txBody>
+                  <a:tcPr marL="36000" marR="36000" marT="0" marB="0" anchor="ctr">
+                    <a:lnL w="12700" cap="flat" cmpd="sng" algn="ctr">
+                      <a:noFill/>
+                      <a:prstDash val="solid"/>
+                      <a:round/>
+                      <a:headEnd type="none" w="med" len="med"/>
+                      <a:tailEnd type="none" w="med" len="med"/>
+                    </a:lnL>
+                    <a:lnR w="12700" cap="flat" cmpd="sng" algn="ctr">
+                      <a:noFill/>
+                      <a:prstDash val="solid"/>
+                      <a:round/>
+                      <a:headEnd type="none" w="med" len="med"/>
+                      <a:tailEnd type="none" w="med" len="med"/>
+                    </a:lnR>
+                    <a:lnT w="6350" cap="flat" cmpd="sng" algn="ctr">
+                      <a:solidFill>
+                        <a:schemeClr val="bg1">
+                          <a:lumMod val="85000"/>
+                        </a:schemeClr>
+                      </a:solidFill>
+                      <a:prstDash val="solid"/>
+                      <a:round/>
+                      <a:headEnd type="none" w="med" len="med"/>
+                      <a:tailEnd type="none" w="med" len="med"/>
+                    </a:lnT>
+                    <a:lnB w="6350" cap="flat" cmpd="sng" algn="ctr">
+                      <a:solidFill>
+                        <a:schemeClr val="bg1">
+                          <a:lumMod val="85000"/>
+                        </a:schemeClr>
+                      </a:solidFill>
+                      <a:prstDash val="solid"/>
+                      <a:round/>
+                      <a:headEnd type="none" w="med" len="med"/>
+                      <a:tailEnd type="none" w="med" len="med"/>
+                    </a:lnB>
+                    <a:lnTlToBr w="12700" cmpd="sng">
+                      <a:noFill/>
+                      <a:prstDash val="solid"/>
+                    </a:lnTlToBr>
+                    <a:lnBlToTr w="12700" cmpd="sng">
+                      <a:noFill/>
+                      <a:prstDash val="solid"/>
+                    </a:lnBlToTr>
+                    <a:noFill/>
+                  </a:tcPr>
+                </a:tc>
+                <a:tc>
+                  <a:txBody>
+                    <a:bodyPr/>
+                    <a:lstStyle/>
+                    <a:p>
+                      <a:pPr algn="l">
+                        <a:lnSpc>
+                          <a:spcPts val="1200"/>
+                        </a:lnSpc>
+                      </a:pPr>
+                      <a:r>
+                        <a:rPr lang="en-US" sz="600" b="0" i="0">
+                          <a:solidFill>
+                            <a:schemeClr val="tx1"/>
+                          </a:solidFill>
+                          <a:latin typeface="Fund Light" pitchFamily="2" charset="-78"/>
+                          <a:cs typeface="Fund Light" pitchFamily="2" charset="-78"/>
+                        </a:rPr>
+                        <a:t>Yes</a:t>
+                      </a:r>
+                      <a:endParaRPr lang="en-US" sz="600" b="0" i="0" dirty="0">
+                        <a:solidFill>
+                          <a:schemeClr val="tx1"/>
+                        </a:solidFill>
+                        <a:latin typeface="Fund Light" pitchFamily="2" charset="-78"/>
+                        <a:cs typeface="Fund Light" pitchFamily="2" charset="-78"/>
+                      </a:endParaRPr>
+                    </a:p>
+                  </a:txBody>
+                  <a:tcPr marL="36000" marR="36000" marT="0" marB="0" anchor="ctr">
+                    <a:lnL w="12700" cap="flat" cmpd="sng" algn="ctr">
+                      <a:noFill/>
+                      <a:prstDash val="solid"/>
+                      <a:round/>
+                      <a:headEnd type="none" w="med" len="med"/>
+                      <a:tailEnd type="none" w="med" len="med"/>
+                    </a:lnL>
+                    <a:lnR w="12700" cap="flat" cmpd="sng" algn="ctr">
+                      <a:noFill/>
+                      <a:prstDash val="solid"/>
+                      <a:round/>
+                      <a:headEnd type="none" w="med" len="med"/>
+                      <a:tailEnd type="none" w="med" len="med"/>
+                    </a:lnR>
+                    <a:lnT w="6350" cap="flat" cmpd="sng" algn="ctr">
+                      <a:solidFill>
+                        <a:schemeClr val="bg1">
+                          <a:lumMod val="85000"/>
+                        </a:schemeClr>
+                      </a:solidFill>
+                      <a:prstDash val="solid"/>
+                      <a:round/>
+                      <a:headEnd type="none" w="med" len="med"/>
+                      <a:tailEnd type="none" w="med" len="med"/>
+                    </a:lnT>
+                    <a:lnB w="6350" cap="flat" cmpd="sng" algn="ctr">
+                      <a:solidFill>
+                        <a:schemeClr val="bg1">
+                          <a:lumMod val="85000"/>
+                        </a:schemeClr>
+                      </a:solidFill>
+                      <a:prstDash val="solid"/>
+                      <a:round/>
+                      <a:headEnd type="none" w="med" len="med"/>
+                      <a:tailEnd type="none" w="med" len="med"/>
+                    </a:lnB>
+                    <a:lnTlToBr w="12700" cmpd="sng">
+                      <a:noFill/>
+                      <a:prstDash val="solid"/>
+                    </a:lnTlToBr>
+                    <a:lnBlToTr w="12700" cmpd="sng">
+                      <a:noFill/>
+                      <a:prstDash val="solid"/>
+                    </a:lnBlToTr>
+                    <a:noFill/>
+                  </a:tcPr>
+                </a:tc>
+                <a:tc>
+                  <a:txBody>
+                    <a:bodyPr/>
+                    <a:lstStyle/>
+                    <a:p>
+                      <a:pPr marL="0" algn="l" defTabSz="914400" rtl="0" eaLnBrk="1" latinLnBrk="0" hangingPunct="1">
+                        <a:lnSpc>
+                          <a:spcPts val="1200"/>
+                        </a:lnSpc>
+                      </a:pPr>
+                      <a:r>
+                        <a:rPr lang="en-US" sz="600" b="0" i="0" kern="1200" dirty="0">
+                          <a:solidFill>
+                            <a:schemeClr val="tx1"/>
+                          </a:solidFill>
+                          <a:latin typeface="Fund Light" pitchFamily="2" charset="-78"/>
+                          <a:ea typeface="+mn-ea"/>
+                          <a:cs typeface="Fund Light" pitchFamily="2" charset="-78"/>
+                        </a:rPr>
+                        <a:t>q</a:t>
+                      </a:r>
+                    </a:p>
+                  </a:txBody>
+                  <a:tcPr marL="36000" marR="36000" marT="0" marB="0" anchor="b">
+                    <a:lnL w="12700" cmpd="sng">
+                      <a:noFill/>
+                    </a:lnL>
+                    <a:lnR w="12700" cap="flat" cmpd="sng" algn="ctr">
+                      <a:noFill/>
+                      <a:prstDash val="solid"/>
+                      <a:round/>
+                      <a:headEnd type="none" w="med" len="med"/>
+                      <a:tailEnd type="none" w="med" len="med"/>
+                    </a:lnR>
+                    <a:lnT w="6350" cap="flat" cmpd="sng" algn="ctr">
+                      <a:solidFill>
+                        <a:schemeClr val="bg1">
+                          <a:lumMod val="85000"/>
+                        </a:schemeClr>
+                      </a:solidFill>
+                      <a:prstDash val="solid"/>
+                      <a:round/>
+                      <a:headEnd type="none" w="med" len="med"/>
+                      <a:tailEnd type="none" w="med" len="med"/>
+                    </a:lnT>
+                    <a:lnB w="6350" cap="flat" cmpd="sng" algn="ctr">
+                      <a:solidFill>
+                        <a:schemeClr val="bg1">
+                          <a:lumMod val="85000"/>
+                        </a:schemeClr>
+                      </a:solidFill>
+                      <a:prstDash val="solid"/>
+                      <a:round/>
+                      <a:headEnd type="none" w="med" len="med"/>
+                      <a:tailEnd type="none" w="med" len="med"/>
+                    </a:lnB>
+                    <a:lnTlToBr w="12700" cmpd="sng">
+                      <a:noFill/>
+                      <a:prstDash val="solid"/>
+                    </a:lnTlToBr>
+                    <a:lnBlToTr w="12700" cmpd="sng">
+                      <a:noFill/>
+                      <a:prstDash val="solid"/>
+                    </a:lnBlToTr>
+                    <a:noFill/>
+                  </a:tcPr>
+                </a:tc>
+                <a:tc>
+                  <a:txBody>
+                    <a:bodyPr/>
+                    <a:lstStyle/>
+                    <a:p>
+                      <a:pPr marL="0" algn="l" defTabSz="914400" rtl="0" eaLnBrk="1" latinLnBrk="0" hangingPunct="1">
+                        <a:lnSpc>
+                          <a:spcPts val="1200"/>
+                        </a:lnSpc>
+                      </a:pPr>
+                      <a:r>
+                        <a:rPr lang="en-US" sz="600" b="0" i="0" kern="1200" dirty="0">
+                          <a:solidFill>
+                            <a:schemeClr val="tx1"/>
+                          </a:solidFill>
+                          <a:latin typeface="Fund Light" pitchFamily="2" charset="-78"/>
+                          <a:ea typeface="+mn-ea"/>
+                          <a:cs typeface="Fund Light" pitchFamily="2" charset="-78"/>
+                        </a:rPr>
+                        <a:t>q</a:t>
+                      </a:r>
+                    </a:p>
+                  </a:txBody>
+                  <a:tcPr marL="36000" marR="36000" marT="0" marB="0" anchor="ctr">
+                    <a:lnL w="12700" cap="flat" cmpd="sng" algn="ctr">
+                      <a:noFill/>
+                      <a:prstDash val="solid"/>
+                      <a:round/>
+                      <a:headEnd type="none" w="med" len="med"/>
+                      <a:tailEnd type="none" w="med" len="med"/>
+                    </a:lnL>
+                    <a:lnR w="12700" cap="flat" cmpd="sng" algn="ctr">
+                      <a:noFill/>
+                      <a:prstDash val="solid"/>
+                      <a:round/>
+                      <a:headEnd type="none" w="med" len="med"/>
+                      <a:tailEnd type="none" w="med" len="med"/>
+                    </a:lnR>
+                    <a:lnT w="6350" cap="flat" cmpd="sng" algn="ctr">
+                      <a:solidFill>
+                        <a:schemeClr val="bg1">
+                          <a:lumMod val="85000"/>
+                        </a:schemeClr>
+                      </a:solidFill>
+                      <a:prstDash val="solid"/>
+                      <a:round/>
+                      <a:headEnd type="none" w="med" len="med"/>
+                      <a:tailEnd type="none" w="med" len="med"/>
+                    </a:lnT>
+                    <a:lnB w="6350" cap="flat" cmpd="sng" algn="ctr">
+                      <a:solidFill>
+                        <a:schemeClr val="bg1">
+                          <a:lumMod val="85000"/>
+                        </a:schemeClr>
+                      </a:solidFill>
+                      <a:prstDash val="solid"/>
+                      <a:round/>
+                      <a:headEnd type="none" w="med" len="med"/>
+                      <a:tailEnd type="none" w="med" len="med"/>
+                    </a:lnB>
+                    <a:lnTlToBr w="12700" cmpd="sng">
+                      <a:noFill/>
+                      <a:prstDash val="solid"/>
+                    </a:lnTlToBr>
+                    <a:lnBlToTr w="12700" cmpd="sng">
+                      <a:noFill/>
+                      <a:prstDash val="solid"/>
+                    </a:lnBlToTr>
+                    <a:noFill/>
+                  </a:tcPr>
+                </a:tc>
+                <a:tc>
+                  <a:txBody>
+                    <a:bodyPr/>
+                    <a:lstStyle/>
+                    <a:p>
+                      <a:pPr marL="0" algn="l" defTabSz="914400" rtl="0" eaLnBrk="1" latinLnBrk="0" hangingPunct="1">
+                        <a:lnSpc>
+                          <a:spcPts val="1200"/>
+                        </a:lnSpc>
+                      </a:pPr>
+                      <a:r>
+                        <a:rPr lang="en-US" sz="600" b="0" i="0" kern="1200" dirty="0">
+                          <a:solidFill>
+                            <a:schemeClr val="tx1"/>
+                          </a:solidFill>
+                          <a:latin typeface="Fund Light" pitchFamily="2" charset="-78"/>
+                          <a:ea typeface="+mn-ea"/>
+                          <a:cs typeface="Fund Light" pitchFamily="2" charset="-78"/>
+                        </a:rPr>
+                        <a:t>q</a:t>
+                      </a:r>
+                    </a:p>
+                  </a:txBody>
+                  <a:tcPr marL="36000" marR="36000" marT="0" marB="0" anchor="ctr">
+                    <a:lnL w="12700" cap="flat" cmpd="sng" algn="ctr">
+                      <a:noFill/>
+                      <a:prstDash val="solid"/>
+                      <a:round/>
+                      <a:headEnd type="none" w="med" len="med"/>
+                      <a:tailEnd type="none" w="med" len="med"/>
+                    </a:lnL>
+                    <a:lnR w="12700" cap="flat" cmpd="sng" algn="ctr">
+                      <a:noFill/>
+                      <a:prstDash val="solid"/>
+                      <a:round/>
+                      <a:headEnd type="none" w="med" len="med"/>
+                      <a:tailEnd type="none" w="med" len="med"/>
+                    </a:lnR>
+                    <a:lnT w="6350" cap="flat" cmpd="sng" algn="ctr">
+                      <a:solidFill>
+                        <a:schemeClr val="bg1">
+                          <a:lumMod val="85000"/>
+                        </a:schemeClr>
+                      </a:solidFill>
+                      <a:prstDash val="solid"/>
+                      <a:round/>
+                      <a:headEnd type="none" w="med" len="med"/>
+                      <a:tailEnd type="none" w="med" len="med"/>
+                    </a:lnT>
+                    <a:lnB w="6350" cap="flat" cmpd="sng" algn="ctr">
+                      <a:solidFill>
+                        <a:schemeClr val="bg1">
+                          <a:lumMod val="85000"/>
+                        </a:schemeClr>
+                      </a:solidFill>
+                      <a:prstDash val="solid"/>
+                      <a:round/>
+                      <a:headEnd type="none" w="med" len="med"/>
+                      <a:tailEnd type="none" w="med" len="med"/>
+                    </a:lnB>
+                    <a:lnTlToBr w="12700" cmpd="sng">
+                      <a:noFill/>
+                      <a:prstDash val="solid"/>
+                    </a:lnTlToBr>
+                    <a:lnBlToTr w="12700" cmpd="sng">
+                      <a:noFill/>
+                      <a:prstDash val="solid"/>
+                    </a:lnBlToTr>
+                    <a:noFill/>
+                  </a:tcPr>
+                </a:tc>
+                <a:tc>
+                  <a:txBody>
+                    <a:bodyPr/>
+                    <a:lstStyle/>
+                    <a:p>
+                      <a:pPr marL="0" algn="l" defTabSz="914400" rtl="0" eaLnBrk="1" latinLnBrk="0" hangingPunct="1">
+                        <a:lnSpc>
+                          <a:spcPts val="1200"/>
+                        </a:lnSpc>
+                      </a:pPr>
+                      <a:r>
+                        <a:rPr lang="en-US" sz="600" b="0" i="0" kern="1200" dirty="0">
+                          <a:solidFill>
+                            <a:schemeClr val="tx1"/>
+                          </a:solidFill>
+                          <a:latin typeface="Fund Light" pitchFamily="2" charset="-78"/>
+                          <a:ea typeface="+mn-ea"/>
+                          <a:cs typeface="Fund Light" pitchFamily="2" charset="-78"/>
+                        </a:rPr>
+                        <a:t>q</a:t>
+                      </a:r>
+                    </a:p>
+                  </a:txBody>
+                  <a:tcPr marL="36000" marR="36000" marT="0" marB="0" anchor="ctr">
+                    <a:lnL w="12700" cap="flat" cmpd="sng" algn="ctr">
+                      <a:noFill/>
+                      <a:prstDash val="solid"/>
+                      <a:round/>
+                      <a:headEnd type="none" w="med" len="med"/>
+                      <a:tailEnd type="none" w="med" len="med"/>
+                    </a:lnL>
+                    <a:lnR w="12700" cap="flat" cmpd="sng" algn="ctr">
+                      <a:noFill/>
+                      <a:prstDash val="solid"/>
+                      <a:round/>
+                      <a:headEnd type="none" w="med" len="med"/>
+                      <a:tailEnd type="none" w="med" len="med"/>
+                    </a:lnR>
+                    <a:lnT w="6350" cap="flat" cmpd="sng" algn="ctr">
+                      <a:solidFill>
+                        <a:schemeClr val="bg1">
+                          <a:lumMod val="85000"/>
+                        </a:schemeClr>
+                      </a:solidFill>
+                      <a:prstDash val="solid"/>
+                      <a:round/>
+                      <a:headEnd type="none" w="med" len="med"/>
+                      <a:tailEnd type="none" w="med" len="med"/>
+                    </a:lnT>
+                    <a:lnB w="6350" cap="flat" cmpd="sng" algn="ctr">
+                      <a:solidFill>
+                        <a:schemeClr val="bg1">
+                          <a:lumMod val="85000"/>
+                        </a:schemeClr>
+                      </a:solidFill>
+                      <a:prstDash val="solid"/>
+                      <a:round/>
+                      <a:headEnd type="none" w="med" len="med"/>
+                      <a:tailEnd type="none" w="med" len="med"/>
+                    </a:lnB>
+                    <a:lnTlToBr w="12700" cmpd="sng">
+                      <a:noFill/>
+                      <a:prstDash val="solid"/>
+                    </a:lnTlToBr>
+                    <a:lnBlToTr w="12700" cmpd="sng">
+                      <a:noFill/>
+                      <a:prstDash val="solid"/>
+                    </a:lnBlToTr>
+                    <a:noFill/>
+                  </a:tcPr>
+                </a:tc>
+                <a:extLst>
+                  <a:ext uri="{0D108BD9-81ED-4DB2-BD59-A6C34878D82A}">
+                    <a16:rowId xmlns:a16="http://schemas.microsoft.com/office/drawing/2014/main" val="1961714469"/>
+                  </a:ext>
+                </a:extLst>
+              </a:tr>
+            </a:tbl>
+          </a:graphicData>
+        </a:graphic>
+      </p:graphicFrame>
     </p:spTree>
     <p:extLst>
       <p:ext uri="{BB962C8B-B14F-4D97-AF65-F5344CB8AC3E}">
